--- a/docs/marca/EDUVIAGT-marca.pptx
+++ b/docs/marca/EDUVIAGT-marca.pptx
@@ -3153,7 +3153,7 @@
       </p:sp>
       <p:sp>
         <p:nvSpPr>
-          <p:cNvPr id="4" name="Freeform"/>
+          <p:cNvPr id="4" name="Rectangle 3"/>
           <p:cNvSpPr/>
           <p:nvPr/>
         </p:nvSpPr>
@@ -3162,53 +3162,89 @@
             <a:off x="1051560" y="1783080"/>
             <a:ext cx="3200400" cy="3200400"/>
           </a:xfrm>
+          <a:prstGeom prst="rect">
+            <a:avLst/>
+          </a:prstGeom>
+          <a:solidFill>
+            <a:srgbClr val="18233A"/>
+          </a:solidFill>
+          <a:ln>
+            <a:noFill/>
+          </a:ln>
+        </p:spPr>
+        <p:style>
+          <a:lnRef idx="1">
+            <a:schemeClr val="accent1"/>
+          </a:lnRef>
+          <a:fillRef idx="3">
+            <a:schemeClr val="accent1"/>
+          </a:fillRef>
+          <a:effectRef idx="2">
+            <a:schemeClr val="accent1"/>
+          </a:effectRef>
+          <a:fontRef idx="minor">
+            <a:schemeClr val="lt1"/>
+          </a:fontRef>
+        </p:style>
+        <p:txBody>
+          <a:bodyPr rtlCol="0" anchor="ctr"/>
+          <a:lstStyle/>
+          <a:p>
+            <a:pPr algn="ctr"/>
+          </a:p>
+        </p:txBody>
+      </p:sp>
+      <p:sp>
+        <p:nvSpPr>
+          <p:cNvPr id="5" name="Freeform"/>
+          <p:cNvSpPr/>
+          <p:nvPr/>
+        </p:nvSpPr>
+        <p:spPr>
+          <a:xfrm>
+            <a:off x="1826656" y="2258139"/>
+            <a:ext cx="1700212" cy="2250281"/>
+          </a:xfrm>
           <a:custGeom>
             <a:avLst/>
             <a:gdLst/>
             <a:pathLst>
-              <a:path w="3200400" h="3200400">
+              <a:path w="1700212" h="2250281">
                 <a:moveTo>
-                  <a:pt x="725090" y="0"/>
+                  <a:pt x="0" y="0"/>
                 </a:moveTo>
                 <a:cubicBezTo>
-                  <a:pt x="324634" y="0"/>
-                  <a:pt x="0" y="324634"/>
-                  <a:pt x="0" y="725090"/>
-                </a:cubicBezTo>
-                <a:cubicBezTo>
-                  <a:pt x="0" y="2875765"/>
-                  <a:pt x="324634" y="3200400"/>
-                  <a:pt x="725090" y="3200400"/>
-                </a:cubicBezTo>
-                <a:cubicBezTo>
-                  <a:pt x="2875765" y="3200400"/>
-                  <a:pt x="3200400" y="2875765"/>
-                  <a:pt x="3200400" y="2475309"/>
-                </a:cubicBezTo>
-                <a:cubicBezTo>
-                  <a:pt x="3200400" y="324634"/>
-                  <a:pt x="2875765" y="0"/>
-                  <a:pt x="2475309" y="0"/>
+                  <a:pt x="0" y="0"/>
+                  <a:pt x="1175146" y="0"/>
+                  <a:pt x="1175146" y="0"/>
+                </a:cubicBezTo>
+                <a:cubicBezTo>
+                  <a:pt x="1175146" y="0"/>
+                  <a:pt x="1700212" y="525065"/>
+                  <a:pt x="1700212" y="525065"/>
+                </a:cubicBezTo>
+                <a:cubicBezTo>
+                  <a:pt x="1700212" y="525065"/>
+                  <a:pt x="1700212" y="2250281"/>
+                  <a:pt x="1700212" y="2250281"/>
+                </a:cubicBezTo>
+                <a:cubicBezTo>
+                  <a:pt x="1700212" y="2250281"/>
+                  <a:pt x="0" y="2250281"/>
+                  <a:pt x="0" y="2250281"/>
+                </a:cubicBezTo>
+                <a:cubicBezTo>
+                  <a:pt x="0" y="2250281"/>
+                  <a:pt x="0" y="0"/>
+                  <a:pt x="0" y="0"/>
                 </a:cubicBezTo>
                 <a:close/>
               </a:path>
             </a:pathLst>
           </a:custGeom>
-          <a:gradFill rotWithShape="1" flip="none">
-            <a:gsLst>
-              <a:gs pos="0">
-                <a:srgbClr val="3D8EC7">
-                  <a:alpha val="100000"/>
-                </a:srgbClr>
-              </a:gs>
-              <a:gs pos="100000">
-                <a:srgbClr val="0F3D63">
-                  <a:alpha val="100000"/>
-                </a:srgbClr>
-              </a:gs>
-            </a:gsLst>
-            <a:lin ang="2700000" scaled="1"/>
-          </a:gradFill>
+          <a:solidFill>
+            <a:srgbClr val="F5F7FA"/>
+          </a:solidFill>
           <a:ln w="12700">
             <a:noFill/>
           </a:ln>
@@ -3216,135 +3252,135 @@
       </p:sp>
       <p:sp>
         <p:nvSpPr>
-          <p:cNvPr id="5" name="Freeform"/>
-          <p:cNvSpPr/>
-          <p:nvPr/>
-        </p:nvSpPr>
-        <p:spPr>
-          <a:xfrm>
-            <a:off x="2026681" y="2608183"/>
-            <a:ext cx="1250156" cy="1400175"/>
+          <p:cNvPr id="6" name="Freeform"/>
+          <p:cNvSpPr/>
+          <p:nvPr/>
+        </p:nvSpPr>
+        <p:spPr>
+          <a:xfrm>
+            <a:off x="3001803" y="2258139"/>
+            <a:ext cx="525065" cy="525065"/>
           </a:xfrm>
           <a:custGeom>
             <a:avLst/>
             <a:gdLst/>
             <a:pathLst>
-              <a:path w="1250156" h="1400175">
+              <a:path w="525065" h="525065">
                 <a:moveTo>
-                  <a:pt x="0" y="225028"/>
+                  <a:pt x="0" y="0"/>
                 </a:moveTo>
                 <a:cubicBezTo>
-                  <a:pt x="0" y="225028"/>
-                  <a:pt x="625078" y="1400175"/>
-                  <a:pt x="625078" y="1400175"/>
-                </a:cubicBezTo>
-                <a:cubicBezTo>
-                  <a:pt x="625078" y="1400175"/>
-                  <a:pt x="1250156" y="0"/>
-                  <a:pt x="1250156" y="0"/>
+                  <a:pt x="0" y="0"/>
+                  <a:pt x="525065" y="525065"/>
+                  <a:pt x="525065" y="525065"/>
+                </a:cubicBezTo>
+                <a:cubicBezTo>
+                  <a:pt x="525065" y="525065"/>
+                  <a:pt x="0" y="525065"/>
+                  <a:pt x="0" y="525065"/>
+                </a:cubicBezTo>
+                <a:cubicBezTo>
+                  <a:pt x="0" y="525065"/>
+                  <a:pt x="0" y="0"/>
+                  <a:pt x="0" y="0"/>
+                </a:cubicBezTo>
+                <a:close/>
+              </a:path>
+            </a:pathLst>
+          </a:custGeom>
+          <a:solidFill>
+            <a:srgbClr val="D4A72C"/>
+          </a:solidFill>
+          <a:ln w="12700">
+            <a:noFill/>
+          </a:ln>
+        </p:spPr>
+      </p:sp>
+      <p:sp>
+        <p:nvSpPr>
+          <p:cNvPr id="7" name="Freeform"/>
+          <p:cNvSpPr/>
+          <p:nvPr/>
+        </p:nvSpPr>
+        <p:spPr>
+          <a:xfrm>
+            <a:off x="3001803" y="2258139"/>
+            <a:ext cx="525065" cy="525065"/>
+          </a:xfrm>
+          <a:custGeom>
+            <a:avLst/>
+            <a:gdLst/>
+            <a:pathLst>
+              <a:path w="525065" h="525065">
+                <a:moveTo>
+                  <a:pt x="0" y="0"/>
+                </a:moveTo>
+                <a:cubicBezTo>
+                  <a:pt x="0" y="0"/>
+                  <a:pt x="0" y="525065"/>
+                  <a:pt x="0" y="525065"/>
+                </a:cubicBezTo>
+                <a:cubicBezTo>
+                  <a:pt x="0" y="525065"/>
+                  <a:pt x="525065" y="525065"/>
+                  <a:pt x="525065" y="525065"/>
                 </a:cubicBezTo>
                 <a:close/>
               </a:path>
             </a:pathLst>
           </a:custGeom>
           <a:noFill/>
-          <a:ln w="812800">
+          <a:ln w="203200" cap="square">
             <a:solidFill>
-              <a:srgbClr val="FFFFFF"/>
+              <a:srgbClr val="18233A"/>
             </a:solidFill>
-            <a:round/>
-          </a:ln>
-        </p:spPr>
-      </p:sp>
-      <p:sp>
-        <p:nvSpPr>
-          <p:cNvPr id="6" name="Freeform"/>
-          <p:cNvSpPr/>
-          <p:nvPr/>
-        </p:nvSpPr>
-        <p:spPr>
-          <a:xfrm>
-            <a:off x="2726769" y="2608183"/>
-            <a:ext cx="550068" cy="1231403"/>
+          </a:ln>
+        </p:spPr>
+      </p:sp>
+      <p:sp>
+        <p:nvSpPr>
+          <p:cNvPr id="8" name="Freeform"/>
+          <p:cNvSpPr/>
+          <p:nvPr/>
+        </p:nvSpPr>
+        <p:spPr>
+          <a:xfrm>
+            <a:off x="2176700" y="3183255"/>
+            <a:ext cx="950118" cy="700087"/>
           </a:xfrm>
           <a:custGeom>
             <a:avLst/>
             <a:gdLst/>
             <a:pathLst>
-              <a:path w="550068" h="1231403">
+              <a:path w="950118" h="700087">
                 <a:moveTo>
-                  <a:pt x="0" y="1231403"/>
+                  <a:pt x="0" y="400049"/>
                 </a:moveTo>
                 <a:cubicBezTo>
-                  <a:pt x="0" y="1231403"/>
-                  <a:pt x="550068" y="0"/>
-                  <a:pt x="550068" y="0"/>
-                </a:cubicBezTo>
+                  <a:pt x="0" y="400049"/>
+                  <a:pt x="300037" y="700087"/>
+                  <a:pt x="300037" y="700087"/>
+                </a:cubicBezTo>
+                <a:cubicBezTo>
+                  <a:pt x="300037" y="700087"/>
+                  <a:pt x="950118" y="0"/>
+                  <a:pt x="950118" y="0"/>
+                </a:cubicBezTo>
+                <a:close/>
               </a:path>
             </a:pathLst>
           </a:custGeom>
           <a:noFill/>
-          <a:ln w="812800">
+          <a:ln w="558800" cap="square">
             <a:solidFill>
-              <a:srgbClr val="D4A72C"/>
+              <a:srgbClr val="18233A"/>
             </a:solidFill>
           </a:ln>
         </p:spPr>
       </p:sp>
       <p:sp>
         <p:nvSpPr>
-          <p:cNvPr id="7" name="Freeform"/>
-          <p:cNvSpPr/>
-          <p:nvPr/>
-        </p:nvSpPr>
-        <p:spPr>
-          <a:xfrm>
-            <a:off x="1989177" y="4270890"/>
-            <a:ext cx="1325165" cy="162520"/>
-          </a:xfrm>
-          <a:custGeom>
-            <a:avLst/>
-            <a:gdLst/>
-            <a:pathLst>
-              <a:path w="1325165" h="162520">
-                <a:moveTo>
-                  <a:pt x="81260" y="0"/>
-                </a:moveTo>
-                <a:cubicBezTo>
-                  <a:pt x="36381" y="0"/>
-                  <a:pt x="0" y="36381"/>
-                  <a:pt x="0" y="81260"/>
-                </a:cubicBezTo>
-                <a:cubicBezTo>
-                  <a:pt x="0" y="126138"/>
-                  <a:pt x="36381" y="162520"/>
-                  <a:pt x="81260" y="162520"/>
-                </a:cubicBezTo>
-                <a:cubicBezTo>
-                  <a:pt x="1288783" y="162520"/>
-                  <a:pt x="1325165" y="126138"/>
-                  <a:pt x="1325165" y="81260"/>
-                </a:cubicBezTo>
-                <a:cubicBezTo>
-                  <a:pt x="1325165" y="36381"/>
-                  <a:pt x="1288783" y="0"/>
-                  <a:pt x="1243904" y="0"/>
-                </a:cubicBezTo>
-                <a:close/>
-              </a:path>
-            </a:pathLst>
-          </a:custGeom>
-          <a:solidFill>
-            <a:srgbClr val="D4A72C"/>
-          </a:solidFill>
-          <a:ln w="12700">
-            <a:noFill/>
-          </a:ln>
-        </p:spPr>
-      </p:sp>
-      <p:sp>
-        <p:nvSpPr>
-          <p:cNvPr id="8" name="TextBox 7"/>
+          <p:cNvPr id="9" name="TextBox 8"/>
           <p:cNvSpPr txBox="1"/>
           <p:nvPr/>
         </p:nvSpPr>
@@ -3381,7 +3417,7 @@
       </p:sp>
       <p:sp>
         <p:nvSpPr>
-          <p:cNvPr id="9" name="TextBox 8"/>
+          <p:cNvPr id="10" name="TextBox 9"/>
           <p:cNvSpPr txBox="1"/>
           <p:nvPr/>
         </p:nvSpPr>
@@ -3418,7 +3454,7 @@
       </p:sp>
       <p:sp>
         <p:nvSpPr>
-          <p:cNvPr id="10" name="Rectangle 9"/>
+          <p:cNvPr id="11" name="Rectangle 10"/>
           <p:cNvSpPr/>
           <p:nvPr/>
         </p:nvSpPr>
@@ -3447,7 +3483,7 @@
       </p:sp>
       <p:sp>
         <p:nvSpPr>
-          <p:cNvPr id="11" name="TextBox 10"/>
+          <p:cNvPr id="12" name="TextBox 11"/>
           <p:cNvSpPr txBox="1"/>
           <p:nvPr/>
         </p:nvSpPr>
@@ -3477,14 +3513,14 @@
                 <a:ea typeface="Segoe UI"/>
                 <a:cs typeface="Segoe UI"/>
               </a:rPr>
-              <a:t>Rediseño de marca · «La Vía»</a:t>
+              <a:t>Rediseño de marca · «Expediente»</a:t>
             </a:r>
           </a:p>
         </p:txBody>
       </p:sp>
       <p:sp>
         <p:nvSpPr>
-          <p:cNvPr id="12" name="TextBox 11"/>
+          <p:cNvPr id="13" name="TextBox 12"/>
           <p:cNvSpPr txBox="1"/>
           <p:nvPr/>
         </p:nvSpPr>
@@ -3598,7 +3634,7 @@
                 <a:ea typeface="Segoe UI"/>
                 <a:cs typeface="Segoe UI"/>
               </a:rPr>
-              <a:t>Concepto: «La Vía»</a:t>
+              <a:t>Concepto: «Expediente»</a:t>
             </a:r>
           </a:p>
         </p:txBody>
@@ -3664,14 +3700,14 @@
                 <a:ea typeface="Segoe UI"/>
                 <a:cs typeface="Segoe UI"/>
               </a:rPr>
-              <a:t>El camino de la educación que lleva a la beca</a:t>
+              <a:t>La hoja que se entrega, se revisa y se aprueba</a:t>
             </a:r>
           </a:p>
         </p:txBody>
       </p:sp>
       <p:sp>
         <p:nvSpPr>
-          <p:cNvPr id="6" name="Freeform"/>
+          <p:cNvPr id="6" name="Rectangle 5"/>
           <p:cNvSpPr/>
           <p:nvPr/>
         </p:nvSpPr>
@@ -3680,53 +3716,89 @@
             <a:off x="777240" y="2057400"/>
             <a:ext cx="3291840" cy="3291839"/>
           </a:xfrm>
+          <a:prstGeom prst="rect">
+            <a:avLst/>
+          </a:prstGeom>
+          <a:solidFill>
+            <a:srgbClr val="18233A"/>
+          </a:solidFill>
+          <a:ln>
+            <a:noFill/>
+          </a:ln>
+        </p:spPr>
+        <p:style>
+          <a:lnRef idx="1">
+            <a:schemeClr val="accent1"/>
+          </a:lnRef>
+          <a:fillRef idx="3">
+            <a:schemeClr val="accent1"/>
+          </a:fillRef>
+          <a:effectRef idx="2">
+            <a:schemeClr val="accent1"/>
+          </a:effectRef>
+          <a:fontRef idx="minor">
+            <a:schemeClr val="lt1"/>
+          </a:fontRef>
+        </p:style>
+        <p:txBody>
+          <a:bodyPr rtlCol="0" anchor="ctr"/>
+          <a:lstStyle/>
+          <a:p>
+            <a:pPr algn="ctr"/>
+          </a:p>
+        </p:txBody>
+      </p:sp>
+      <p:sp>
+        <p:nvSpPr>
+          <p:cNvPr id="7" name="Freeform"/>
+          <p:cNvSpPr/>
+          <p:nvPr/>
+        </p:nvSpPr>
+        <p:spPr>
+          <a:xfrm>
+            <a:off x="1574482" y="2546032"/>
+            <a:ext cx="1748790" cy="2314575"/>
+          </a:xfrm>
           <a:custGeom>
             <a:avLst/>
             <a:gdLst/>
             <a:pathLst>
-              <a:path w="3291840" h="3291839">
+              <a:path w="1748790" h="2314575">
                 <a:moveTo>
-                  <a:pt x="745807" y="0"/>
+                  <a:pt x="0" y="0"/>
                 </a:moveTo>
                 <a:cubicBezTo>
-                  <a:pt x="333909" y="0"/>
-                  <a:pt x="0" y="333909"/>
-                  <a:pt x="0" y="745807"/>
-                </a:cubicBezTo>
-                <a:cubicBezTo>
-                  <a:pt x="0" y="2957929"/>
-                  <a:pt x="333909" y="3291839"/>
-                  <a:pt x="745807" y="3291839"/>
-                </a:cubicBezTo>
-                <a:cubicBezTo>
-                  <a:pt x="2957930" y="3291839"/>
-                  <a:pt x="3291840" y="2957929"/>
-                  <a:pt x="3291840" y="2546031"/>
-                </a:cubicBezTo>
-                <a:cubicBezTo>
-                  <a:pt x="3291840" y="333909"/>
-                  <a:pt x="2957930" y="0"/>
-                  <a:pt x="2546032" y="0"/>
+                  <a:pt x="0" y="0"/>
+                  <a:pt x="1208722" y="0"/>
+                  <a:pt x="1208722" y="0"/>
+                </a:cubicBezTo>
+                <a:cubicBezTo>
+                  <a:pt x="1208722" y="0"/>
+                  <a:pt x="1748790" y="540067"/>
+                  <a:pt x="1748790" y="540067"/>
+                </a:cubicBezTo>
+                <a:cubicBezTo>
+                  <a:pt x="1748790" y="540067"/>
+                  <a:pt x="1748790" y="2314575"/>
+                  <a:pt x="1748790" y="2314575"/>
+                </a:cubicBezTo>
+                <a:cubicBezTo>
+                  <a:pt x="1748790" y="2314575"/>
+                  <a:pt x="0" y="2314575"/>
+                  <a:pt x="0" y="2314575"/>
+                </a:cubicBezTo>
+                <a:cubicBezTo>
+                  <a:pt x="0" y="2314575"/>
+                  <a:pt x="0" y="0"/>
+                  <a:pt x="0" y="0"/>
                 </a:cubicBezTo>
                 <a:close/>
               </a:path>
             </a:pathLst>
           </a:custGeom>
-          <a:gradFill rotWithShape="1" flip="none">
-            <a:gsLst>
-              <a:gs pos="0">
-                <a:srgbClr val="3D8EC7">
-                  <a:alpha val="100000"/>
-                </a:srgbClr>
-              </a:gs>
-              <a:gs pos="100000">
-                <a:srgbClr val="0F3D63">
-                  <a:alpha val="100000"/>
-                </a:srgbClr>
-              </a:gs>
-            </a:gsLst>
-            <a:lin ang="2700000" scaled="1"/>
-          </a:gradFill>
+          <a:solidFill>
+            <a:srgbClr val="F5F7FA"/>
+          </a:solidFill>
           <a:ln w="12700">
             <a:noFill/>
           </a:ln>
@@ -3734,135 +3806,135 @@
       </p:sp>
       <p:sp>
         <p:nvSpPr>
-          <p:cNvPr id="7" name="Freeform"/>
-          <p:cNvSpPr/>
-          <p:nvPr/>
-        </p:nvSpPr>
-        <p:spPr>
-          <a:xfrm>
-            <a:off x="1780222" y="2906077"/>
-            <a:ext cx="1285875" cy="1440180"/>
+          <p:cNvPr id="8" name="Freeform"/>
+          <p:cNvSpPr/>
+          <p:nvPr/>
+        </p:nvSpPr>
+        <p:spPr>
+          <a:xfrm>
+            <a:off x="2783205" y="2546032"/>
+            <a:ext cx="540067" cy="540067"/>
           </a:xfrm>
           <a:custGeom>
             <a:avLst/>
             <a:gdLst/>
             <a:pathLst>
-              <a:path w="1285875" h="1440180">
+              <a:path w="540067" h="540067">
                 <a:moveTo>
-                  <a:pt x="0" y="231457"/>
+                  <a:pt x="0" y="0"/>
                 </a:moveTo>
                 <a:cubicBezTo>
-                  <a:pt x="0" y="231457"/>
-                  <a:pt x="642937" y="1440180"/>
-                  <a:pt x="642937" y="1440180"/>
-                </a:cubicBezTo>
-                <a:cubicBezTo>
-                  <a:pt x="642937" y="1440180"/>
-                  <a:pt x="1285875" y="0"/>
-                  <a:pt x="1285875" y="0"/>
+                  <a:pt x="0" y="0"/>
+                  <a:pt x="540067" y="540067"/>
+                  <a:pt x="540067" y="540067"/>
+                </a:cubicBezTo>
+                <a:cubicBezTo>
+                  <a:pt x="540067" y="540067"/>
+                  <a:pt x="0" y="540067"/>
+                  <a:pt x="0" y="540067"/>
+                </a:cubicBezTo>
+                <a:cubicBezTo>
+                  <a:pt x="0" y="540067"/>
+                  <a:pt x="0" y="0"/>
+                  <a:pt x="0" y="0"/>
+                </a:cubicBezTo>
+                <a:close/>
+              </a:path>
+            </a:pathLst>
+          </a:custGeom>
+          <a:solidFill>
+            <a:srgbClr val="D4A72C"/>
+          </a:solidFill>
+          <a:ln w="12700">
+            <a:noFill/>
+          </a:ln>
+        </p:spPr>
+      </p:sp>
+      <p:sp>
+        <p:nvSpPr>
+          <p:cNvPr id="9" name="Freeform"/>
+          <p:cNvSpPr/>
+          <p:nvPr/>
+        </p:nvSpPr>
+        <p:spPr>
+          <a:xfrm>
+            <a:off x="2783205" y="2546032"/>
+            <a:ext cx="540067" cy="540067"/>
+          </a:xfrm>
+          <a:custGeom>
+            <a:avLst/>
+            <a:gdLst/>
+            <a:pathLst>
+              <a:path w="540067" h="540067">
+                <a:moveTo>
+                  <a:pt x="0" y="0"/>
+                </a:moveTo>
+                <a:cubicBezTo>
+                  <a:pt x="0" y="0"/>
+                  <a:pt x="0" y="540067"/>
+                  <a:pt x="0" y="540067"/>
+                </a:cubicBezTo>
+                <a:cubicBezTo>
+                  <a:pt x="0" y="540067"/>
+                  <a:pt x="540067" y="540067"/>
+                  <a:pt x="540067" y="540067"/>
                 </a:cubicBezTo>
                 <a:close/>
               </a:path>
             </a:pathLst>
           </a:custGeom>
           <a:noFill/>
-          <a:ln w="812800">
+          <a:ln w="203200" cap="square">
             <a:solidFill>
-              <a:srgbClr val="FFFFFF"/>
+              <a:srgbClr val="18233A"/>
             </a:solidFill>
-            <a:round/>
-          </a:ln>
-        </p:spPr>
-      </p:sp>
-      <p:sp>
-        <p:nvSpPr>
-          <p:cNvPr id="8" name="Freeform"/>
-          <p:cNvSpPr/>
-          <p:nvPr/>
-        </p:nvSpPr>
-        <p:spPr>
-          <a:xfrm>
-            <a:off x="2500312" y="2906077"/>
-            <a:ext cx="565785" cy="1266586"/>
+          </a:ln>
+        </p:spPr>
+      </p:sp>
+      <p:sp>
+        <p:nvSpPr>
+          <p:cNvPr id="10" name="Freeform"/>
+          <p:cNvSpPr/>
+          <p:nvPr/>
+        </p:nvSpPr>
+        <p:spPr>
+          <a:xfrm>
+            <a:off x="1934527" y="3497580"/>
+            <a:ext cx="977265" cy="720090"/>
           </a:xfrm>
           <a:custGeom>
             <a:avLst/>
             <a:gdLst/>
             <a:pathLst>
-              <a:path w="565785" h="1266586">
+              <a:path w="977265" h="720090">
                 <a:moveTo>
-                  <a:pt x="0" y="1266586"/>
+                  <a:pt x="0" y="411479"/>
                 </a:moveTo>
                 <a:cubicBezTo>
-                  <a:pt x="0" y="1266586"/>
-                  <a:pt x="565785" y="0"/>
-                  <a:pt x="565785" y="0"/>
-                </a:cubicBezTo>
+                  <a:pt x="0" y="411479"/>
+                  <a:pt x="308609" y="720090"/>
+                  <a:pt x="308609" y="720090"/>
+                </a:cubicBezTo>
+                <a:cubicBezTo>
+                  <a:pt x="308609" y="720090"/>
+                  <a:pt x="977265" y="0"/>
+                  <a:pt x="977265" y="0"/>
+                </a:cubicBezTo>
+                <a:close/>
               </a:path>
             </a:pathLst>
           </a:custGeom>
           <a:noFill/>
-          <a:ln w="812800">
+          <a:ln w="558800" cap="square">
             <a:solidFill>
-              <a:srgbClr val="D4A72C"/>
+              <a:srgbClr val="18233A"/>
             </a:solidFill>
           </a:ln>
         </p:spPr>
       </p:sp>
       <p:sp>
         <p:nvSpPr>
-          <p:cNvPr id="9" name="Freeform"/>
-          <p:cNvSpPr/>
-          <p:nvPr/>
-        </p:nvSpPr>
-        <p:spPr>
-          <a:xfrm>
-            <a:off x="1741646" y="4616291"/>
-            <a:ext cx="1363027" cy="167163"/>
-          </a:xfrm>
-          <a:custGeom>
-            <a:avLst/>
-            <a:gdLst/>
-            <a:pathLst>
-              <a:path w="1363027" h="167163">
-                <a:moveTo>
-                  <a:pt x="83581" y="0"/>
-                </a:moveTo>
-                <a:cubicBezTo>
-                  <a:pt x="37420" y="0"/>
-                  <a:pt x="0" y="37420"/>
-                  <a:pt x="0" y="83581"/>
-                </a:cubicBezTo>
-                <a:cubicBezTo>
-                  <a:pt x="0" y="129742"/>
-                  <a:pt x="37420" y="167163"/>
-                  <a:pt x="83581" y="167163"/>
-                </a:cubicBezTo>
-                <a:cubicBezTo>
-                  <a:pt x="1325606" y="167163"/>
-                  <a:pt x="1363027" y="129742"/>
-                  <a:pt x="1363027" y="83581"/>
-                </a:cubicBezTo>
-                <a:cubicBezTo>
-                  <a:pt x="1363027" y="37420"/>
-                  <a:pt x="1325606" y="0"/>
-                  <a:pt x="1279445" y="0"/>
-                </a:cubicBezTo>
-                <a:close/>
-              </a:path>
-            </a:pathLst>
-          </a:custGeom>
-          <a:solidFill>
-            <a:srgbClr val="D4A72C"/>
-          </a:solidFill>
-          <a:ln w="12700">
-            <a:noFill/>
-          </a:ln>
-        </p:spPr>
-      </p:sp>
-      <p:sp>
-        <p:nvSpPr>
-          <p:cNvPr id="10" name="TextBox 9"/>
+          <p:cNvPr id="11" name="TextBox 10"/>
           <p:cNvSpPr txBox="1"/>
           <p:nvPr/>
         </p:nvSpPr>
@@ -3892,14 +3964,14 @@
                 <a:ea typeface="Segoe UI"/>
                 <a:cs typeface="Segoe UI"/>
               </a:rPr>
-              <a:t>La marca es una «V» que asciende.</a:t>
+              <a:t>La marca es el expediente de una beca.</a:t>
             </a:r>
           </a:p>
         </p:txBody>
       </p:sp>
       <p:sp>
         <p:nvSpPr>
-          <p:cNvPr id="11" name="TextBox 10"/>
+          <p:cNvPr id="12" name="TextBox 11"/>
           <p:cNvSpPr txBox="1"/>
           <p:nvPr/>
         </p:nvSpPr>
@@ -3929,14 +4001,14 @@
                 <a:ea typeface="Segoe UI"/>
                 <a:cs typeface="Segoe UI"/>
               </a:rPr>
-              <a:t>Es la vía —el camino— que cada estudiante recorre desde su comunidad hasta su beca. Las dos ramas del trazo forman, a la vez, una marca de aprobación (✓): EDUVIAGT convierte una oportunidad en un «sí». El brazo en oro señala la meta y la barra inferior marca el punto de partida.</a:t>
+              <a:t>Es la hoja que cada estudiante entrega y que el sistema revisa: el expediente. La esquina doblada señala un caso abierto dentro del proceso; la palomita sellada marca la beca aprobada. Todo se construye con bloques planos, esquinas a 90° y trazos gruesos —sin degradados ni efectos—, igual que el resto del sistema.</a:t>
             </a:r>
           </a:p>
         </p:txBody>
       </p:sp>
       <p:sp>
         <p:nvSpPr>
-          <p:cNvPr id="12" name="Rounded Rectangle 11"/>
+          <p:cNvPr id="13" name="Rounded Rectangle 12"/>
           <p:cNvSpPr/>
           <p:nvPr/>
         </p:nvSpPr>
@@ -3965,7 +4037,7 @@
       </p:sp>
       <p:sp>
         <p:nvSpPr>
-          <p:cNvPr id="13" name="Rounded Rectangle 12"/>
+          <p:cNvPr id="14" name="Rounded Rectangle 13"/>
           <p:cNvSpPr/>
           <p:nvPr/>
         </p:nvSpPr>
@@ -3994,7 +4066,7 @@
       </p:sp>
       <p:sp>
         <p:nvSpPr>
-          <p:cNvPr id="14" name="Rectangle 13"/>
+          <p:cNvPr id="15" name="Rectangle 14"/>
           <p:cNvSpPr/>
           <p:nvPr/>
         </p:nvSpPr>
@@ -4023,7 +4095,7 @@
       </p:sp>
       <p:sp>
         <p:nvSpPr>
-          <p:cNvPr id="15" name="TextBox 14"/>
+          <p:cNvPr id="16" name="TextBox 15"/>
           <p:cNvSpPr txBox="1"/>
           <p:nvPr/>
         </p:nvSpPr>
@@ -4053,14 +4125,14 @@
                 <a:ea typeface="Segoe UI"/>
                 <a:cs typeface="Segoe UI"/>
               </a:rPr>
-              <a:t>Camino que asciende</a:t>
+              <a:t>El expediente</a:t>
             </a:r>
           </a:p>
         </p:txBody>
       </p:sp>
       <p:sp>
         <p:nvSpPr>
-          <p:cNvPr id="16" name="TextBox 15"/>
+          <p:cNvPr id="17" name="TextBox 16"/>
           <p:cNvSpPr txBox="1"/>
           <p:nvPr/>
         </p:nvSpPr>
@@ -4090,14 +4162,14 @@
                 <a:ea typeface="Segoe UI"/>
                 <a:cs typeface="Segoe UI"/>
               </a:rPr>
-              <a:t>La «V» es la vía hacia la beca.</a:t>
+              <a:t>La hoja que el estudiante entrega.</a:t>
             </a:r>
           </a:p>
         </p:txBody>
       </p:sp>
       <p:sp>
         <p:nvSpPr>
-          <p:cNvPr id="17" name="Rounded Rectangle 16"/>
+          <p:cNvPr id="18" name="Rounded Rectangle 17"/>
           <p:cNvSpPr/>
           <p:nvPr/>
         </p:nvSpPr>
@@ -4126,7 +4198,7 @@
       </p:sp>
       <p:sp>
         <p:nvSpPr>
-          <p:cNvPr id="18" name="Rounded Rectangle 17"/>
+          <p:cNvPr id="19" name="Rounded Rectangle 18"/>
           <p:cNvSpPr/>
           <p:nvPr/>
         </p:nvSpPr>
@@ -4155,7 +4227,7 @@
       </p:sp>
       <p:sp>
         <p:nvSpPr>
-          <p:cNvPr id="19" name="Rectangle 18"/>
+          <p:cNvPr id="20" name="Rectangle 19"/>
           <p:cNvSpPr/>
           <p:nvPr/>
         </p:nvSpPr>
@@ -4184,7 +4256,7 @@
       </p:sp>
       <p:sp>
         <p:nvSpPr>
-          <p:cNvPr id="20" name="TextBox 19"/>
+          <p:cNvPr id="21" name="TextBox 20"/>
           <p:cNvSpPr txBox="1"/>
           <p:nvPr/>
         </p:nvSpPr>
@@ -4214,14 +4286,14 @@
                 <a:ea typeface="Segoe UI"/>
                 <a:cs typeface="Segoe UI"/>
               </a:rPr>
-              <a:t>Marca de aprobación</a:t>
+              <a:t>Esquina doblada</a:t>
             </a:r>
           </a:p>
         </p:txBody>
       </p:sp>
       <p:sp>
         <p:nvSpPr>
-          <p:cNvPr id="21" name="TextBox 20"/>
+          <p:cNvPr id="22" name="TextBox 21"/>
           <p:cNvSpPr txBox="1"/>
           <p:nvPr/>
         </p:nvSpPr>
@@ -4251,14 +4323,14 @@
                 <a:ea typeface="Segoe UI"/>
                 <a:cs typeface="Segoe UI"/>
               </a:rPr>
-              <a:t>El trazo también lee como ✓.</a:t>
+              <a:t>Un caso abierto dentro del sistema.</a:t>
             </a:r>
           </a:p>
         </p:txBody>
       </p:sp>
       <p:sp>
         <p:nvSpPr>
-          <p:cNvPr id="22" name="Rounded Rectangle 21"/>
+          <p:cNvPr id="23" name="Rounded Rectangle 22"/>
           <p:cNvSpPr/>
           <p:nvPr/>
         </p:nvSpPr>
@@ -4287,7 +4359,7 @@
       </p:sp>
       <p:sp>
         <p:nvSpPr>
-          <p:cNvPr id="23" name="Rounded Rectangle 22"/>
+          <p:cNvPr id="24" name="Rounded Rectangle 23"/>
           <p:cNvSpPr/>
           <p:nvPr/>
         </p:nvSpPr>
@@ -4316,7 +4388,7 @@
       </p:sp>
       <p:sp>
         <p:nvSpPr>
-          <p:cNvPr id="24" name="Rectangle 23"/>
+          <p:cNvPr id="25" name="Rectangle 24"/>
           <p:cNvSpPr/>
           <p:nvPr/>
         </p:nvSpPr>
@@ -4345,7 +4417,7 @@
       </p:sp>
       <p:sp>
         <p:nvSpPr>
-          <p:cNvPr id="25" name="TextBox 24"/>
+          <p:cNvPr id="26" name="TextBox 25"/>
           <p:cNvSpPr txBox="1"/>
           <p:nvPr/>
         </p:nvSpPr>
@@ -4375,14 +4447,14 @@
                 <a:ea typeface="Segoe UI"/>
                 <a:cs typeface="Segoe UI"/>
               </a:rPr>
-              <a:t>Oro = la meta</a:t>
+              <a:t>Palomita = aprobado</a:t>
             </a:r>
           </a:p>
         </p:txBody>
       </p:sp>
       <p:sp>
         <p:nvSpPr>
-          <p:cNvPr id="26" name="TextBox 25"/>
+          <p:cNvPr id="27" name="TextBox 26"/>
           <p:cNvSpPr txBox="1"/>
           <p:nvPr/>
         </p:nvSpPr>
@@ -4412,7 +4484,7 @@
                 <a:ea typeface="Segoe UI"/>
                 <a:cs typeface="Segoe UI"/>
               </a:rPr>
-              <a:t>El brazo dorado señala el logro.</a:t>
+              <a:t>El oro marca la beca otorgada.</a:t>
             </a:r>
           </a:p>
         </p:txBody>
@@ -5555,7 +5627,7 @@
       </p:sp>
       <p:sp>
         <p:nvSpPr>
-          <p:cNvPr id="40" name="Freeform"/>
+          <p:cNvPr id="40" name="Rectangle 39"/>
           <p:cNvSpPr/>
           <p:nvPr/>
         </p:nvSpPr>
@@ -5564,53 +5636,89 @@
             <a:off x="868680" y="1965960"/>
             <a:ext cx="3383280" cy="3383279"/>
           </a:xfrm>
+          <a:prstGeom prst="rect">
+            <a:avLst/>
+          </a:prstGeom>
+          <a:solidFill>
+            <a:srgbClr val="18233A"/>
+          </a:solidFill>
+          <a:ln>
+            <a:noFill/>
+          </a:ln>
+        </p:spPr>
+        <p:style>
+          <a:lnRef idx="1">
+            <a:schemeClr val="accent1"/>
+          </a:lnRef>
+          <a:fillRef idx="3">
+            <a:schemeClr val="accent1"/>
+          </a:fillRef>
+          <a:effectRef idx="2">
+            <a:schemeClr val="accent1"/>
+          </a:effectRef>
+          <a:fontRef idx="minor">
+            <a:schemeClr val="lt1"/>
+          </a:fontRef>
+        </p:style>
+        <p:txBody>
+          <a:bodyPr rtlCol="0" anchor="ctr"/>
+          <a:lstStyle/>
+          <a:p>
+            <a:pPr algn="ctr"/>
+          </a:p>
+        </p:txBody>
+      </p:sp>
+      <p:sp>
+        <p:nvSpPr>
+          <p:cNvPr id="41" name="Freeform"/>
+          <p:cNvSpPr/>
+          <p:nvPr/>
+        </p:nvSpPr>
+        <p:spPr>
+          <a:xfrm>
+            <a:off x="1688068" y="2468165"/>
+            <a:ext cx="1797367" cy="2378868"/>
+          </a:xfrm>
           <a:custGeom>
             <a:avLst/>
             <a:gdLst/>
             <a:pathLst>
-              <a:path w="3383280" h="3383279">
+              <a:path w="1797367" h="2378868">
                 <a:moveTo>
-                  <a:pt x="766524" y="0"/>
+                  <a:pt x="0" y="0"/>
                 </a:moveTo>
                 <a:cubicBezTo>
-                  <a:pt x="343184" y="0"/>
-                  <a:pt x="0" y="343184"/>
-                  <a:pt x="0" y="766524"/>
-                </a:cubicBezTo>
-                <a:cubicBezTo>
-                  <a:pt x="0" y="3040094"/>
-                  <a:pt x="343184" y="3383279"/>
-                  <a:pt x="766524" y="3383279"/>
-                </a:cubicBezTo>
-                <a:cubicBezTo>
-                  <a:pt x="3040095" y="3383279"/>
-                  <a:pt x="3383280" y="3040094"/>
-                  <a:pt x="3383280" y="2616754"/>
-                </a:cubicBezTo>
-                <a:cubicBezTo>
-                  <a:pt x="3383280" y="343184"/>
-                  <a:pt x="3040095" y="0"/>
-                  <a:pt x="2616755" y="0"/>
+                  <a:pt x="0" y="0"/>
+                  <a:pt x="1242297" y="0"/>
+                  <a:pt x="1242297" y="0"/>
+                </a:cubicBezTo>
+                <a:cubicBezTo>
+                  <a:pt x="1242297" y="0"/>
+                  <a:pt x="1797367" y="555069"/>
+                  <a:pt x="1797367" y="555069"/>
+                </a:cubicBezTo>
+                <a:cubicBezTo>
+                  <a:pt x="1797367" y="555069"/>
+                  <a:pt x="1797367" y="2378868"/>
+                  <a:pt x="1797367" y="2378868"/>
+                </a:cubicBezTo>
+                <a:cubicBezTo>
+                  <a:pt x="1797367" y="2378868"/>
+                  <a:pt x="0" y="2378868"/>
+                  <a:pt x="0" y="2378868"/>
+                </a:cubicBezTo>
+                <a:cubicBezTo>
+                  <a:pt x="0" y="2378868"/>
+                  <a:pt x="0" y="0"/>
+                  <a:pt x="0" y="0"/>
                 </a:cubicBezTo>
                 <a:close/>
               </a:path>
             </a:pathLst>
           </a:custGeom>
-          <a:gradFill rotWithShape="1" flip="none">
-            <a:gsLst>
-              <a:gs pos="0">
-                <a:srgbClr val="3D8EC7">
-                  <a:alpha val="100000"/>
-                </a:srgbClr>
-              </a:gs>
-              <a:gs pos="100000">
-                <a:srgbClr val="0F3D63">
-                  <a:alpha val="100000"/>
-                </a:srgbClr>
-              </a:gs>
-            </a:gsLst>
-            <a:lin ang="2700000" scaled="1"/>
-          </a:gradFill>
+          <a:solidFill>
+            <a:srgbClr val="F5F7FA"/>
+          </a:solidFill>
           <a:ln w="12700">
             <a:noFill/>
           </a:ln>
@@ -5618,135 +5726,135 @@
       </p:sp>
       <p:sp>
         <p:nvSpPr>
-          <p:cNvPr id="41" name="Freeform"/>
-          <p:cNvSpPr/>
-          <p:nvPr/>
-        </p:nvSpPr>
-        <p:spPr>
-          <a:xfrm>
-            <a:off x="1899523" y="2838211"/>
-            <a:ext cx="1321593" cy="1480185"/>
+          <p:cNvPr id="42" name="Freeform"/>
+          <p:cNvSpPr/>
+          <p:nvPr/>
+        </p:nvSpPr>
+        <p:spPr>
+          <a:xfrm>
+            <a:off x="2930366" y="2468165"/>
+            <a:ext cx="555069" cy="555069"/>
           </a:xfrm>
           <a:custGeom>
             <a:avLst/>
             <a:gdLst/>
             <a:pathLst>
-              <a:path w="1321593" h="1480185">
+              <a:path w="555069" h="555069">
                 <a:moveTo>
-                  <a:pt x="0" y="237886"/>
+                  <a:pt x="0" y="0"/>
                 </a:moveTo>
                 <a:cubicBezTo>
-                  <a:pt x="0" y="237886"/>
-                  <a:pt x="660796" y="1480185"/>
-                  <a:pt x="660796" y="1480185"/>
-                </a:cubicBezTo>
-                <a:cubicBezTo>
-                  <a:pt x="660796" y="1480185"/>
-                  <a:pt x="1321593" y="0"/>
-                  <a:pt x="1321593" y="0"/>
+                  <a:pt x="0" y="0"/>
+                  <a:pt x="555069" y="555069"/>
+                  <a:pt x="555069" y="555069"/>
+                </a:cubicBezTo>
+                <a:cubicBezTo>
+                  <a:pt x="555069" y="555069"/>
+                  <a:pt x="0" y="555069"/>
+                  <a:pt x="0" y="555069"/>
+                </a:cubicBezTo>
+                <a:cubicBezTo>
+                  <a:pt x="0" y="555069"/>
+                  <a:pt x="0" y="0"/>
+                  <a:pt x="0" y="0"/>
+                </a:cubicBezTo>
+                <a:close/>
+              </a:path>
+            </a:pathLst>
+          </a:custGeom>
+          <a:solidFill>
+            <a:srgbClr val="D4A72C"/>
+          </a:solidFill>
+          <a:ln w="12700">
+            <a:noFill/>
+          </a:ln>
+        </p:spPr>
+      </p:sp>
+      <p:sp>
+        <p:nvSpPr>
+          <p:cNvPr id="43" name="Freeform"/>
+          <p:cNvSpPr/>
+          <p:nvPr/>
+        </p:nvSpPr>
+        <p:spPr>
+          <a:xfrm>
+            <a:off x="2930366" y="2468165"/>
+            <a:ext cx="555069" cy="555069"/>
+          </a:xfrm>
+          <a:custGeom>
+            <a:avLst/>
+            <a:gdLst/>
+            <a:pathLst>
+              <a:path w="555069" h="555069">
+                <a:moveTo>
+                  <a:pt x="0" y="0"/>
+                </a:moveTo>
+                <a:cubicBezTo>
+                  <a:pt x="0" y="0"/>
+                  <a:pt x="0" y="555069"/>
+                  <a:pt x="0" y="555069"/>
+                </a:cubicBezTo>
+                <a:cubicBezTo>
+                  <a:pt x="0" y="555069"/>
+                  <a:pt x="555069" y="555069"/>
+                  <a:pt x="555069" y="555069"/>
                 </a:cubicBezTo>
                 <a:close/>
               </a:path>
             </a:pathLst>
           </a:custGeom>
           <a:noFill/>
-          <a:ln w="812800">
+          <a:ln w="203200" cap="square">
             <a:solidFill>
-              <a:srgbClr val="FFFFFF"/>
+              <a:srgbClr val="18233A"/>
             </a:solidFill>
-            <a:round/>
-          </a:ln>
-        </p:spPr>
-      </p:sp>
-      <p:sp>
-        <p:nvSpPr>
-          <p:cNvPr id="42" name="Freeform"/>
-          <p:cNvSpPr/>
-          <p:nvPr/>
-        </p:nvSpPr>
-        <p:spPr>
-          <a:xfrm>
-            <a:off x="2639615" y="2838211"/>
-            <a:ext cx="581501" cy="1301769"/>
+          </a:ln>
+        </p:spPr>
+      </p:sp>
+      <p:sp>
+        <p:nvSpPr>
+          <p:cNvPr id="44" name="Freeform"/>
+          <p:cNvSpPr/>
+          <p:nvPr/>
+        </p:nvSpPr>
+        <p:spPr>
+          <a:xfrm>
+            <a:off x="2058114" y="3446145"/>
+            <a:ext cx="1004411" cy="740092"/>
           </a:xfrm>
           <a:custGeom>
             <a:avLst/>
             <a:gdLst/>
             <a:pathLst>
-              <a:path w="581501" h="1301769">
+              <a:path w="1004411" h="740092">
                 <a:moveTo>
-                  <a:pt x="0" y="1301769"/>
+                  <a:pt x="0" y="422909"/>
                 </a:moveTo>
                 <a:cubicBezTo>
-                  <a:pt x="0" y="1301769"/>
-                  <a:pt x="581501" y="0"/>
-                  <a:pt x="581501" y="0"/>
-                </a:cubicBezTo>
+                  <a:pt x="0" y="422909"/>
+                  <a:pt x="317182" y="740092"/>
+                  <a:pt x="317182" y="740092"/>
+                </a:cubicBezTo>
+                <a:cubicBezTo>
+                  <a:pt x="317182" y="740092"/>
+                  <a:pt x="1004411" y="0"/>
+                  <a:pt x="1004411" y="0"/>
+                </a:cubicBezTo>
+                <a:close/>
               </a:path>
             </a:pathLst>
           </a:custGeom>
           <a:noFill/>
-          <a:ln w="812800">
+          <a:ln w="558800" cap="square">
             <a:solidFill>
-              <a:srgbClr val="D4A72C"/>
+              <a:srgbClr val="18233A"/>
             </a:solidFill>
           </a:ln>
         </p:spPr>
       </p:sp>
       <p:sp>
         <p:nvSpPr>
-          <p:cNvPr id="43" name="Freeform"/>
-          <p:cNvSpPr/>
-          <p:nvPr/>
-        </p:nvSpPr>
-        <p:spPr>
-          <a:xfrm>
-            <a:off x="1859875" y="4595931"/>
-            <a:ext cx="1400889" cy="171807"/>
-          </a:xfrm>
-          <a:custGeom>
-            <a:avLst/>
-            <a:gdLst/>
-            <a:pathLst>
-              <a:path w="1400889" h="171807">
-                <a:moveTo>
-                  <a:pt x="85903" y="0"/>
-                </a:moveTo>
-                <a:cubicBezTo>
-                  <a:pt x="38460" y="0"/>
-                  <a:pt x="0" y="38460"/>
-                  <a:pt x="0" y="85903"/>
-                </a:cubicBezTo>
-                <a:cubicBezTo>
-                  <a:pt x="0" y="133346"/>
-                  <a:pt x="38460" y="171807"/>
-                  <a:pt x="85903" y="171807"/>
-                </a:cubicBezTo>
-                <a:cubicBezTo>
-                  <a:pt x="1362428" y="171807"/>
-                  <a:pt x="1400889" y="133346"/>
-                  <a:pt x="1400889" y="85903"/>
-                </a:cubicBezTo>
-                <a:cubicBezTo>
-                  <a:pt x="1400889" y="38460"/>
-                  <a:pt x="1362428" y="0"/>
-                  <a:pt x="1314985" y="0"/>
-                </a:cubicBezTo>
-                <a:close/>
-              </a:path>
-            </a:pathLst>
-          </a:custGeom>
-          <a:solidFill>
-            <a:srgbClr val="D4A72C"/>
-          </a:solidFill>
-          <a:ln w="12700">
-            <a:noFill/>
-          </a:ln>
-        </p:spPr>
-      </p:sp>
-      <p:sp>
-        <p:nvSpPr>
-          <p:cNvPr id="44" name="TextBox 43"/>
+          <p:cNvPr id="45" name="TextBox 44"/>
           <p:cNvSpPr txBox="1"/>
           <p:nvPr/>
         </p:nvSpPr>
@@ -5783,7 +5891,7 @@
       </p:sp>
       <p:sp>
         <p:nvSpPr>
-          <p:cNvPr id="45" name="Rectangle 44"/>
+          <p:cNvPr id="46" name="Rectangle 45"/>
           <p:cNvSpPr/>
           <p:nvPr/>
         </p:nvSpPr>
@@ -5812,7 +5920,7 @@
       </p:sp>
       <p:sp>
         <p:nvSpPr>
-          <p:cNvPr id="46" name="TextBox 45"/>
+          <p:cNvPr id="47" name="TextBox 46"/>
           <p:cNvSpPr txBox="1"/>
           <p:nvPr/>
         </p:nvSpPr>
@@ -5849,7 +5957,7 @@
       </p:sp>
       <p:sp>
         <p:nvSpPr>
-          <p:cNvPr id="47" name="TextBox 46"/>
+          <p:cNvPr id="48" name="TextBox 47"/>
           <p:cNvSpPr txBox="1"/>
           <p:nvPr/>
         </p:nvSpPr>
@@ -5879,20 +5987,20 @@
                 <a:ea typeface="Segoe UI"/>
                 <a:cs typeface="Segoe UI"/>
               </a:rPr>
-              <a:t>512 × 512 px · esquinas r = 116 px (0.23×).</a:t>
+              <a:t>512 × 512 px · esquinas a 90° (radio 0): sin redondeos.</a:t>
             </a:r>
           </a:p>
         </p:txBody>
       </p:sp>
       <p:sp>
         <p:nvSpPr>
-          <p:cNvPr id="48" name="Rectangle 47"/>
-          <p:cNvSpPr/>
-          <p:nvPr/>
-        </p:nvSpPr>
-        <p:spPr>
-          <a:xfrm>
-            <a:off x="4892040" y="2688336"/>
+          <p:cNvPr id="49" name="Rectangle 48"/>
+          <p:cNvSpPr/>
+          <p:nvPr/>
+        </p:nvSpPr>
+        <p:spPr>
+          <a:xfrm>
+            <a:off x="4892040" y="2542032"/>
             <a:ext cx="82296" cy="310896"/>
           </a:xfrm>
           <a:prstGeom prst="rect">
@@ -5915,13 +6023,13 @@
       </p:sp>
       <p:sp>
         <p:nvSpPr>
-          <p:cNvPr id="49" name="TextBox 48"/>
+          <p:cNvPr id="50" name="TextBox 49"/>
           <p:cNvSpPr txBox="1"/>
           <p:nvPr/>
         </p:nvSpPr>
         <p:spPr>
           <a:xfrm>
-            <a:off x="5148072" y="2633472"/>
+            <a:off x="5148072" y="2487168"/>
             <a:ext cx="6035040" cy="292608"/>
           </a:xfrm>
           <a:prstGeom prst="rect">
@@ -5945,20 +6053,20 @@
                 <a:ea typeface="Segoe UI"/>
                 <a:cs typeface="Segoe UI"/>
               </a:rPr>
-              <a:t>Trazo de la «V»</a:t>
+              <a:t>Hoja</a:t>
             </a:r>
           </a:p>
         </p:txBody>
       </p:sp>
       <p:sp>
         <p:nvSpPr>
-          <p:cNvPr id="50" name="TextBox 49"/>
+          <p:cNvPr id="51" name="TextBox 50"/>
           <p:cNvSpPr txBox="1"/>
           <p:nvPr/>
         </p:nvSpPr>
         <p:spPr>
           <a:xfrm>
-            <a:off x="5148072" y="2935224"/>
+            <a:off x="5148072" y="2788920"/>
             <a:ext cx="6400800" cy="365760"/>
           </a:xfrm>
           <a:prstGeom prst="rect">
@@ -5982,20 +6090,20 @@
                 <a:ea typeface="Segoe UI"/>
                 <a:cs typeface="Segoe UI"/>
               </a:rPr>
-              <a:t>64 px de ancho (0.125×), extremos redondeados.</a:t>
+              <a:t>272 × 360 px, a 124 px del borde izquierdo y 76 px del superior.</a:t>
             </a:r>
           </a:p>
         </p:txBody>
       </p:sp>
       <p:sp>
         <p:nvSpPr>
-          <p:cNvPr id="51" name="Rectangle 50"/>
-          <p:cNvSpPr/>
-          <p:nvPr/>
-        </p:nvSpPr>
-        <p:spPr>
-          <a:xfrm>
-            <a:off x="4892040" y="3401568"/>
+          <p:cNvPr id="52" name="Rectangle 51"/>
+          <p:cNvSpPr/>
+          <p:nvPr/>
+        </p:nvSpPr>
+        <p:spPr>
+          <a:xfrm>
+            <a:off x="4892040" y="3108960"/>
             <a:ext cx="82296" cy="310896"/>
           </a:xfrm>
           <a:prstGeom prst="rect">
@@ -6018,13 +6126,13 @@
       </p:sp>
       <p:sp>
         <p:nvSpPr>
-          <p:cNvPr id="52" name="TextBox 51"/>
+          <p:cNvPr id="53" name="TextBox 52"/>
           <p:cNvSpPr txBox="1"/>
           <p:nvPr/>
         </p:nvSpPr>
         <p:spPr>
           <a:xfrm>
-            <a:off x="5148072" y="3346704"/>
+            <a:off x="5148072" y="3054096"/>
             <a:ext cx="6035040" cy="292608"/>
           </a:xfrm>
           <a:prstGeom prst="rect">
@@ -6048,20 +6156,20 @@
                 <a:ea typeface="Segoe UI"/>
                 <a:cs typeface="Segoe UI"/>
               </a:rPr>
-              <a:t>Vértice</a:t>
+              <a:t>Esquina doblada</a:t>
             </a:r>
           </a:p>
         </p:txBody>
       </p:sp>
       <p:sp>
         <p:nvSpPr>
-          <p:cNvPr id="53" name="TextBox 52"/>
+          <p:cNvPr id="54" name="TextBox 53"/>
           <p:cNvSpPr txBox="1"/>
           <p:nvPr/>
         </p:nvSpPr>
         <p:spPr>
           <a:xfrm>
-            <a:off x="5148072" y="3648456"/>
+            <a:off x="5148072" y="3355848"/>
             <a:ext cx="6400800" cy="365760"/>
           </a:xfrm>
           <a:prstGeom prst="rect">
@@ -6085,20 +6193,20 @@
                 <a:ea typeface="Segoe UI"/>
                 <a:cs typeface="Segoe UI"/>
               </a:rPr>
-              <a:t>Centrado en el eje; el brazo derecho asciende por encima del izquierdo.</a:t>
+              <a:t>Triángulo rectángulo de 84 × 84 px, arriba a la derecha.</a:t>
             </a:r>
           </a:p>
         </p:txBody>
       </p:sp>
       <p:sp>
         <p:nvSpPr>
-          <p:cNvPr id="54" name="Rectangle 53"/>
-          <p:cNvSpPr/>
-          <p:nvPr/>
-        </p:nvSpPr>
-        <p:spPr>
-          <a:xfrm>
-            <a:off x="4892040" y="4114800"/>
+          <p:cNvPr id="55" name="Rectangle 54"/>
+          <p:cNvSpPr/>
+          <p:nvPr/>
+        </p:nvSpPr>
+        <p:spPr>
+          <a:xfrm>
+            <a:off x="4892040" y="3675888"/>
             <a:ext cx="82296" cy="310896"/>
           </a:xfrm>
           <a:prstGeom prst="rect">
@@ -6121,13 +6229,13 @@
       </p:sp>
       <p:sp>
         <p:nvSpPr>
-          <p:cNvPr id="55" name="TextBox 54"/>
+          <p:cNvPr id="56" name="TextBox 55"/>
           <p:cNvSpPr txBox="1"/>
           <p:nvPr/>
         </p:nvSpPr>
         <p:spPr>
           <a:xfrm>
-            <a:off x="5148072" y="4059936"/>
+            <a:off x="5148072" y="3621024"/>
             <a:ext cx="6035040" cy="292608"/>
           </a:xfrm>
           <a:prstGeom prst="rect">
@@ -6151,20 +6259,20 @@
                 <a:ea typeface="Segoe UI"/>
                 <a:cs typeface="Segoe UI"/>
               </a:rPr>
-              <a:t>Barra base</a:t>
+              <a:t>Pliegue</a:t>
             </a:r>
           </a:p>
         </p:txBody>
       </p:sp>
       <p:sp>
         <p:nvSpPr>
-          <p:cNvPr id="56" name="TextBox 55"/>
+          <p:cNvPr id="57" name="TextBox 56"/>
           <p:cNvSpPr txBox="1"/>
           <p:nvPr/>
         </p:nvSpPr>
         <p:spPr>
           <a:xfrm>
-            <a:off x="5148072" y="4361688"/>
+            <a:off x="5148072" y="3922776"/>
             <a:ext cx="6400800" cy="365760"/>
           </a:xfrm>
           <a:prstGeom prst="rect">
@@ -6188,20 +6296,20 @@
                 <a:ea typeface="Segoe UI"/>
                 <a:cs typeface="Segoe UI"/>
               </a:rPr>
-              <a:t>212 × 26 px, centrada, a 116 px del borde inferior.</a:t>
+              <a:t>Línea tinta de 16 px que separa la esquina de la hoja.</a:t>
             </a:r>
           </a:p>
         </p:txBody>
       </p:sp>
       <p:sp>
         <p:nvSpPr>
-          <p:cNvPr id="57" name="Rectangle 56"/>
-          <p:cNvSpPr/>
-          <p:nvPr/>
-        </p:nvSpPr>
-        <p:spPr>
-          <a:xfrm>
-            <a:off x="4892040" y="4828032"/>
+          <p:cNvPr id="58" name="Rectangle 57"/>
+          <p:cNvSpPr/>
+          <p:nvPr/>
+        </p:nvSpPr>
+        <p:spPr>
+          <a:xfrm>
+            <a:off x="4892040" y="4242816"/>
             <a:ext cx="82296" cy="310896"/>
           </a:xfrm>
           <a:prstGeom prst="rect">
@@ -6224,13 +6332,219 @@
       </p:sp>
       <p:sp>
         <p:nvSpPr>
-          <p:cNvPr id="58" name="TextBox 57"/>
+          <p:cNvPr id="59" name="TextBox 58"/>
           <p:cNvSpPr txBox="1"/>
           <p:nvPr/>
         </p:nvSpPr>
         <p:spPr>
           <a:xfrm>
-            <a:off x="5148072" y="4773168"/>
+            <a:off x="5148072" y="4187952"/>
+            <a:ext cx="6035040" cy="292608"/>
+          </a:xfrm>
+          <a:prstGeom prst="rect">
+            <a:avLst/>
+          </a:prstGeom>
+          <a:noFill/>
+        </p:spPr>
+        <p:txBody>
+          <a:bodyPr wrap="square">
+            <a:spAutoFit/>
+          </a:bodyPr>
+          <a:lstStyle/>
+          <a:p>
+            <a:pPr algn="l"/>
+            <a:r>
+              <a:rPr sz="1300" b="1">
+                <a:solidFill>
+                  <a:srgbClr val="0F3D63"/>
+                </a:solidFill>
+                <a:latin typeface="Arial Black"/>
+                <a:ea typeface="Segoe UI"/>
+                <a:cs typeface="Segoe UI"/>
+              </a:rPr>
+              <a:t>Palomita</a:t>
+            </a:r>
+          </a:p>
+        </p:txBody>
+      </p:sp>
+      <p:sp>
+        <p:nvSpPr>
+          <p:cNvPr id="60" name="TextBox 59"/>
+          <p:cNvSpPr txBox="1"/>
+          <p:nvPr/>
+        </p:nvSpPr>
+        <p:spPr>
+          <a:xfrm>
+            <a:off x="5148072" y="4489704"/>
+            <a:ext cx="6400800" cy="365760"/>
+          </a:xfrm>
+          <a:prstGeom prst="rect">
+            <a:avLst/>
+          </a:prstGeom>
+          <a:noFill/>
+        </p:spPr>
+        <p:txBody>
+          <a:bodyPr wrap="square">
+            <a:spAutoFit/>
+          </a:bodyPr>
+          <a:lstStyle/>
+          <a:p>
+            <a:pPr algn="l"/>
+            <a:r>
+              <a:rPr sz="1150" b="0">
+                <a:solidFill>
+                  <a:srgbClr val="18233A"/>
+                </a:solidFill>
+                <a:latin typeface="Segoe UI"/>
+                <a:ea typeface="Segoe UI"/>
+                <a:cs typeface="Segoe UI"/>
+              </a:rPr>
+              <a:t>Trazo de 44 px, extremos rectos, a ≥ 24 px del pliegue.</a:t>
+            </a:r>
+          </a:p>
+        </p:txBody>
+      </p:sp>
+      <p:sp>
+        <p:nvSpPr>
+          <p:cNvPr id="61" name="Rectangle 60"/>
+          <p:cNvSpPr/>
+          <p:nvPr/>
+        </p:nvSpPr>
+        <p:spPr>
+          <a:xfrm>
+            <a:off x="4892040" y="4809744"/>
+            <a:ext cx="82296" cy="310896"/>
+          </a:xfrm>
+          <a:prstGeom prst="rect">
+            <a:avLst/>
+          </a:prstGeom>
+          <a:solidFill>
+            <a:srgbClr val="D4A72C"/>
+          </a:solidFill>
+          <a:ln>
+            <a:noFill/>
+          </a:ln>
+        </p:spPr>
+        <p:txBody>
+          <a:bodyPr rtlCol="0" anchor="ctr"/>
+          <a:lstStyle/>
+          <a:p>
+            <a:pPr algn="ctr"/>
+          </a:p>
+        </p:txBody>
+      </p:sp>
+      <p:sp>
+        <p:nvSpPr>
+          <p:cNvPr id="62" name="TextBox 61"/>
+          <p:cNvSpPr txBox="1"/>
+          <p:nvPr/>
+        </p:nvSpPr>
+        <p:spPr>
+          <a:xfrm>
+            <a:off x="5148072" y="4754880"/>
+            <a:ext cx="6035040" cy="292608"/>
+          </a:xfrm>
+          <a:prstGeom prst="rect">
+            <a:avLst/>
+          </a:prstGeom>
+          <a:noFill/>
+        </p:spPr>
+        <p:txBody>
+          <a:bodyPr wrap="square">
+            <a:spAutoFit/>
+          </a:bodyPr>
+          <a:lstStyle/>
+          <a:p>
+            <a:pPr algn="l"/>
+            <a:r>
+              <a:rPr sz="1300" b="1">
+                <a:solidFill>
+                  <a:srgbClr val="0F3D63"/>
+                </a:solidFill>
+                <a:latin typeface="Arial Black"/>
+                <a:ea typeface="Segoe UI"/>
+                <a:cs typeface="Segoe UI"/>
+              </a:rPr>
+              <a:t>Favicon (16 px)</a:t>
+            </a:r>
+          </a:p>
+        </p:txBody>
+      </p:sp>
+      <p:sp>
+        <p:nvSpPr>
+          <p:cNvPr id="63" name="TextBox 62"/>
+          <p:cNvSpPr txBox="1"/>
+          <p:nvPr/>
+        </p:nvSpPr>
+        <p:spPr>
+          <a:xfrm>
+            <a:off x="5148072" y="5056632"/>
+            <a:ext cx="6400800" cy="365760"/>
+          </a:xfrm>
+          <a:prstGeom prst="rect">
+            <a:avLst/>
+          </a:prstGeom>
+          <a:noFill/>
+        </p:spPr>
+        <p:txBody>
+          <a:bodyPr wrap="square">
+            <a:spAutoFit/>
+          </a:bodyPr>
+          <a:lstStyle/>
+          <a:p>
+            <a:pPr algn="l"/>
+            <a:r>
+              <a:rPr sz="1150" b="0">
+                <a:solidFill>
+                  <a:srgbClr val="18233A"/>
+                </a:solidFill>
+                <a:latin typeface="Segoe UI"/>
+                <a:ea typeface="Segoe UI"/>
+                <a:cs typeface="Segoe UI"/>
+              </a:rPr>
+              <a:t>Hoja más grande (368 × 416 px), sin pliegue ni palomita.</a:t>
+            </a:r>
+          </a:p>
+        </p:txBody>
+      </p:sp>
+      <p:sp>
+        <p:nvSpPr>
+          <p:cNvPr id="64" name="Rectangle 63"/>
+          <p:cNvSpPr/>
+          <p:nvPr/>
+        </p:nvSpPr>
+        <p:spPr>
+          <a:xfrm>
+            <a:off x="4892040" y="5376672"/>
+            <a:ext cx="82296" cy="310896"/>
+          </a:xfrm>
+          <a:prstGeom prst="rect">
+            <a:avLst/>
+          </a:prstGeom>
+          <a:solidFill>
+            <a:srgbClr val="D4A72C"/>
+          </a:solidFill>
+          <a:ln>
+            <a:noFill/>
+          </a:ln>
+        </p:spPr>
+        <p:txBody>
+          <a:bodyPr rtlCol="0" anchor="ctr"/>
+          <a:lstStyle/>
+          <a:p>
+            <a:pPr algn="ctr"/>
+          </a:p>
+        </p:txBody>
+      </p:sp>
+      <p:sp>
+        <p:nvSpPr>
+          <p:cNvPr id="65" name="TextBox 64"/>
+          <p:cNvSpPr txBox="1"/>
+          <p:nvPr/>
+        </p:nvSpPr>
+        <p:spPr>
+          <a:xfrm>
+            <a:off x="5148072" y="5321808"/>
             <a:ext cx="6035040" cy="292608"/>
           </a:xfrm>
           <a:prstGeom prst="rect">
@@ -6261,13 +6575,13 @@
       </p:sp>
       <p:sp>
         <p:nvSpPr>
-          <p:cNvPr id="59" name="TextBox 58"/>
+          <p:cNvPr id="66" name="TextBox 65"/>
           <p:cNvSpPr txBox="1"/>
           <p:nvPr/>
         </p:nvSpPr>
         <p:spPr>
           <a:xfrm>
-            <a:off x="5148072" y="5074920"/>
+            <a:off x="5148072" y="5623560"/>
             <a:ext cx="6400800" cy="365760"/>
           </a:xfrm>
           <a:prstGeom prst="rect">
@@ -6291,20 +6605,20 @@
                 <a:ea typeface="Segoe UI"/>
                 <a:cs typeface="Segoe UI"/>
               </a:rPr>
-              <a:t>Degradado #3D8EC7 → #0F3D63; oro #D4A72C en el brazo y la barra.</a:t>
+              <a:t>Tinta #18233A, papel #F5F7FA y oro #D4A72C. Cero degradados.</a:t>
             </a:r>
           </a:p>
         </p:txBody>
       </p:sp>
       <p:sp>
         <p:nvSpPr>
-          <p:cNvPr id="60" name="Rectangle 59"/>
-          <p:cNvSpPr/>
-          <p:nvPr/>
-        </p:nvSpPr>
-        <p:spPr>
-          <a:xfrm>
-            <a:off x="4892040" y="5541264"/>
+          <p:cNvPr id="67" name="Rectangle 66"/>
+          <p:cNvSpPr/>
+          <p:nvPr/>
+        </p:nvSpPr>
+        <p:spPr>
+          <a:xfrm>
+            <a:off x="4892040" y="5943600"/>
             <a:ext cx="82296" cy="310896"/>
           </a:xfrm>
           <a:prstGeom prst="rect">
@@ -6327,13 +6641,13 @@
       </p:sp>
       <p:sp>
         <p:nvSpPr>
-          <p:cNvPr id="61" name="TextBox 60"/>
+          <p:cNvPr id="68" name="TextBox 67"/>
           <p:cNvSpPr txBox="1"/>
           <p:nvPr/>
         </p:nvSpPr>
         <p:spPr>
           <a:xfrm>
-            <a:off x="5148072" y="5486400"/>
+            <a:off x="5148072" y="5888736"/>
             <a:ext cx="6035040" cy="292608"/>
           </a:xfrm>
           <a:prstGeom prst="rect">
@@ -6364,13 +6678,13 @@
       </p:sp>
       <p:sp>
         <p:nvSpPr>
-          <p:cNvPr id="62" name="TextBox 61"/>
+          <p:cNvPr id="69" name="TextBox 68"/>
           <p:cNvSpPr txBox="1"/>
           <p:nvPr/>
         </p:nvSpPr>
         <p:spPr>
           <a:xfrm>
-            <a:off x="5148072" y="5788152"/>
+            <a:off x="5148072" y="6190488"/>
             <a:ext cx="6400800" cy="365760"/>
           </a:xfrm>
           <a:prstGeom prst="rect">
@@ -6609,7 +6923,7 @@
       </p:sp>
       <p:sp>
         <p:nvSpPr>
-          <p:cNvPr id="8" name="Freeform"/>
+          <p:cNvPr id="8" name="Rectangle 7"/>
           <p:cNvSpPr/>
           <p:nvPr/>
         </p:nvSpPr>
@@ -6618,53 +6932,89 @@
             <a:off x="1106766" y="2514600"/>
             <a:ext cx="1554480" cy="1554480"/>
           </a:xfrm>
+          <a:prstGeom prst="rect">
+            <a:avLst/>
+          </a:prstGeom>
+          <a:solidFill>
+            <a:srgbClr val="18233A"/>
+          </a:solidFill>
+          <a:ln>
+            <a:noFill/>
+          </a:ln>
+        </p:spPr>
+        <p:style>
+          <a:lnRef idx="1">
+            <a:schemeClr val="accent1"/>
+          </a:lnRef>
+          <a:fillRef idx="3">
+            <a:schemeClr val="accent1"/>
+          </a:fillRef>
+          <a:effectRef idx="2">
+            <a:schemeClr val="accent1"/>
+          </a:effectRef>
+          <a:fontRef idx="minor">
+            <a:schemeClr val="lt1"/>
+          </a:fontRef>
+        </p:style>
+        <p:txBody>
+          <a:bodyPr rtlCol="0" anchor="ctr"/>
+          <a:lstStyle/>
+          <a:p>
+            <a:pPr algn="ctr"/>
+          </a:p>
+        </p:txBody>
+      </p:sp>
+      <p:sp>
+        <p:nvSpPr>
+          <p:cNvPr id="9" name="Freeform"/>
+          <p:cNvSpPr/>
+          <p:nvPr/>
+        </p:nvSpPr>
+        <p:spPr>
+          <a:xfrm>
+            <a:off x="1483242" y="2745343"/>
+            <a:ext cx="825817" cy="1092993"/>
+          </a:xfrm>
           <a:custGeom>
             <a:avLst/>
             <a:gdLst/>
             <a:pathLst>
-              <a:path w="1554480" h="1554480">
+              <a:path w="825817" h="1092993">
                 <a:moveTo>
-                  <a:pt x="352186" y="0"/>
+                  <a:pt x="0" y="0"/>
                 </a:moveTo>
                 <a:cubicBezTo>
-                  <a:pt x="157679" y="0"/>
-                  <a:pt x="0" y="157679"/>
-                  <a:pt x="0" y="352186"/>
-                </a:cubicBezTo>
-                <a:cubicBezTo>
-                  <a:pt x="0" y="1396800"/>
-                  <a:pt x="157679" y="1554480"/>
-                  <a:pt x="352186" y="1554480"/>
-                </a:cubicBezTo>
-                <a:cubicBezTo>
-                  <a:pt x="1396800" y="1554480"/>
-                  <a:pt x="1554480" y="1396800"/>
-                  <a:pt x="1554480" y="1202293"/>
-                </a:cubicBezTo>
-                <a:cubicBezTo>
-                  <a:pt x="1554480" y="157679"/>
-                  <a:pt x="1396800" y="0"/>
-                  <a:pt x="1202293" y="0"/>
+                  <a:pt x="0" y="0"/>
+                  <a:pt x="570785" y="0"/>
+                  <a:pt x="570785" y="0"/>
+                </a:cubicBezTo>
+                <a:cubicBezTo>
+                  <a:pt x="570785" y="0"/>
+                  <a:pt x="825817" y="255031"/>
+                  <a:pt x="825817" y="255031"/>
+                </a:cubicBezTo>
+                <a:cubicBezTo>
+                  <a:pt x="825817" y="255031"/>
+                  <a:pt x="825817" y="1092993"/>
+                  <a:pt x="825817" y="1092993"/>
+                </a:cubicBezTo>
+                <a:cubicBezTo>
+                  <a:pt x="825817" y="1092993"/>
+                  <a:pt x="0" y="1092993"/>
+                  <a:pt x="0" y="1092993"/>
+                </a:cubicBezTo>
+                <a:cubicBezTo>
+                  <a:pt x="0" y="1092993"/>
+                  <a:pt x="0" y="0"/>
+                  <a:pt x="0" y="0"/>
                 </a:cubicBezTo>
                 <a:close/>
               </a:path>
             </a:pathLst>
           </a:custGeom>
-          <a:gradFill rotWithShape="1" flip="none">
-            <a:gsLst>
-              <a:gs pos="0">
-                <a:srgbClr val="3D8EC7">
-                  <a:alpha val="100000"/>
-                </a:srgbClr>
-              </a:gs>
-              <a:gs pos="100000">
-                <a:srgbClr val="0F3D63">
-                  <a:alpha val="100000"/>
-                </a:srgbClr>
-              </a:gs>
-            </a:gsLst>
-            <a:lin ang="2700000" scaled="1"/>
-          </a:gradFill>
+          <a:solidFill>
+            <a:srgbClr val="F5F7FA"/>
+          </a:solidFill>
           <a:ln w="12700">
             <a:noFill/>
           </a:ln>
@@ -6672,135 +7022,135 @@
       </p:sp>
       <p:sp>
         <p:nvSpPr>
-          <p:cNvPr id="9" name="Freeform"/>
-          <p:cNvSpPr/>
-          <p:nvPr/>
-        </p:nvSpPr>
-        <p:spPr>
-          <a:xfrm>
-            <a:off x="1580397" y="2915364"/>
-            <a:ext cx="607218" cy="680084"/>
+          <p:cNvPr id="10" name="Freeform"/>
+          <p:cNvSpPr/>
+          <p:nvPr/>
+        </p:nvSpPr>
+        <p:spPr>
+          <a:xfrm>
+            <a:off x="2054028" y="2745343"/>
+            <a:ext cx="255031" cy="255031"/>
           </a:xfrm>
           <a:custGeom>
             <a:avLst/>
             <a:gdLst/>
             <a:pathLst>
-              <a:path w="607218" h="680084">
+              <a:path w="255031" h="255031">
                 <a:moveTo>
-                  <a:pt x="0" y="109299"/>
+                  <a:pt x="0" y="0"/>
                 </a:moveTo>
                 <a:cubicBezTo>
-                  <a:pt x="0" y="109299"/>
-                  <a:pt x="303609" y="680084"/>
-                  <a:pt x="303609" y="680084"/>
-                </a:cubicBezTo>
-                <a:cubicBezTo>
-                  <a:pt x="303609" y="680084"/>
-                  <a:pt x="607218" y="0"/>
-                  <a:pt x="607218" y="0"/>
+                  <a:pt x="0" y="0"/>
+                  <a:pt x="255031" y="255031"/>
+                  <a:pt x="255031" y="255031"/>
+                </a:cubicBezTo>
+                <a:cubicBezTo>
+                  <a:pt x="255031" y="255031"/>
+                  <a:pt x="0" y="255031"/>
+                  <a:pt x="0" y="255031"/>
+                </a:cubicBezTo>
+                <a:cubicBezTo>
+                  <a:pt x="0" y="255031"/>
+                  <a:pt x="0" y="0"/>
+                  <a:pt x="0" y="0"/>
+                </a:cubicBezTo>
+                <a:close/>
+              </a:path>
+            </a:pathLst>
+          </a:custGeom>
+          <a:solidFill>
+            <a:srgbClr val="D4A72C"/>
+          </a:solidFill>
+          <a:ln w="12700">
+            <a:noFill/>
+          </a:ln>
+        </p:spPr>
+      </p:sp>
+      <p:sp>
+        <p:nvSpPr>
+          <p:cNvPr id="11" name="Freeform"/>
+          <p:cNvSpPr/>
+          <p:nvPr/>
+        </p:nvSpPr>
+        <p:spPr>
+          <a:xfrm>
+            <a:off x="2054028" y="2745343"/>
+            <a:ext cx="255031" cy="255031"/>
+          </a:xfrm>
+          <a:custGeom>
+            <a:avLst/>
+            <a:gdLst/>
+            <a:pathLst>
+              <a:path w="255031" h="255031">
+                <a:moveTo>
+                  <a:pt x="0" y="0"/>
+                </a:moveTo>
+                <a:cubicBezTo>
+                  <a:pt x="0" y="0"/>
+                  <a:pt x="0" y="255031"/>
+                  <a:pt x="0" y="255031"/>
+                </a:cubicBezTo>
+                <a:cubicBezTo>
+                  <a:pt x="0" y="255031"/>
+                  <a:pt x="255031" y="255031"/>
+                  <a:pt x="255031" y="255031"/>
                 </a:cubicBezTo>
                 <a:close/>
               </a:path>
             </a:pathLst>
           </a:custGeom>
           <a:noFill/>
-          <a:ln w="812800">
+          <a:ln w="203200" cap="square">
             <a:solidFill>
-              <a:srgbClr val="FFFFFF"/>
+              <a:srgbClr val="18233A"/>
             </a:solidFill>
-            <a:round/>
-          </a:ln>
-        </p:spPr>
-      </p:sp>
-      <p:sp>
-        <p:nvSpPr>
-          <p:cNvPr id="10" name="Freeform"/>
-          <p:cNvSpPr/>
-          <p:nvPr/>
-        </p:nvSpPr>
-        <p:spPr>
-          <a:xfrm>
-            <a:off x="1920440" y="2915364"/>
-            <a:ext cx="267176" cy="598110"/>
+          </a:ln>
+        </p:spPr>
+      </p:sp>
+      <p:sp>
+        <p:nvSpPr>
+          <p:cNvPr id="12" name="Freeform"/>
+          <p:cNvSpPr/>
+          <p:nvPr/>
+        </p:nvSpPr>
+        <p:spPr>
+          <a:xfrm>
+            <a:off x="1653263" y="3194685"/>
+            <a:ext cx="461486" cy="340042"/>
           </a:xfrm>
           <a:custGeom>
             <a:avLst/>
             <a:gdLst/>
             <a:pathLst>
-              <a:path w="267176" h="598110">
+              <a:path w="461486" h="340042">
                 <a:moveTo>
-                  <a:pt x="0" y="598110"/>
+                  <a:pt x="0" y="194309"/>
                 </a:moveTo>
                 <a:cubicBezTo>
-                  <a:pt x="0" y="598110"/>
-                  <a:pt x="267176" y="0"/>
-                  <a:pt x="267176" y="0"/>
-                </a:cubicBezTo>
+                  <a:pt x="0" y="194309"/>
+                  <a:pt x="145732" y="340042"/>
+                  <a:pt x="145732" y="340042"/>
+                </a:cubicBezTo>
+                <a:cubicBezTo>
+                  <a:pt x="145732" y="340042"/>
+                  <a:pt x="461486" y="0"/>
+                  <a:pt x="461486" y="0"/>
+                </a:cubicBezTo>
+                <a:close/>
               </a:path>
             </a:pathLst>
           </a:custGeom>
           <a:noFill/>
-          <a:ln w="812800">
+          <a:ln w="558800" cap="square">
             <a:solidFill>
-              <a:srgbClr val="D4A72C"/>
+              <a:srgbClr val="18233A"/>
             </a:solidFill>
           </a:ln>
         </p:spPr>
       </p:sp>
       <p:sp>
         <p:nvSpPr>
-          <p:cNvPr id="11" name="Freeform"/>
-          <p:cNvSpPr/>
-          <p:nvPr/>
-        </p:nvSpPr>
-        <p:spPr>
-          <a:xfrm>
-            <a:off x="1562180" y="3722965"/>
-            <a:ext cx="643651" cy="78938"/>
-          </a:xfrm>
-          <a:custGeom>
-            <a:avLst/>
-            <a:gdLst/>
-            <a:pathLst>
-              <a:path w="643651" h="78938">
-                <a:moveTo>
-                  <a:pt x="39469" y="0"/>
-                </a:moveTo>
-                <a:cubicBezTo>
-                  <a:pt x="17670" y="0"/>
-                  <a:pt x="0" y="17670"/>
-                  <a:pt x="0" y="39468"/>
-                </a:cubicBezTo>
-                <a:cubicBezTo>
-                  <a:pt x="0" y="61267"/>
-                  <a:pt x="17670" y="78938"/>
-                  <a:pt x="39469" y="78938"/>
-                </a:cubicBezTo>
-                <a:cubicBezTo>
-                  <a:pt x="625980" y="78938"/>
-                  <a:pt x="643651" y="61267"/>
-                  <a:pt x="643651" y="39468"/>
-                </a:cubicBezTo>
-                <a:cubicBezTo>
-                  <a:pt x="643651" y="17670"/>
-                  <a:pt x="625980" y="0"/>
-                  <a:pt x="604181" y="0"/>
-                </a:cubicBezTo>
-                <a:close/>
-              </a:path>
-            </a:pathLst>
-          </a:custGeom>
-          <a:solidFill>
-            <a:srgbClr val="D4A72C"/>
-          </a:solidFill>
-          <a:ln w="12700">
-            <a:noFill/>
-          </a:ln>
-        </p:spPr>
-      </p:sp>
-      <p:sp>
-        <p:nvSpPr>
-          <p:cNvPr id="12" name="TextBox 11"/>
+          <p:cNvPr id="13" name="TextBox 12"/>
           <p:cNvSpPr txBox="1"/>
           <p:nvPr/>
         </p:nvSpPr>
@@ -6837,7 +7187,7 @@
       </p:sp>
       <p:sp>
         <p:nvSpPr>
-          <p:cNvPr id="13" name="Rounded Rectangle 12"/>
+          <p:cNvPr id="14" name="Rounded Rectangle 13"/>
           <p:cNvSpPr/>
           <p:nvPr/>
         </p:nvSpPr>
@@ -6866,7 +7216,7 @@
       </p:sp>
       <p:sp>
         <p:nvSpPr>
-          <p:cNvPr id="14" name="Rounded Rectangle 13"/>
+          <p:cNvPr id="15" name="Rounded Rectangle 14"/>
           <p:cNvSpPr/>
           <p:nvPr/>
         </p:nvSpPr>
@@ -6895,7 +7245,7 @@
       </p:sp>
       <p:sp>
         <p:nvSpPr>
-          <p:cNvPr id="15" name="Freeform"/>
+          <p:cNvPr id="16" name="Rectangle 15"/>
           <p:cNvSpPr/>
           <p:nvPr/>
         </p:nvSpPr>
@@ -6904,53 +7254,89 @@
             <a:off x="3914660" y="2514600"/>
             <a:ext cx="1554480" cy="1554480"/>
           </a:xfrm>
+          <a:prstGeom prst="rect">
+            <a:avLst/>
+          </a:prstGeom>
+          <a:solidFill>
+            <a:srgbClr val="18233A"/>
+          </a:solidFill>
+          <a:ln>
+            <a:noFill/>
+          </a:ln>
+        </p:spPr>
+        <p:style>
+          <a:lnRef idx="1">
+            <a:schemeClr val="accent1"/>
+          </a:lnRef>
+          <a:fillRef idx="3">
+            <a:schemeClr val="accent1"/>
+          </a:fillRef>
+          <a:effectRef idx="2">
+            <a:schemeClr val="accent1"/>
+          </a:effectRef>
+          <a:fontRef idx="minor">
+            <a:schemeClr val="lt1"/>
+          </a:fontRef>
+        </p:style>
+        <p:txBody>
+          <a:bodyPr rtlCol="0" anchor="ctr"/>
+          <a:lstStyle/>
+          <a:p>
+            <a:pPr algn="ctr"/>
+          </a:p>
+        </p:txBody>
+      </p:sp>
+      <p:sp>
+        <p:nvSpPr>
+          <p:cNvPr id="17" name="Freeform"/>
+          <p:cNvSpPr/>
+          <p:nvPr/>
+        </p:nvSpPr>
+        <p:spPr>
+          <a:xfrm>
+            <a:off x="4291136" y="2745343"/>
+            <a:ext cx="825817" cy="1092993"/>
+          </a:xfrm>
           <a:custGeom>
             <a:avLst/>
             <a:gdLst/>
             <a:pathLst>
-              <a:path w="1554480" h="1554480">
+              <a:path w="825817" h="1092993">
                 <a:moveTo>
-                  <a:pt x="352186" y="0"/>
+                  <a:pt x="0" y="0"/>
                 </a:moveTo>
                 <a:cubicBezTo>
-                  <a:pt x="157679" y="0"/>
-                  <a:pt x="0" y="157679"/>
-                  <a:pt x="0" y="352186"/>
-                </a:cubicBezTo>
-                <a:cubicBezTo>
-                  <a:pt x="0" y="1396800"/>
-                  <a:pt x="157679" y="1554480"/>
-                  <a:pt x="352186" y="1554480"/>
-                </a:cubicBezTo>
-                <a:cubicBezTo>
-                  <a:pt x="1396800" y="1554480"/>
-                  <a:pt x="1554480" y="1396800"/>
-                  <a:pt x="1554480" y="1202293"/>
-                </a:cubicBezTo>
-                <a:cubicBezTo>
-                  <a:pt x="1554480" y="157679"/>
-                  <a:pt x="1396800" y="0"/>
-                  <a:pt x="1202293" y="0"/>
+                  <a:pt x="0" y="0"/>
+                  <a:pt x="570785" y="0"/>
+                  <a:pt x="570785" y="0"/>
+                </a:cubicBezTo>
+                <a:cubicBezTo>
+                  <a:pt x="570785" y="0"/>
+                  <a:pt x="825817" y="255031"/>
+                  <a:pt x="825817" y="255031"/>
+                </a:cubicBezTo>
+                <a:cubicBezTo>
+                  <a:pt x="825817" y="255031"/>
+                  <a:pt x="825817" y="1092993"/>
+                  <a:pt x="825817" y="1092993"/>
+                </a:cubicBezTo>
+                <a:cubicBezTo>
+                  <a:pt x="825817" y="1092993"/>
+                  <a:pt x="0" y="1092993"/>
+                  <a:pt x="0" y="1092993"/>
+                </a:cubicBezTo>
+                <a:cubicBezTo>
+                  <a:pt x="0" y="1092993"/>
+                  <a:pt x="0" y="0"/>
+                  <a:pt x="0" y="0"/>
                 </a:cubicBezTo>
                 <a:close/>
               </a:path>
             </a:pathLst>
           </a:custGeom>
-          <a:gradFill rotWithShape="1" flip="none">
-            <a:gsLst>
-              <a:gs pos="0">
-                <a:srgbClr val="3D8EC7">
-                  <a:alpha val="100000"/>
-                </a:srgbClr>
-              </a:gs>
-              <a:gs pos="100000">
-                <a:srgbClr val="0F3D63">
-                  <a:alpha val="100000"/>
-                </a:srgbClr>
-              </a:gs>
-            </a:gsLst>
-            <a:lin ang="2700000" scaled="1"/>
-          </a:gradFill>
+          <a:solidFill>
+            <a:srgbClr val="F5F7FA"/>
+          </a:solidFill>
           <a:ln w="12700">
             <a:noFill/>
           </a:ln>
@@ -6958,135 +7344,135 @@
       </p:sp>
       <p:sp>
         <p:nvSpPr>
-          <p:cNvPr id="16" name="Freeform"/>
-          <p:cNvSpPr/>
-          <p:nvPr/>
-        </p:nvSpPr>
-        <p:spPr>
-          <a:xfrm>
-            <a:off x="4388291" y="2915364"/>
-            <a:ext cx="607218" cy="680084"/>
+          <p:cNvPr id="18" name="Freeform"/>
+          <p:cNvSpPr/>
+          <p:nvPr/>
+        </p:nvSpPr>
+        <p:spPr>
+          <a:xfrm>
+            <a:off x="4861921" y="2745343"/>
+            <a:ext cx="255031" cy="255031"/>
           </a:xfrm>
           <a:custGeom>
             <a:avLst/>
             <a:gdLst/>
             <a:pathLst>
-              <a:path w="607218" h="680084">
+              <a:path w="255031" h="255031">
                 <a:moveTo>
-                  <a:pt x="0" y="109299"/>
+                  <a:pt x="0" y="0"/>
                 </a:moveTo>
                 <a:cubicBezTo>
-                  <a:pt x="0" y="109299"/>
-                  <a:pt x="303609" y="680084"/>
-                  <a:pt x="303609" y="680084"/>
-                </a:cubicBezTo>
-                <a:cubicBezTo>
-                  <a:pt x="303609" y="680084"/>
-                  <a:pt x="607218" y="0"/>
-                  <a:pt x="607218" y="0"/>
+                  <a:pt x="0" y="0"/>
+                  <a:pt x="255031" y="255031"/>
+                  <a:pt x="255031" y="255031"/>
+                </a:cubicBezTo>
+                <a:cubicBezTo>
+                  <a:pt x="255031" y="255031"/>
+                  <a:pt x="0" y="255031"/>
+                  <a:pt x="0" y="255031"/>
+                </a:cubicBezTo>
+                <a:cubicBezTo>
+                  <a:pt x="0" y="255031"/>
+                  <a:pt x="0" y="0"/>
+                  <a:pt x="0" y="0"/>
+                </a:cubicBezTo>
+                <a:close/>
+              </a:path>
+            </a:pathLst>
+          </a:custGeom>
+          <a:solidFill>
+            <a:srgbClr val="D4A72C"/>
+          </a:solidFill>
+          <a:ln w="12700">
+            <a:noFill/>
+          </a:ln>
+        </p:spPr>
+      </p:sp>
+      <p:sp>
+        <p:nvSpPr>
+          <p:cNvPr id="19" name="Freeform"/>
+          <p:cNvSpPr/>
+          <p:nvPr/>
+        </p:nvSpPr>
+        <p:spPr>
+          <a:xfrm>
+            <a:off x="4861921" y="2745343"/>
+            <a:ext cx="255031" cy="255031"/>
+          </a:xfrm>
+          <a:custGeom>
+            <a:avLst/>
+            <a:gdLst/>
+            <a:pathLst>
+              <a:path w="255031" h="255031">
+                <a:moveTo>
+                  <a:pt x="0" y="0"/>
+                </a:moveTo>
+                <a:cubicBezTo>
+                  <a:pt x="0" y="0"/>
+                  <a:pt x="0" y="255031"/>
+                  <a:pt x="0" y="255031"/>
+                </a:cubicBezTo>
+                <a:cubicBezTo>
+                  <a:pt x="0" y="255031"/>
+                  <a:pt x="255031" y="255031"/>
+                  <a:pt x="255031" y="255031"/>
                 </a:cubicBezTo>
                 <a:close/>
               </a:path>
             </a:pathLst>
           </a:custGeom>
           <a:noFill/>
-          <a:ln w="812800">
+          <a:ln w="203200" cap="square">
             <a:solidFill>
-              <a:srgbClr val="FFFFFF"/>
+              <a:srgbClr val="18233A"/>
             </a:solidFill>
-            <a:round/>
-          </a:ln>
-        </p:spPr>
-      </p:sp>
-      <p:sp>
-        <p:nvSpPr>
-          <p:cNvPr id="17" name="Freeform"/>
-          <p:cNvSpPr/>
-          <p:nvPr/>
-        </p:nvSpPr>
-        <p:spPr>
-          <a:xfrm>
-            <a:off x="4728333" y="2915364"/>
-            <a:ext cx="267176" cy="598110"/>
+          </a:ln>
+        </p:spPr>
+      </p:sp>
+      <p:sp>
+        <p:nvSpPr>
+          <p:cNvPr id="20" name="Freeform"/>
+          <p:cNvSpPr/>
+          <p:nvPr/>
+        </p:nvSpPr>
+        <p:spPr>
+          <a:xfrm>
+            <a:off x="4461157" y="3194685"/>
+            <a:ext cx="461486" cy="340042"/>
           </a:xfrm>
           <a:custGeom>
             <a:avLst/>
             <a:gdLst/>
             <a:pathLst>
-              <a:path w="267176" h="598110">
+              <a:path w="461486" h="340042">
                 <a:moveTo>
-                  <a:pt x="0" y="598110"/>
+                  <a:pt x="0" y="194309"/>
                 </a:moveTo>
                 <a:cubicBezTo>
-                  <a:pt x="0" y="598110"/>
-                  <a:pt x="267176" y="0"/>
-                  <a:pt x="267176" y="0"/>
-                </a:cubicBezTo>
+                  <a:pt x="0" y="194309"/>
+                  <a:pt x="145732" y="340042"/>
+                  <a:pt x="145732" y="340042"/>
+                </a:cubicBezTo>
+                <a:cubicBezTo>
+                  <a:pt x="145732" y="340042"/>
+                  <a:pt x="461486" y="0"/>
+                  <a:pt x="461486" y="0"/>
+                </a:cubicBezTo>
+                <a:close/>
               </a:path>
             </a:pathLst>
           </a:custGeom>
           <a:noFill/>
-          <a:ln w="812800">
+          <a:ln w="558800" cap="square">
             <a:solidFill>
-              <a:srgbClr val="D4A72C"/>
+              <a:srgbClr val="18233A"/>
             </a:solidFill>
           </a:ln>
         </p:spPr>
       </p:sp>
       <p:sp>
         <p:nvSpPr>
-          <p:cNvPr id="18" name="Freeform"/>
-          <p:cNvSpPr/>
-          <p:nvPr/>
-        </p:nvSpPr>
-        <p:spPr>
-          <a:xfrm>
-            <a:off x="4370074" y="3722965"/>
-            <a:ext cx="643651" cy="78938"/>
-          </a:xfrm>
-          <a:custGeom>
-            <a:avLst/>
-            <a:gdLst/>
-            <a:pathLst>
-              <a:path w="643651" h="78938">
-                <a:moveTo>
-                  <a:pt x="39469" y="0"/>
-                </a:moveTo>
-                <a:cubicBezTo>
-                  <a:pt x="17670" y="0"/>
-                  <a:pt x="0" y="17670"/>
-                  <a:pt x="0" y="39468"/>
-                </a:cubicBezTo>
-                <a:cubicBezTo>
-                  <a:pt x="0" y="61267"/>
-                  <a:pt x="17670" y="78938"/>
-                  <a:pt x="39469" y="78938"/>
-                </a:cubicBezTo>
-                <a:cubicBezTo>
-                  <a:pt x="625980" y="78938"/>
-                  <a:pt x="643651" y="61267"/>
-                  <a:pt x="643651" y="39468"/>
-                </a:cubicBezTo>
-                <a:cubicBezTo>
-                  <a:pt x="643651" y="17670"/>
-                  <a:pt x="625980" y="0"/>
-                  <a:pt x="604181" y="0"/>
-                </a:cubicBezTo>
-                <a:close/>
-              </a:path>
-            </a:pathLst>
-          </a:custGeom>
-          <a:solidFill>
-            <a:srgbClr val="D4A72C"/>
-          </a:solidFill>
-          <a:ln w="12700">
-            <a:noFill/>
-          </a:ln>
-        </p:spPr>
-      </p:sp>
-      <p:sp>
-        <p:nvSpPr>
-          <p:cNvPr id="19" name="TextBox 18"/>
+          <p:cNvPr id="21" name="TextBox 20"/>
           <p:cNvSpPr txBox="1"/>
           <p:nvPr/>
         </p:nvSpPr>
@@ -7123,7 +7509,7 @@
       </p:sp>
       <p:sp>
         <p:nvSpPr>
-          <p:cNvPr id="20" name="Rounded Rectangle 19"/>
+          <p:cNvPr id="22" name="Rounded Rectangle 21"/>
           <p:cNvSpPr/>
           <p:nvPr/>
         </p:nvSpPr>
@@ -7152,7 +7538,7 @@
       </p:sp>
       <p:sp>
         <p:nvSpPr>
-          <p:cNvPr id="21" name="Rounded Rectangle 20"/>
+          <p:cNvPr id="23" name="Rounded Rectangle 22"/>
           <p:cNvSpPr/>
           <p:nvPr/>
         </p:nvSpPr>
@@ -7181,7 +7567,7 @@
       </p:sp>
       <p:sp>
         <p:nvSpPr>
-          <p:cNvPr id="22" name="Freeform"/>
+          <p:cNvPr id="24" name="Rectangle 23"/>
           <p:cNvSpPr/>
           <p:nvPr/>
         </p:nvSpPr>
@@ -7190,40 +7576,88 @@
             <a:off x="6722554" y="2514600"/>
             <a:ext cx="1554479" cy="1554480"/>
           </a:xfrm>
+          <a:prstGeom prst="rect">
+            <a:avLst/>
+          </a:prstGeom>
+          <a:solidFill>
+            <a:srgbClr val="18233A"/>
+          </a:solidFill>
+          <a:ln>
+            <a:noFill/>
+          </a:ln>
+        </p:spPr>
+        <p:style>
+          <a:lnRef idx="1">
+            <a:schemeClr val="accent1"/>
+          </a:lnRef>
+          <a:fillRef idx="3">
+            <a:schemeClr val="accent1"/>
+          </a:fillRef>
+          <a:effectRef idx="2">
+            <a:schemeClr val="accent1"/>
+          </a:effectRef>
+          <a:fontRef idx="minor">
+            <a:schemeClr val="lt1"/>
+          </a:fontRef>
+        </p:style>
+        <p:txBody>
+          <a:bodyPr rtlCol="0" anchor="ctr"/>
+          <a:lstStyle/>
+          <a:p>
+            <a:pPr algn="ctr"/>
+          </a:p>
+        </p:txBody>
+      </p:sp>
+      <p:sp>
+        <p:nvSpPr>
+          <p:cNvPr id="25" name="Freeform"/>
+          <p:cNvSpPr/>
+          <p:nvPr/>
+        </p:nvSpPr>
+        <p:spPr>
+          <a:xfrm>
+            <a:off x="7099030" y="2745343"/>
+            <a:ext cx="825817" cy="1092993"/>
+          </a:xfrm>
           <a:custGeom>
             <a:avLst/>
             <a:gdLst/>
             <a:pathLst>
-              <a:path w="1554479" h="1554480">
+              <a:path w="825817" h="1092993">
                 <a:moveTo>
-                  <a:pt x="352186" y="0"/>
+                  <a:pt x="0" y="0"/>
                 </a:moveTo>
                 <a:cubicBezTo>
-                  <a:pt x="157679" y="0"/>
-                  <a:pt x="0" y="157679"/>
-                  <a:pt x="0" y="352186"/>
-                </a:cubicBezTo>
-                <a:cubicBezTo>
-                  <a:pt x="0" y="1396800"/>
-                  <a:pt x="157679" y="1554480"/>
-                  <a:pt x="352186" y="1554480"/>
-                </a:cubicBezTo>
-                <a:cubicBezTo>
-                  <a:pt x="1396799" y="1554480"/>
-                  <a:pt x="1554479" y="1396800"/>
-                  <a:pt x="1554479" y="1202293"/>
-                </a:cubicBezTo>
-                <a:cubicBezTo>
-                  <a:pt x="1554479" y="157679"/>
-                  <a:pt x="1396799" y="0"/>
-                  <a:pt x="1202292" y="0"/>
+                  <a:pt x="0" y="0"/>
+                  <a:pt x="570785" y="0"/>
+                  <a:pt x="570785" y="0"/>
+                </a:cubicBezTo>
+                <a:cubicBezTo>
+                  <a:pt x="570785" y="0"/>
+                  <a:pt x="825817" y="255031"/>
+                  <a:pt x="825817" y="255031"/>
+                </a:cubicBezTo>
+                <a:cubicBezTo>
+                  <a:pt x="825817" y="255031"/>
+                  <a:pt x="825817" y="1092993"/>
+                  <a:pt x="825817" y="1092993"/>
+                </a:cubicBezTo>
+                <a:cubicBezTo>
+                  <a:pt x="825817" y="1092993"/>
+                  <a:pt x="0" y="1092993"/>
+                  <a:pt x="0" y="1092993"/>
+                </a:cubicBezTo>
+                <a:cubicBezTo>
+                  <a:pt x="0" y="1092993"/>
+                  <a:pt x="0" y="0"/>
+                  <a:pt x="0" y="0"/>
                 </a:cubicBezTo>
                 <a:close/>
               </a:path>
             </a:pathLst>
           </a:custGeom>
           <a:solidFill>
-            <a:srgbClr val="18233A"/>
+            <a:srgbClr val="FFFFFF"/>
           </a:solidFill>
           <a:ln w="12700">
             <a:noFill/>
@@ -7232,135 +7666,135 @@
       </p:sp>
       <p:sp>
         <p:nvSpPr>
-          <p:cNvPr id="23" name="Freeform"/>
-          <p:cNvSpPr/>
-          <p:nvPr/>
-        </p:nvSpPr>
-        <p:spPr>
-          <a:xfrm>
-            <a:off x="7196185" y="2915364"/>
-            <a:ext cx="607218" cy="680084"/>
+          <p:cNvPr id="26" name="Freeform"/>
+          <p:cNvSpPr/>
+          <p:nvPr/>
+        </p:nvSpPr>
+        <p:spPr>
+          <a:xfrm>
+            <a:off x="7669815" y="2745343"/>
+            <a:ext cx="255031" cy="255031"/>
           </a:xfrm>
           <a:custGeom>
             <a:avLst/>
             <a:gdLst/>
             <a:pathLst>
-              <a:path w="607218" h="680084">
+              <a:path w="255031" h="255031">
                 <a:moveTo>
-                  <a:pt x="0" y="109299"/>
+                  <a:pt x="0" y="0"/>
                 </a:moveTo>
                 <a:cubicBezTo>
-                  <a:pt x="0" y="109299"/>
-                  <a:pt x="303609" y="680084"/>
-                  <a:pt x="303609" y="680084"/>
-                </a:cubicBezTo>
-                <a:cubicBezTo>
-                  <a:pt x="303609" y="680084"/>
-                  <a:pt x="607218" y="0"/>
-                  <a:pt x="607218" y="0"/>
+                  <a:pt x="0" y="0"/>
+                  <a:pt x="255031" y="255031"/>
+                  <a:pt x="255031" y="255031"/>
+                </a:cubicBezTo>
+                <a:cubicBezTo>
+                  <a:pt x="255031" y="255031"/>
+                  <a:pt x="0" y="255031"/>
+                  <a:pt x="0" y="255031"/>
+                </a:cubicBezTo>
+                <a:cubicBezTo>
+                  <a:pt x="0" y="255031"/>
+                  <a:pt x="0" y="0"/>
+                  <a:pt x="0" y="0"/>
+                </a:cubicBezTo>
+                <a:close/>
+              </a:path>
+            </a:pathLst>
+          </a:custGeom>
+          <a:solidFill>
+            <a:srgbClr val="FFFFFF"/>
+          </a:solidFill>
+          <a:ln w="12700">
+            <a:noFill/>
+          </a:ln>
+        </p:spPr>
+      </p:sp>
+      <p:sp>
+        <p:nvSpPr>
+          <p:cNvPr id="27" name="Freeform"/>
+          <p:cNvSpPr/>
+          <p:nvPr/>
+        </p:nvSpPr>
+        <p:spPr>
+          <a:xfrm>
+            <a:off x="7669815" y="2745343"/>
+            <a:ext cx="255031" cy="255031"/>
+          </a:xfrm>
+          <a:custGeom>
+            <a:avLst/>
+            <a:gdLst/>
+            <a:pathLst>
+              <a:path w="255031" h="255031">
+                <a:moveTo>
+                  <a:pt x="0" y="0"/>
+                </a:moveTo>
+                <a:cubicBezTo>
+                  <a:pt x="0" y="0"/>
+                  <a:pt x="0" y="255031"/>
+                  <a:pt x="0" y="255031"/>
+                </a:cubicBezTo>
+                <a:cubicBezTo>
+                  <a:pt x="0" y="255031"/>
+                  <a:pt x="255031" y="255031"/>
+                  <a:pt x="255031" y="255031"/>
                 </a:cubicBezTo>
                 <a:close/>
               </a:path>
             </a:pathLst>
           </a:custGeom>
           <a:noFill/>
-          <a:ln w="812800">
+          <a:ln w="203200" cap="square">
             <a:solidFill>
-              <a:srgbClr val="FFFFFF"/>
+              <a:srgbClr val="18233A"/>
             </a:solidFill>
-            <a:round/>
-          </a:ln>
-        </p:spPr>
-      </p:sp>
-      <p:sp>
-        <p:nvSpPr>
-          <p:cNvPr id="24" name="Freeform"/>
-          <p:cNvSpPr/>
-          <p:nvPr/>
-        </p:nvSpPr>
-        <p:spPr>
-          <a:xfrm>
-            <a:off x="7536227" y="2915364"/>
-            <a:ext cx="267176" cy="598110"/>
+          </a:ln>
+        </p:spPr>
+      </p:sp>
+      <p:sp>
+        <p:nvSpPr>
+          <p:cNvPr id="28" name="Freeform"/>
+          <p:cNvSpPr/>
+          <p:nvPr/>
+        </p:nvSpPr>
+        <p:spPr>
+          <a:xfrm>
+            <a:off x="7269051" y="3194685"/>
+            <a:ext cx="461486" cy="340042"/>
           </a:xfrm>
           <a:custGeom>
             <a:avLst/>
             <a:gdLst/>
             <a:pathLst>
-              <a:path w="267176" h="598110">
+              <a:path w="461486" h="340042">
                 <a:moveTo>
-                  <a:pt x="0" y="598110"/>
+                  <a:pt x="0" y="194309"/>
                 </a:moveTo>
                 <a:cubicBezTo>
-                  <a:pt x="0" y="598110"/>
-                  <a:pt x="267176" y="0"/>
-                  <a:pt x="267176" y="0"/>
-                </a:cubicBezTo>
+                  <a:pt x="0" y="194309"/>
+                  <a:pt x="145732" y="340042"/>
+                  <a:pt x="145732" y="340042"/>
+                </a:cubicBezTo>
+                <a:cubicBezTo>
+                  <a:pt x="145732" y="340042"/>
+                  <a:pt x="461486" y="0"/>
+                  <a:pt x="461486" y="0"/>
+                </a:cubicBezTo>
+                <a:close/>
               </a:path>
             </a:pathLst>
           </a:custGeom>
           <a:noFill/>
-          <a:ln w="812800">
+          <a:ln w="558800" cap="square">
             <a:solidFill>
-              <a:srgbClr val="FFFFFF"/>
+              <a:srgbClr val="18233A"/>
             </a:solidFill>
           </a:ln>
         </p:spPr>
       </p:sp>
       <p:sp>
         <p:nvSpPr>
-          <p:cNvPr id="25" name="Freeform"/>
-          <p:cNvSpPr/>
-          <p:nvPr/>
-        </p:nvSpPr>
-        <p:spPr>
-          <a:xfrm>
-            <a:off x="7177968" y="3722965"/>
-            <a:ext cx="643651" cy="78938"/>
-          </a:xfrm>
-          <a:custGeom>
-            <a:avLst/>
-            <a:gdLst/>
-            <a:pathLst>
-              <a:path w="643651" h="78938">
-                <a:moveTo>
-                  <a:pt x="39469" y="0"/>
-                </a:moveTo>
-                <a:cubicBezTo>
-                  <a:pt x="17670" y="0"/>
-                  <a:pt x="0" y="17670"/>
-                  <a:pt x="0" y="39468"/>
-                </a:cubicBezTo>
-                <a:cubicBezTo>
-                  <a:pt x="0" y="61267"/>
-                  <a:pt x="17670" y="78938"/>
-                  <a:pt x="39469" y="78938"/>
-                </a:cubicBezTo>
-                <a:cubicBezTo>
-                  <a:pt x="625980" y="78938"/>
-                  <a:pt x="643651" y="61267"/>
-                  <a:pt x="643651" y="39468"/>
-                </a:cubicBezTo>
-                <a:cubicBezTo>
-                  <a:pt x="643651" y="17670"/>
-                  <a:pt x="625980" y="0"/>
-                  <a:pt x="604181" y="0"/>
-                </a:cubicBezTo>
-                <a:close/>
-              </a:path>
-            </a:pathLst>
-          </a:custGeom>
-          <a:solidFill>
-            <a:srgbClr val="FFFFFF"/>
-          </a:solidFill>
-          <a:ln w="12700">
-            <a:noFill/>
-          </a:ln>
-        </p:spPr>
-      </p:sp>
-      <p:sp>
-        <p:nvSpPr>
-          <p:cNvPr id="26" name="TextBox 25"/>
+          <p:cNvPr id="29" name="TextBox 28"/>
           <p:cNvSpPr txBox="1"/>
           <p:nvPr/>
         </p:nvSpPr>
@@ -7397,7 +7831,7 @@
       </p:sp>
       <p:sp>
         <p:nvSpPr>
-          <p:cNvPr id="27" name="Rounded Rectangle 26"/>
+          <p:cNvPr id="30" name="Rounded Rectangle 29"/>
           <p:cNvSpPr/>
           <p:nvPr/>
         </p:nvSpPr>
@@ -7426,7 +7860,7 @@
       </p:sp>
       <p:sp>
         <p:nvSpPr>
-          <p:cNvPr id="28" name="Rounded Rectangle 27"/>
+          <p:cNvPr id="31" name="Rounded Rectangle 30"/>
           <p:cNvSpPr/>
           <p:nvPr/>
         </p:nvSpPr>
@@ -7455,7 +7889,7 @@
       </p:sp>
       <p:sp>
         <p:nvSpPr>
-          <p:cNvPr id="29" name="Freeform"/>
+          <p:cNvPr id="32" name="Rectangle 31"/>
           <p:cNvSpPr/>
           <p:nvPr/>
         </p:nvSpPr>
@@ -7464,40 +7898,88 @@
             <a:off x="9530448" y="2514600"/>
             <a:ext cx="1554479" cy="1554480"/>
           </a:xfrm>
+          <a:prstGeom prst="rect">
+            <a:avLst/>
+          </a:prstGeom>
+          <a:solidFill>
+            <a:srgbClr val="FFFFFF"/>
+          </a:solidFill>
+          <a:ln>
+            <a:noFill/>
+          </a:ln>
+        </p:spPr>
+        <p:style>
+          <a:lnRef idx="1">
+            <a:schemeClr val="accent1"/>
+          </a:lnRef>
+          <a:fillRef idx="3">
+            <a:schemeClr val="accent1"/>
+          </a:fillRef>
+          <a:effectRef idx="2">
+            <a:schemeClr val="accent1"/>
+          </a:effectRef>
+          <a:fontRef idx="minor">
+            <a:schemeClr val="lt1"/>
+          </a:fontRef>
+        </p:style>
+        <p:txBody>
+          <a:bodyPr rtlCol="0" anchor="ctr"/>
+          <a:lstStyle/>
+          <a:p>
+            <a:pPr algn="ctr"/>
+          </a:p>
+        </p:txBody>
+      </p:sp>
+      <p:sp>
+        <p:nvSpPr>
+          <p:cNvPr id="33" name="Freeform"/>
+          <p:cNvSpPr/>
+          <p:nvPr/>
+        </p:nvSpPr>
+        <p:spPr>
+          <a:xfrm>
+            <a:off x="9906923" y="2745343"/>
+            <a:ext cx="825817" cy="1092993"/>
+          </a:xfrm>
           <a:custGeom>
             <a:avLst/>
             <a:gdLst/>
             <a:pathLst>
-              <a:path w="1554479" h="1554480">
+              <a:path w="825817" h="1092993">
                 <a:moveTo>
-                  <a:pt x="352186" y="0"/>
+                  <a:pt x="0" y="0"/>
                 </a:moveTo>
                 <a:cubicBezTo>
-                  <a:pt x="157679" y="0"/>
-                  <a:pt x="0" y="157679"/>
-                  <a:pt x="0" y="352186"/>
-                </a:cubicBezTo>
-                <a:cubicBezTo>
-                  <a:pt x="0" y="1396800"/>
-                  <a:pt x="157679" y="1554480"/>
-                  <a:pt x="352186" y="1554480"/>
-                </a:cubicBezTo>
-                <a:cubicBezTo>
-                  <a:pt x="1396799" y="1554480"/>
-                  <a:pt x="1554479" y="1396800"/>
-                  <a:pt x="1554479" y="1202293"/>
-                </a:cubicBezTo>
-                <a:cubicBezTo>
-                  <a:pt x="1554479" y="157679"/>
-                  <a:pt x="1396799" y="0"/>
-                  <a:pt x="1202292" y="0"/>
+                  <a:pt x="0" y="0"/>
+                  <a:pt x="570785" y="0"/>
+                  <a:pt x="570785" y="0"/>
+                </a:cubicBezTo>
+                <a:cubicBezTo>
+                  <a:pt x="570785" y="0"/>
+                  <a:pt x="825817" y="255031"/>
+                  <a:pt x="825817" y="255031"/>
+                </a:cubicBezTo>
+                <a:cubicBezTo>
+                  <a:pt x="825817" y="255031"/>
+                  <a:pt x="825817" y="1092993"/>
+                  <a:pt x="825817" y="1092993"/>
+                </a:cubicBezTo>
+                <a:cubicBezTo>
+                  <a:pt x="825817" y="1092993"/>
+                  <a:pt x="0" y="1092993"/>
+                  <a:pt x="0" y="1092993"/>
+                </a:cubicBezTo>
+                <a:cubicBezTo>
+                  <a:pt x="0" y="1092993"/>
+                  <a:pt x="0" y="0"/>
+                  <a:pt x="0" y="0"/>
                 </a:cubicBezTo>
                 <a:close/>
               </a:path>
             </a:pathLst>
           </a:custGeom>
           <a:solidFill>
-            <a:srgbClr val="FFFFFF"/>
+            <a:srgbClr val="18233A"/>
           </a:solidFill>
           <a:ln w="12700">
             <a:noFill/>
@@ -7506,135 +7988,135 @@
       </p:sp>
       <p:sp>
         <p:nvSpPr>
-          <p:cNvPr id="30" name="Freeform"/>
-          <p:cNvSpPr/>
-          <p:nvPr/>
-        </p:nvSpPr>
-        <p:spPr>
-          <a:xfrm>
-            <a:off x="10004078" y="2915364"/>
-            <a:ext cx="607218" cy="680084"/>
+          <p:cNvPr id="34" name="Freeform"/>
+          <p:cNvSpPr/>
+          <p:nvPr/>
+        </p:nvSpPr>
+        <p:spPr>
+          <a:xfrm>
+            <a:off x="10477709" y="2745343"/>
+            <a:ext cx="255031" cy="255031"/>
           </a:xfrm>
           <a:custGeom>
             <a:avLst/>
             <a:gdLst/>
             <a:pathLst>
-              <a:path w="607218" h="680084">
+              <a:path w="255031" h="255031">
                 <a:moveTo>
-                  <a:pt x="0" y="109299"/>
+                  <a:pt x="0" y="0"/>
                 </a:moveTo>
                 <a:cubicBezTo>
-                  <a:pt x="0" y="109299"/>
-                  <a:pt x="303609" y="680084"/>
-                  <a:pt x="303609" y="680084"/>
-                </a:cubicBezTo>
-                <a:cubicBezTo>
-                  <a:pt x="303609" y="680084"/>
-                  <a:pt x="607218" y="0"/>
-                  <a:pt x="607218" y="0"/>
+                  <a:pt x="0" y="0"/>
+                  <a:pt x="255031" y="255031"/>
+                  <a:pt x="255031" y="255031"/>
+                </a:cubicBezTo>
+                <a:cubicBezTo>
+                  <a:pt x="255031" y="255031"/>
+                  <a:pt x="0" y="255031"/>
+                  <a:pt x="0" y="255031"/>
+                </a:cubicBezTo>
+                <a:cubicBezTo>
+                  <a:pt x="0" y="255031"/>
+                  <a:pt x="0" y="0"/>
+                  <a:pt x="0" y="0"/>
+                </a:cubicBezTo>
+                <a:close/>
+              </a:path>
+            </a:pathLst>
+          </a:custGeom>
+          <a:solidFill>
+            <a:srgbClr val="18233A"/>
+          </a:solidFill>
+          <a:ln w="12700">
+            <a:noFill/>
+          </a:ln>
+        </p:spPr>
+      </p:sp>
+      <p:sp>
+        <p:nvSpPr>
+          <p:cNvPr id="35" name="Freeform"/>
+          <p:cNvSpPr/>
+          <p:nvPr/>
+        </p:nvSpPr>
+        <p:spPr>
+          <a:xfrm>
+            <a:off x="10477709" y="2745343"/>
+            <a:ext cx="255031" cy="255031"/>
+          </a:xfrm>
+          <a:custGeom>
+            <a:avLst/>
+            <a:gdLst/>
+            <a:pathLst>
+              <a:path w="255031" h="255031">
+                <a:moveTo>
+                  <a:pt x="0" y="0"/>
+                </a:moveTo>
+                <a:cubicBezTo>
+                  <a:pt x="0" y="0"/>
+                  <a:pt x="0" y="255031"/>
+                  <a:pt x="0" y="255031"/>
+                </a:cubicBezTo>
+                <a:cubicBezTo>
+                  <a:pt x="0" y="255031"/>
+                  <a:pt x="255031" y="255031"/>
+                  <a:pt x="255031" y="255031"/>
                 </a:cubicBezTo>
                 <a:close/>
               </a:path>
             </a:pathLst>
           </a:custGeom>
           <a:noFill/>
-          <a:ln w="812800">
+          <a:ln w="203200" cap="square">
             <a:solidFill>
-              <a:srgbClr val="18233A"/>
+              <a:srgbClr val="FFFFFF"/>
             </a:solidFill>
-            <a:round/>
-          </a:ln>
-        </p:spPr>
-      </p:sp>
-      <p:sp>
-        <p:nvSpPr>
-          <p:cNvPr id="31" name="Freeform"/>
-          <p:cNvSpPr/>
-          <p:nvPr/>
-        </p:nvSpPr>
-        <p:spPr>
-          <a:xfrm>
-            <a:off x="10344121" y="2915364"/>
-            <a:ext cx="267176" cy="598110"/>
+          </a:ln>
+        </p:spPr>
+      </p:sp>
+      <p:sp>
+        <p:nvSpPr>
+          <p:cNvPr id="36" name="Freeform"/>
+          <p:cNvSpPr/>
+          <p:nvPr/>
+        </p:nvSpPr>
+        <p:spPr>
+          <a:xfrm>
+            <a:off x="10076945" y="3194685"/>
+            <a:ext cx="461486" cy="340042"/>
           </a:xfrm>
           <a:custGeom>
             <a:avLst/>
             <a:gdLst/>
             <a:pathLst>
-              <a:path w="267176" h="598110">
+              <a:path w="461486" h="340042">
                 <a:moveTo>
-                  <a:pt x="0" y="598110"/>
+                  <a:pt x="0" y="194309"/>
                 </a:moveTo>
                 <a:cubicBezTo>
-                  <a:pt x="0" y="598110"/>
-                  <a:pt x="267176" y="0"/>
-                  <a:pt x="267176" y="0"/>
-                </a:cubicBezTo>
+                  <a:pt x="0" y="194309"/>
+                  <a:pt x="145732" y="340042"/>
+                  <a:pt x="145732" y="340042"/>
+                </a:cubicBezTo>
+                <a:cubicBezTo>
+                  <a:pt x="145732" y="340042"/>
+                  <a:pt x="461486" y="0"/>
+                  <a:pt x="461486" y="0"/>
+                </a:cubicBezTo>
+                <a:close/>
               </a:path>
             </a:pathLst>
           </a:custGeom>
           <a:noFill/>
-          <a:ln w="812800">
+          <a:ln w="558800" cap="square">
             <a:solidFill>
-              <a:srgbClr val="18233A"/>
+              <a:srgbClr val="FFFFFF"/>
             </a:solidFill>
           </a:ln>
         </p:spPr>
       </p:sp>
       <p:sp>
         <p:nvSpPr>
-          <p:cNvPr id="32" name="Freeform"/>
-          <p:cNvSpPr/>
-          <p:nvPr/>
-        </p:nvSpPr>
-        <p:spPr>
-          <a:xfrm>
-            <a:off x="9985862" y="3722965"/>
-            <a:ext cx="643651" cy="78938"/>
-          </a:xfrm>
-          <a:custGeom>
-            <a:avLst/>
-            <a:gdLst/>
-            <a:pathLst>
-              <a:path w="643651" h="78938">
-                <a:moveTo>
-                  <a:pt x="39469" y="0"/>
-                </a:moveTo>
-                <a:cubicBezTo>
-                  <a:pt x="17670" y="0"/>
-                  <a:pt x="0" y="17670"/>
-                  <a:pt x="0" y="39468"/>
-                </a:cubicBezTo>
-                <a:cubicBezTo>
-                  <a:pt x="0" y="61267"/>
-                  <a:pt x="17670" y="78938"/>
-                  <a:pt x="39469" y="78938"/>
-                </a:cubicBezTo>
-                <a:cubicBezTo>
-                  <a:pt x="625980" y="78938"/>
-                  <a:pt x="643651" y="61267"/>
-                  <a:pt x="643651" y="39468"/>
-                </a:cubicBezTo>
-                <a:cubicBezTo>
-                  <a:pt x="643651" y="17670"/>
-                  <a:pt x="625980" y="0"/>
-                  <a:pt x="604181" y="0"/>
-                </a:cubicBezTo>
-                <a:close/>
-              </a:path>
-            </a:pathLst>
-          </a:custGeom>
-          <a:solidFill>
-            <a:srgbClr val="18233A"/>
-          </a:solidFill>
-          <a:ln w="12700">
-            <a:noFill/>
-          </a:ln>
-        </p:spPr>
-      </p:sp>
-      <p:sp>
-        <p:nvSpPr>
-          <p:cNvPr id="33" name="TextBox 32"/>
+          <p:cNvPr id="37" name="TextBox 36"/>
           <p:cNvSpPr txBox="1"/>
           <p:nvPr/>
         </p:nvSpPr>
@@ -7671,7 +8153,7 @@
       </p:sp>
       <p:sp>
         <p:nvSpPr>
-          <p:cNvPr id="34" name="TextBox 33"/>
+          <p:cNvPr id="38" name="TextBox 37"/>
           <p:cNvSpPr txBox="1"/>
           <p:nvPr/>
         </p:nvSpPr>
@@ -7701,7 +8183,7 @@
                 <a:ea typeface="Segoe UI"/>
                 <a:cs typeface="Segoe UI"/>
               </a:rPr>
-              <a:t>Mantén siempre el contraste: el oro solo sobre azul/tinta, o texto oscuro sobre el oro.</a:t>
+              <a:t>Mantén siempre el contraste: el oro solo sobre tinta/azul, o texto oscuro sobre el oro.</a:t>
             </a:r>
           </a:p>
         </p:txBody>
@@ -7916,7 +8398,7 @@
       </p:sp>
       <p:sp>
         <p:nvSpPr>
-          <p:cNvPr id="8" name="Freeform"/>
+          <p:cNvPr id="8" name="Rectangle 7"/>
           <p:cNvSpPr/>
           <p:nvPr/>
         </p:nvSpPr>
@@ -7925,53 +8407,89 @@
             <a:off x="914400" y="2084831"/>
             <a:ext cx="1325880" cy="1325879"/>
           </a:xfrm>
+          <a:prstGeom prst="rect">
+            <a:avLst/>
+          </a:prstGeom>
+          <a:solidFill>
+            <a:srgbClr val="18233A"/>
+          </a:solidFill>
+          <a:ln>
+            <a:noFill/>
+          </a:ln>
+        </p:spPr>
+        <p:style>
+          <a:lnRef idx="1">
+            <a:schemeClr val="accent1"/>
+          </a:lnRef>
+          <a:fillRef idx="3">
+            <a:schemeClr val="accent1"/>
+          </a:fillRef>
+          <a:effectRef idx="2">
+            <a:schemeClr val="accent1"/>
+          </a:effectRef>
+          <a:fontRef idx="minor">
+            <a:schemeClr val="lt1"/>
+          </a:fontRef>
+        </p:style>
+        <p:txBody>
+          <a:bodyPr rtlCol="0" anchor="ctr"/>
+          <a:lstStyle/>
+          <a:p>
+            <a:pPr algn="ctr"/>
+          </a:p>
+        </p:txBody>
+      </p:sp>
+      <p:sp>
+        <p:nvSpPr>
+          <p:cNvPr id="9" name="Freeform"/>
+          <p:cNvSpPr/>
+          <p:nvPr/>
+        </p:nvSpPr>
+        <p:spPr>
+          <a:xfrm>
+            <a:off x="1235511" y="2281642"/>
+            <a:ext cx="704373" cy="932259"/>
+          </a:xfrm>
           <a:custGeom>
             <a:avLst/>
             <a:gdLst/>
             <a:pathLst>
-              <a:path w="1325880" h="1325879">
+              <a:path w="704373" h="932259">
                 <a:moveTo>
-                  <a:pt x="300394" y="0"/>
+                  <a:pt x="0" y="0"/>
                 </a:moveTo>
                 <a:cubicBezTo>
-                  <a:pt x="134491" y="0"/>
-                  <a:pt x="0" y="134491"/>
-                  <a:pt x="0" y="300394"/>
-                </a:cubicBezTo>
-                <a:cubicBezTo>
-                  <a:pt x="0" y="1191387"/>
-                  <a:pt x="134491" y="1325879"/>
-                  <a:pt x="300394" y="1325879"/>
-                </a:cubicBezTo>
-                <a:cubicBezTo>
-                  <a:pt x="1191388" y="1325879"/>
-                  <a:pt x="1325880" y="1191387"/>
-                  <a:pt x="1325880" y="1025484"/>
-                </a:cubicBezTo>
-                <a:cubicBezTo>
-                  <a:pt x="1325880" y="134491"/>
-                  <a:pt x="1191388" y="0"/>
-                  <a:pt x="1025485" y="0"/>
+                  <a:pt x="0" y="0"/>
+                  <a:pt x="486846" y="0"/>
+                  <a:pt x="486846" y="0"/>
+                </a:cubicBezTo>
+                <a:cubicBezTo>
+                  <a:pt x="486846" y="0"/>
+                  <a:pt x="704373" y="217527"/>
+                  <a:pt x="704373" y="217527"/>
+                </a:cubicBezTo>
+                <a:cubicBezTo>
+                  <a:pt x="704373" y="217527"/>
+                  <a:pt x="704373" y="932259"/>
+                  <a:pt x="704373" y="932259"/>
+                </a:cubicBezTo>
+                <a:cubicBezTo>
+                  <a:pt x="704373" y="932259"/>
+                  <a:pt x="0" y="932259"/>
+                  <a:pt x="0" y="932259"/>
+                </a:cubicBezTo>
+                <a:cubicBezTo>
+                  <a:pt x="0" y="932259"/>
+                  <a:pt x="0" y="0"/>
+                  <a:pt x="0" y="0"/>
                 </a:cubicBezTo>
                 <a:close/>
               </a:path>
             </a:pathLst>
           </a:custGeom>
-          <a:gradFill rotWithShape="1" flip="none">
-            <a:gsLst>
-              <a:gs pos="0">
-                <a:srgbClr val="3D8EC7">
-                  <a:alpha val="100000"/>
-                </a:srgbClr>
-              </a:gs>
-              <a:gs pos="100000">
-                <a:srgbClr val="0F3D63">
-                  <a:alpha val="100000"/>
-                </a:srgbClr>
-              </a:gs>
-            </a:gsLst>
-            <a:lin ang="2700000" scaled="1"/>
-          </a:gradFill>
+          <a:solidFill>
+            <a:srgbClr val="F5F7FA"/>
+          </a:solidFill>
           <a:ln w="12700">
             <a:noFill/>
           </a:ln>
@@ -7979,135 +8497,135 @@
       </p:sp>
       <p:sp>
         <p:nvSpPr>
-          <p:cNvPr id="9" name="Freeform"/>
-          <p:cNvSpPr/>
-          <p:nvPr/>
-        </p:nvSpPr>
-        <p:spPr>
-          <a:xfrm>
-            <a:off x="1318379" y="2426660"/>
-            <a:ext cx="517921" cy="580072"/>
+          <p:cNvPr id="10" name="Freeform"/>
+          <p:cNvSpPr/>
+          <p:nvPr/>
+        </p:nvSpPr>
+        <p:spPr>
+          <a:xfrm>
+            <a:off x="1722358" y="2281642"/>
+            <a:ext cx="217527" cy="217527"/>
           </a:xfrm>
           <a:custGeom>
             <a:avLst/>
             <a:gdLst/>
             <a:pathLst>
-              <a:path w="517921" h="580072">
+              <a:path w="217527" h="217527">
                 <a:moveTo>
-                  <a:pt x="0" y="93225"/>
+                  <a:pt x="0" y="0"/>
                 </a:moveTo>
                 <a:cubicBezTo>
-                  <a:pt x="0" y="93225"/>
-                  <a:pt x="258960" y="580072"/>
-                  <a:pt x="258960" y="580072"/>
-                </a:cubicBezTo>
-                <a:cubicBezTo>
-                  <a:pt x="258960" y="580072"/>
-                  <a:pt x="517921" y="0"/>
-                  <a:pt x="517921" y="0"/>
+                  <a:pt x="0" y="0"/>
+                  <a:pt x="217527" y="217527"/>
+                  <a:pt x="217527" y="217527"/>
+                </a:cubicBezTo>
+                <a:cubicBezTo>
+                  <a:pt x="217527" y="217527"/>
+                  <a:pt x="0" y="217527"/>
+                  <a:pt x="0" y="217527"/>
+                </a:cubicBezTo>
+                <a:cubicBezTo>
+                  <a:pt x="0" y="217527"/>
+                  <a:pt x="0" y="0"/>
+                  <a:pt x="0" y="0"/>
+                </a:cubicBezTo>
+                <a:close/>
+              </a:path>
+            </a:pathLst>
+          </a:custGeom>
+          <a:solidFill>
+            <a:srgbClr val="D4A72C"/>
+          </a:solidFill>
+          <a:ln w="12700">
+            <a:noFill/>
+          </a:ln>
+        </p:spPr>
+      </p:sp>
+      <p:sp>
+        <p:nvSpPr>
+          <p:cNvPr id="11" name="Freeform"/>
+          <p:cNvSpPr/>
+          <p:nvPr/>
+        </p:nvSpPr>
+        <p:spPr>
+          <a:xfrm>
+            <a:off x="1722358" y="2281642"/>
+            <a:ext cx="217527" cy="217527"/>
+          </a:xfrm>
+          <a:custGeom>
+            <a:avLst/>
+            <a:gdLst/>
+            <a:pathLst>
+              <a:path w="217527" h="217527">
+                <a:moveTo>
+                  <a:pt x="0" y="0"/>
+                </a:moveTo>
+                <a:cubicBezTo>
+                  <a:pt x="0" y="0"/>
+                  <a:pt x="0" y="217527"/>
+                  <a:pt x="0" y="217527"/>
+                </a:cubicBezTo>
+                <a:cubicBezTo>
+                  <a:pt x="0" y="217527"/>
+                  <a:pt x="217527" y="217527"/>
+                  <a:pt x="217527" y="217527"/>
                 </a:cubicBezTo>
                 <a:close/>
               </a:path>
             </a:pathLst>
           </a:custGeom>
           <a:noFill/>
-          <a:ln w="812800">
+          <a:ln w="203200" cap="square">
             <a:solidFill>
-              <a:srgbClr val="FFFFFF"/>
+              <a:srgbClr val="18233A"/>
             </a:solidFill>
-            <a:round/>
-          </a:ln>
-        </p:spPr>
-      </p:sp>
-      <p:sp>
-        <p:nvSpPr>
-          <p:cNvPr id="10" name="Freeform"/>
-          <p:cNvSpPr/>
-          <p:nvPr/>
-        </p:nvSpPr>
-        <p:spPr>
-          <a:xfrm>
-            <a:off x="1608415" y="2426660"/>
-            <a:ext cx="227885" cy="510153"/>
+          </a:ln>
+        </p:spPr>
+      </p:sp>
+      <p:sp>
+        <p:nvSpPr>
+          <p:cNvPr id="12" name="Freeform"/>
+          <p:cNvSpPr/>
+          <p:nvPr/>
+        </p:nvSpPr>
+        <p:spPr>
+          <a:xfrm>
+            <a:off x="1380529" y="2664904"/>
+            <a:ext cx="393620" cy="290036"/>
           </a:xfrm>
           <a:custGeom>
             <a:avLst/>
             <a:gdLst/>
             <a:pathLst>
-              <a:path w="227885" h="510153">
+              <a:path w="393620" h="290036">
                 <a:moveTo>
-                  <a:pt x="0" y="510153"/>
+                  <a:pt x="0" y="165734"/>
                 </a:moveTo>
                 <a:cubicBezTo>
-                  <a:pt x="0" y="510153"/>
-                  <a:pt x="227885" y="0"/>
-                  <a:pt x="227885" y="0"/>
-                </a:cubicBezTo>
+                  <a:pt x="0" y="165734"/>
+                  <a:pt x="124301" y="290036"/>
+                  <a:pt x="124301" y="290036"/>
+                </a:cubicBezTo>
+                <a:cubicBezTo>
+                  <a:pt x="124301" y="290036"/>
+                  <a:pt x="393620" y="0"/>
+                  <a:pt x="393620" y="0"/>
+                </a:cubicBezTo>
+                <a:close/>
               </a:path>
             </a:pathLst>
           </a:custGeom>
           <a:noFill/>
-          <a:ln w="812800">
+          <a:ln w="558800" cap="square">
             <a:solidFill>
-              <a:srgbClr val="D4A72C"/>
+              <a:srgbClr val="18233A"/>
             </a:solidFill>
           </a:ln>
         </p:spPr>
       </p:sp>
       <p:sp>
         <p:nvSpPr>
-          <p:cNvPr id="11" name="Freeform"/>
-          <p:cNvSpPr/>
-          <p:nvPr/>
-        </p:nvSpPr>
-        <p:spPr>
-          <a:xfrm>
-            <a:off x="1302841" y="3115496"/>
-            <a:ext cx="548997" cy="67329"/>
-          </a:xfrm>
-          <a:custGeom>
-            <a:avLst/>
-            <a:gdLst/>
-            <a:pathLst>
-              <a:path w="548997" h="67329">
-                <a:moveTo>
-                  <a:pt x="33664" y="0"/>
-                </a:moveTo>
-                <a:cubicBezTo>
-                  <a:pt x="15072" y="0"/>
-                  <a:pt x="0" y="15072"/>
-                  <a:pt x="0" y="33664"/>
-                </a:cubicBezTo>
-                <a:cubicBezTo>
-                  <a:pt x="0" y="52256"/>
-                  <a:pt x="15072" y="67329"/>
-                  <a:pt x="33664" y="67329"/>
-                </a:cubicBezTo>
-                <a:cubicBezTo>
-                  <a:pt x="533924" y="67329"/>
-                  <a:pt x="548997" y="52256"/>
-                  <a:pt x="548997" y="33664"/>
-                </a:cubicBezTo>
-                <a:cubicBezTo>
-                  <a:pt x="548997" y="15072"/>
-                  <a:pt x="533924" y="0"/>
-                  <a:pt x="515332" y="0"/>
-                </a:cubicBezTo>
-                <a:close/>
-              </a:path>
-            </a:pathLst>
-          </a:custGeom>
-          <a:solidFill>
-            <a:srgbClr val="D4A72C"/>
-          </a:solidFill>
-          <a:ln w="12700">
-            <a:noFill/>
-          </a:ln>
-        </p:spPr>
-      </p:sp>
-      <p:sp>
-        <p:nvSpPr>
-          <p:cNvPr id="12" name="TextBox 11"/>
+          <p:cNvPr id="13" name="TextBox 12"/>
           <p:cNvSpPr txBox="1"/>
           <p:nvPr/>
         </p:nvSpPr>
@@ -8144,7 +8662,7 @@
       </p:sp>
       <p:sp>
         <p:nvSpPr>
-          <p:cNvPr id="13" name="TextBox 12"/>
+          <p:cNvPr id="14" name="TextBox 13"/>
           <p:cNvSpPr txBox="1"/>
           <p:nvPr/>
         </p:nvSpPr>
@@ -8181,7 +8699,7 @@
       </p:sp>
       <p:sp>
         <p:nvSpPr>
-          <p:cNvPr id="14" name="TextBox 13"/>
+          <p:cNvPr id="15" name="TextBox 14"/>
           <p:cNvSpPr txBox="1"/>
           <p:nvPr/>
         </p:nvSpPr>
@@ -8218,7 +8736,7 @@
       </p:sp>
       <p:sp>
         <p:nvSpPr>
-          <p:cNvPr id="15" name="TextBox 14"/>
+          <p:cNvPr id="16" name="TextBox 15"/>
           <p:cNvSpPr txBox="1"/>
           <p:nvPr/>
         </p:nvSpPr>
@@ -8255,7 +8773,7 @@
       </p:sp>
       <p:sp>
         <p:nvSpPr>
-          <p:cNvPr id="16" name="Rounded Rectangle 15"/>
+          <p:cNvPr id="17" name="Rounded Rectangle 16"/>
           <p:cNvSpPr/>
           <p:nvPr/>
         </p:nvSpPr>
@@ -8284,7 +8802,7 @@
       </p:sp>
       <p:sp>
         <p:nvSpPr>
-          <p:cNvPr id="17" name="Freeform"/>
+          <p:cNvPr id="18" name="Rectangle 17"/>
           <p:cNvSpPr/>
           <p:nvPr/>
         </p:nvSpPr>
@@ -8293,40 +8811,88 @@
             <a:off x="9252965" y="1993392"/>
             <a:ext cx="1143000" cy="1143000"/>
           </a:xfrm>
+          <a:prstGeom prst="rect">
+            <a:avLst/>
+          </a:prstGeom>
+          <a:solidFill>
+            <a:srgbClr val="FFFFFF"/>
+          </a:solidFill>
+          <a:ln>
+            <a:noFill/>
+          </a:ln>
+        </p:spPr>
+        <p:style>
+          <a:lnRef idx="1">
+            <a:schemeClr val="accent1"/>
+          </a:lnRef>
+          <a:fillRef idx="3">
+            <a:schemeClr val="accent1"/>
+          </a:fillRef>
+          <a:effectRef idx="2">
+            <a:schemeClr val="accent1"/>
+          </a:effectRef>
+          <a:fontRef idx="minor">
+            <a:schemeClr val="lt1"/>
+          </a:fontRef>
+        </p:style>
+        <p:txBody>
+          <a:bodyPr rtlCol="0" anchor="ctr"/>
+          <a:lstStyle/>
+          <a:p>
+            <a:pPr algn="ctr"/>
+          </a:p>
+        </p:txBody>
+      </p:sp>
+      <p:sp>
+        <p:nvSpPr>
+          <p:cNvPr id="19" name="Freeform"/>
+          <p:cNvSpPr/>
+          <p:nvPr/>
+        </p:nvSpPr>
+        <p:spPr>
+          <a:xfrm>
+            <a:off x="9529786" y="2163056"/>
+            <a:ext cx="607218" cy="803671"/>
+          </a:xfrm>
           <a:custGeom>
             <a:avLst/>
             <a:gdLst/>
             <a:pathLst>
-              <a:path w="1143000" h="1143000">
+              <a:path w="607218" h="803671">
                 <a:moveTo>
-                  <a:pt x="258960" y="0"/>
+                  <a:pt x="0" y="0"/>
                 </a:moveTo>
                 <a:cubicBezTo>
-                  <a:pt x="115940" y="0"/>
-                  <a:pt x="0" y="115940"/>
-                  <a:pt x="0" y="258960"/>
-                </a:cubicBezTo>
-                <a:cubicBezTo>
-                  <a:pt x="0" y="1027059"/>
-                  <a:pt x="115940" y="1143000"/>
-                  <a:pt x="258960" y="1143000"/>
-                </a:cubicBezTo>
-                <a:cubicBezTo>
-                  <a:pt x="1027059" y="1143000"/>
-                  <a:pt x="1143000" y="1027059"/>
-                  <a:pt x="1143000" y="884039"/>
-                </a:cubicBezTo>
-                <a:cubicBezTo>
-                  <a:pt x="1143000" y="115940"/>
-                  <a:pt x="1027059" y="0"/>
-                  <a:pt x="884039" y="0"/>
+                  <a:pt x="0" y="0"/>
+                  <a:pt x="419694" y="0"/>
+                  <a:pt x="419694" y="0"/>
+                </a:cubicBezTo>
+                <a:cubicBezTo>
+                  <a:pt x="419694" y="0"/>
+                  <a:pt x="607218" y="187523"/>
+                  <a:pt x="607218" y="187523"/>
+                </a:cubicBezTo>
+                <a:cubicBezTo>
+                  <a:pt x="607218" y="187523"/>
+                  <a:pt x="607218" y="803671"/>
+                  <a:pt x="607218" y="803671"/>
+                </a:cubicBezTo>
+                <a:cubicBezTo>
+                  <a:pt x="607218" y="803671"/>
+                  <a:pt x="0" y="803671"/>
+                  <a:pt x="0" y="803671"/>
+                </a:cubicBezTo>
+                <a:cubicBezTo>
+                  <a:pt x="0" y="803671"/>
+                  <a:pt x="0" y="0"/>
+                  <a:pt x="0" y="0"/>
                 </a:cubicBezTo>
                 <a:close/>
               </a:path>
             </a:pathLst>
           </a:custGeom>
           <a:solidFill>
-            <a:srgbClr val="FFFFFF"/>
+            <a:srgbClr val="18233A"/>
           </a:solidFill>
           <a:ln w="12700">
             <a:noFill/>
@@ -8335,135 +8901,135 @@
       </p:sp>
       <p:sp>
         <p:nvSpPr>
-          <p:cNvPr id="18" name="Freeform"/>
-          <p:cNvSpPr/>
-          <p:nvPr/>
-        </p:nvSpPr>
-        <p:spPr>
-          <a:xfrm>
-            <a:off x="9601223" y="2288071"/>
-            <a:ext cx="446484" cy="500062"/>
+          <p:cNvPr id="20" name="Freeform"/>
+          <p:cNvSpPr/>
+          <p:nvPr/>
+        </p:nvSpPr>
+        <p:spPr>
+          <a:xfrm>
+            <a:off x="9949481" y="2163056"/>
+            <a:ext cx="187523" cy="187523"/>
           </a:xfrm>
           <a:custGeom>
             <a:avLst/>
             <a:gdLst/>
             <a:pathLst>
-              <a:path w="446484" h="500062">
+              <a:path w="187523" h="187523">
                 <a:moveTo>
-                  <a:pt x="0" y="80367"/>
+                  <a:pt x="0" y="0"/>
                 </a:moveTo>
                 <a:cubicBezTo>
-                  <a:pt x="0" y="80367"/>
-                  <a:pt x="223242" y="500062"/>
-                  <a:pt x="223242" y="500062"/>
-                </a:cubicBezTo>
-                <a:cubicBezTo>
-                  <a:pt x="223242" y="500062"/>
-                  <a:pt x="446484" y="0"/>
-                  <a:pt x="446484" y="0"/>
+                  <a:pt x="0" y="0"/>
+                  <a:pt x="187523" y="187523"/>
+                  <a:pt x="187523" y="187523"/>
+                </a:cubicBezTo>
+                <a:cubicBezTo>
+                  <a:pt x="187523" y="187523"/>
+                  <a:pt x="0" y="187523"/>
+                  <a:pt x="0" y="187523"/>
+                </a:cubicBezTo>
+                <a:cubicBezTo>
+                  <a:pt x="0" y="187523"/>
+                  <a:pt x="0" y="0"/>
+                  <a:pt x="0" y="0"/>
+                </a:cubicBezTo>
+                <a:close/>
+              </a:path>
+            </a:pathLst>
+          </a:custGeom>
+          <a:solidFill>
+            <a:srgbClr val="18233A"/>
+          </a:solidFill>
+          <a:ln w="12700">
+            <a:noFill/>
+          </a:ln>
+        </p:spPr>
+      </p:sp>
+      <p:sp>
+        <p:nvSpPr>
+          <p:cNvPr id="21" name="Freeform"/>
+          <p:cNvSpPr/>
+          <p:nvPr/>
+        </p:nvSpPr>
+        <p:spPr>
+          <a:xfrm>
+            <a:off x="9949481" y="2163056"/>
+            <a:ext cx="187523" cy="187523"/>
+          </a:xfrm>
+          <a:custGeom>
+            <a:avLst/>
+            <a:gdLst/>
+            <a:pathLst>
+              <a:path w="187523" h="187523">
+                <a:moveTo>
+                  <a:pt x="0" y="0"/>
+                </a:moveTo>
+                <a:cubicBezTo>
+                  <a:pt x="0" y="0"/>
+                  <a:pt x="0" y="187523"/>
+                  <a:pt x="0" y="187523"/>
+                </a:cubicBezTo>
+                <a:cubicBezTo>
+                  <a:pt x="0" y="187523"/>
+                  <a:pt x="187523" y="187523"/>
+                  <a:pt x="187523" y="187523"/>
                 </a:cubicBezTo>
                 <a:close/>
               </a:path>
             </a:pathLst>
           </a:custGeom>
           <a:noFill/>
-          <a:ln w="812800">
+          <a:ln w="203200" cap="square">
             <a:solidFill>
-              <a:srgbClr val="18233A"/>
+              <a:srgbClr val="FFFFFF"/>
             </a:solidFill>
-            <a:round/>
-          </a:ln>
-        </p:spPr>
-      </p:sp>
-      <p:sp>
-        <p:nvSpPr>
-          <p:cNvPr id="19" name="Freeform"/>
-          <p:cNvSpPr/>
-          <p:nvPr/>
-        </p:nvSpPr>
-        <p:spPr>
-          <a:xfrm>
-            <a:off x="9851255" y="2288071"/>
-            <a:ext cx="196453" cy="439787"/>
+          </a:ln>
+        </p:spPr>
+      </p:sp>
+      <p:sp>
+        <p:nvSpPr>
+          <p:cNvPr id="22" name="Freeform"/>
+          <p:cNvSpPr/>
+          <p:nvPr/>
+        </p:nvSpPr>
+        <p:spPr>
+          <a:xfrm>
+            <a:off x="9654801" y="2493454"/>
+            <a:ext cx="339328" cy="250031"/>
           </a:xfrm>
           <a:custGeom>
             <a:avLst/>
             <a:gdLst/>
             <a:pathLst>
-              <a:path w="196453" h="439787">
+              <a:path w="339328" h="250031">
                 <a:moveTo>
-                  <a:pt x="0" y="439787"/>
+                  <a:pt x="0" y="142874"/>
                 </a:moveTo>
                 <a:cubicBezTo>
-                  <a:pt x="0" y="439787"/>
-                  <a:pt x="196453" y="0"/>
-                  <a:pt x="196453" y="0"/>
-                </a:cubicBezTo>
+                  <a:pt x="0" y="142874"/>
+                  <a:pt x="107156" y="250031"/>
+                  <a:pt x="107156" y="250031"/>
+                </a:cubicBezTo>
+                <a:cubicBezTo>
+                  <a:pt x="107156" y="250031"/>
+                  <a:pt x="339328" y="0"/>
+                  <a:pt x="339328" y="0"/>
+                </a:cubicBezTo>
+                <a:close/>
               </a:path>
             </a:pathLst>
           </a:custGeom>
           <a:noFill/>
-          <a:ln w="812800">
+          <a:ln w="558800" cap="square">
             <a:solidFill>
-              <a:srgbClr val="18233A"/>
+              <a:srgbClr val="FFFFFF"/>
             </a:solidFill>
           </a:ln>
         </p:spPr>
       </p:sp>
       <p:sp>
         <p:nvSpPr>
-          <p:cNvPr id="20" name="Freeform"/>
-          <p:cNvSpPr/>
-          <p:nvPr/>
-        </p:nvSpPr>
-        <p:spPr>
-          <a:xfrm>
-            <a:off x="9587829" y="2881895"/>
-            <a:ext cx="473273" cy="58042"/>
-          </a:xfrm>
-          <a:custGeom>
-            <a:avLst/>
-            <a:gdLst/>
-            <a:pathLst>
-              <a:path w="473273" h="58042">
-                <a:moveTo>
-                  <a:pt x="29021" y="0"/>
-                </a:moveTo>
-                <a:cubicBezTo>
-                  <a:pt x="12993" y="0"/>
-                  <a:pt x="0" y="12993"/>
-                  <a:pt x="0" y="29021"/>
-                </a:cubicBezTo>
-                <a:cubicBezTo>
-                  <a:pt x="0" y="45048"/>
-                  <a:pt x="12993" y="58042"/>
-                  <a:pt x="29021" y="58042"/>
-                </a:cubicBezTo>
-                <a:cubicBezTo>
-                  <a:pt x="460279" y="58042"/>
-                  <a:pt x="473273" y="45048"/>
-                  <a:pt x="473273" y="29021"/>
-                </a:cubicBezTo>
-                <a:cubicBezTo>
-                  <a:pt x="473273" y="12993"/>
-                  <a:pt x="460279" y="0"/>
-                  <a:pt x="444251" y="0"/>
-                </a:cubicBezTo>
-                <a:close/>
-              </a:path>
-            </a:pathLst>
-          </a:custGeom>
-          <a:solidFill>
-            <a:srgbClr val="18233A"/>
-          </a:solidFill>
-          <a:ln w="12700">
-            <a:noFill/>
-          </a:ln>
-        </p:spPr>
-      </p:sp>
-      <p:sp>
-        <p:nvSpPr>
-          <p:cNvPr id="21" name="TextBox 20"/>
+          <p:cNvPr id="23" name="TextBox 22"/>
           <p:cNvSpPr txBox="1"/>
           <p:nvPr/>
         </p:nvSpPr>
@@ -8500,7 +9066,7 @@
       </p:sp>
       <p:sp>
         <p:nvSpPr>
-          <p:cNvPr id="22" name="TextBox 21"/>
+          <p:cNvPr id="24" name="TextBox 23"/>
           <p:cNvSpPr txBox="1"/>
           <p:nvPr/>
         </p:nvSpPr>
@@ -8537,7 +9103,7 @@
       </p:sp>
       <p:sp>
         <p:nvSpPr>
-          <p:cNvPr id="23" name="Rounded Rectangle 22"/>
+          <p:cNvPr id="25" name="Rounded Rectangle 24"/>
           <p:cNvSpPr/>
           <p:nvPr/>
         </p:nvSpPr>
@@ -8566,7 +9132,7 @@
       </p:sp>
       <p:sp>
         <p:nvSpPr>
-          <p:cNvPr id="24" name="Rounded Rectangle 23"/>
+          <p:cNvPr id="26" name="Rounded Rectangle 25"/>
           <p:cNvSpPr/>
           <p:nvPr/>
         </p:nvSpPr>
@@ -8595,7 +9161,7 @@
       </p:sp>
       <p:sp>
         <p:nvSpPr>
-          <p:cNvPr id="25" name="Freeform"/>
+          <p:cNvPr id="27" name="Rectangle 26"/>
           <p:cNvSpPr/>
           <p:nvPr/>
         </p:nvSpPr>
@@ -8604,53 +9170,89 @@
             <a:off x="1681429" y="4114800"/>
             <a:ext cx="1371600" cy="1371600"/>
           </a:xfrm>
+          <a:prstGeom prst="rect">
+            <a:avLst/>
+          </a:prstGeom>
+          <a:solidFill>
+            <a:srgbClr val="18233A"/>
+          </a:solidFill>
+          <a:ln>
+            <a:noFill/>
+          </a:ln>
+        </p:spPr>
+        <p:style>
+          <a:lnRef idx="1">
+            <a:schemeClr val="accent1"/>
+          </a:lnRef>
+          <a:fillRef idx="3">
+            <a:schemeClr val="accent1"/>
+          </a:fillRef>
+          <a:effectRef idx="2">
+            <a:schemeClr val="accent1"/>
+          </a:effectRef>
+          <a:fontRef idx="minor">
+            <a:schemeClr val="lt1"/>
+          </a:fontRef>
+        </p:style>
+        <p:txBody>
+          <a:bodyPr rtlCol="0" anchor="ctr"/>
+          <a:lstStyle/>
+          <a:p>
+            <a:pPr algn="ctr"/>
+          </a:p>
+        </p:txBody>
+      </p:sp>
+      <p:sp>
+        <p:nvSpPr>
+          <p:cNvPr id="28" name="Freeform"/>
+          <p:cNvSpPr/>
+          <p:nvPr/>
+        </p:nvSpPr>
+        <p:spPr>
+          <a:xfrm>
+            <a:off x="2013613" y="4318396"/>
+            <a:ext cx="728662" cy="964406"/>
+          </a:xfrm>
           <a:custGeom>
             <a:avLst/>
             <a:gdLst/>
             <a:pathLst>
-              <a:path w="1371600" h="1371600">
+              <a:path w="728662" h="964406">
                 <a:moveTo>
-                  <a:pt x="310753" y="0"/>
+                  <a:pt x="0" y="0"/>
                 </a:moveTo>
                 <a:cubicBezTo>
-                  <a:pt x="139128" y="0"/>
-                  <a:pt x="0" y="139128"/>
-                  <a:pt x="0" y="310753"/>
-                </a:cubicBezTo>
-                <a:cubicBezTo>
-                  <a:pt x="0" y="1232471"/>
-                  <a:pt x="139128" y="1371600"/>
-                  <a:pt x="310753" y="1371600"/>
-                </a:cubicBezTo>
-                <a:cubicBezTo>
-                  <a:pt x="1232471" y="1371600"/>
-                  <a:pt x="1371600" y="1232471"/>
-                  <a:pt x="1371600" y="1060846"/>
-                </a:cubicBezTo>
-                <a:cubicBezTo>
-                  <a:pt x="1371600" y="139128"/>
-                  <a:pt x="1232471" y="0"/>
-                  <a:pt x="1060846" y="0"/>
+                  <a:pt x="0" y="0"/>
+                  <a:pt x="503634" y="0"/>
+                  <a:pt x="503634" y="0"/>
+                </a:cubicBezTo>
+                <a:cubicBezTo>
+                  <a:pt x="503634" y="0"/>
+                  <a:pt x="728662" y="225028"/>
+                  <a:pt x="728662" y="225028"/>
+                </a:cubicBezTo>
+                <a:cubicBezTo>
+                  <a:pt x="728662" y="225028"/>
+                  <a:pt x="728662" y="964406"/>
+                  <a:pt x="728662" y="964406"/>
+                </a:cubicBezTo>
+                <a:cubicBezTo>
+                  <a:pt x="728662" y="964406"/>
+                  <a:pt x="0" y="964406"/>
+                  <a:pt x="0" y="964406"/>
+                </a:cubicBezTo>
+                <a:cubicBezTo>
+                  <a:pt x="0" y="964406"/>
+                  <a:pt x="0" y="0"/>
+                  <a:pt x="0" y="0"/>
                 </a:cubicBezTo>
                 <a:close/>
               </a:path>
             </a:pathLst>
           </a:custGeom>
-          <a:gradFill rotWithShape="1" flip="none">
-            <a:gsLst>
-              <a:gs pos="0">
-                <a:srgbClr val="3D8EC7">
-                  <a:alpha val="100000"/>
-                </a:srgbClr>
-              </a:gs>
-              <a:gs pos="100000">
-                <a:srgbClr val="0F3D63">
-                  <a:alpha val="100000"/>
-                </a:srgbClr>
-              </a:gs>
-            </a:gsLst>
-            <a:lin ang="2700000" scaled="1"/>
-          </a:gradFill>
+          <a:solidFill>
+            <a:srgbClr val="F5F7FA"/>
+          </a:solidFill>
           <a:ln w="12700">
             <a:noFill/>
           </a:ln>
@@ -8658,135 +9260,135 @@
       </p:sp>
       <p:sp>
         <p:nvSpPr>
-          <p:cNvPr id="26" name="Freeform"/>
-          <p:cNvSpPr/>
-          <p:nvPr/>
-        </p:nvSpPr>
-        <p:spPr>
-          <a:xfrm>
-            <a:off x="2099338" y="4468415"/>
-            <a:ext cx="535781" cy="600075"/>
+          <p:cNvPr id="29" name="Freeform"/>
+          <p:cNvSpPr/>
+          <p:nvPr/>
+        </p:nvSpPr>
+        <p:spPr>
+          <a:xfrm>
+            <a:off x="2517247" y="4318396"/>
+            <a:ext cx="225028" cy="225028"/>
           </a:xfrm>
           <a:custGeom>
             <a:avLst/>
             <a:gdLst/>
             <a:pathLst>
-              <a:path w="535781" h="600075">
+              <a:path w="225028" h="225028">
                 <a:moveTo>
-                  <a:pt x="0" y="96440"/>
+                  <a:pt x="0" y="0"/>
                 </a:moveTo>
                 <a:cubicBezTo>
-                  <a:pt x="0" y="96440"/>
-                  <a:pt x="267890" y="600075"/>
-                  <a:pt x="267890" y="600075"/>
-                </a:cubicBezTo>
-                <a:cubicBezTo>
-                  <a:pt x="267890" y="600075"/>
-                  <a:pt x="535781" y="0"/>
-                  <a:pt x="535781" y="0"/>
+                  <a:pt x="0" y="0"/>
+                  <a:pt x="225028" y="225028"/>
+                  <a:pt x="225028" y="225028"/>
+                </a:cubicBezTo>
+                <a:cubicBezTo>
+                  <a:pt x="225028" y="225028"/>
+                  <a:pt x="0" y="225028"/>
+                  <a:pt x="0" y="225028"/>
+                </a:cubicBezTo>
+                <a:cubicBezTo>
+                  <a:pt x="0" y="225028"/>
+                  <a:pt x="0" y="0"/>
+                  <a:pt x="0" y="0"/>
+                </a:cubicBezTo>
+                <a:close/>
+              </a:path>
+            </a:pathLst>
+          </a:custGeom>
+          <a:solidFill>
+            <a:srgbClr val="D4A72C"/>
+          </a:solidFill>
+          <a:ln w="12700">
+            <a:noFill/>
+          </a:ln>
+        </p:spPr>
+      </p:sp>
+      <p:sp>
+        <p:nvSpPr>
+          <p:cNvPr id="30" name="Freeform"/>
+          <p:cNvSpPr/>
+          <p:nvPr/>
+        </p:nvSpPr>
+        <p:spPr>
+          <a:xfrm>
+            <a:off x="2517247" y="4318396"/>
+            <a:ext cx="225028" cy="225028"/>
+          </a:xfrm>
+          <a:custGeom>
+            <a:avLst/>
+            <a:gdLst/>
+            <a:pathLst>
+              <a:path w="225028" h="225028">
+                <a:moveTo>
+                  <a:pt x="0" y="0"/>
+                </a:moveTo>
+                <a:cubicBezTo>
+                  <a:pt x="0" y="0"/>
+                  <a:pt x="0" y="225028"/>
+                  <a:pt x="0" y="225028"/>
+                </a:cubicBezTo>
+                <a:cubicBezTo>
+                  <a:pt x="0" y="225028"/>
+                  <a:pt x="225028" y="225028"/>
+                  <a:pt x="225028" y="225028"/>
                 </a:cubicBezTo>
                 <a:close/>
               </a:path>
             </a:pathLst>
           </a:custGeom>
           <a:noFill/>
-          <a:ln w="812800">
+          <a:ln w="203200" cap="square">
             <a:solidFill>
-              <a:srgbClr val="FFFFFF"/>
+              <a:srgbClr val="18233A"/>
             </a:solidFill>
-            <a:round/>
-          </a:ln>
-        </p:spPr>
-      </p:sp>
-      <p:sp>
-        <p:nvSpPr>
-          <p:cNvPr id="27" name="Freeform"/>
-          <p:cNvSpPr/>
-          <p:nvPr/>
-        </p:nvSpPr>
-        <p:spPr>
-          <a:xfrm>
-            <a:off x="2399376" y="4468415"/>
-            <a:ext cx="235743" cy="527744"/>
+          </a:ln>
+        </p:spPr>
+      </p:sp>
+      <p:sp>
+        <p:nvSpPr>
+          <p:cNvPr id="31" name="Freeform"/>
+          <p:cNvSpPr/>
+          <p:nvPr/>
+        </p:nvSpPr>
+        <p:spPr>
+          <a:xfrm>
+            <a:off x="2163632" y="4714875"/>
+            <a:ext cx="407193" cy="300037"/>
           </a:xfrm>
           <a:custGeom>
             <a:avLst/>
             <a:gdLst/>
             <a:pathLst>
-              <a:path w="235743" h="527744">
+              <a:path w="407193" h="300037">
                 <a:moveTo>
-                  <a:pt x="0" y="527744"/>
+                  <a:pt x="0" y="171449"/>
                 </a:moveTo>
                 <a:cubicBezTo>
-                  <a:pt x="0" y="527744"/>
-                  <a:pt x="235743" y="0"/>
-                  <a:pt x="235743" y="0"/>
-                </a:cubicBezTo>
+                  <a:pt x="0" y="171449"/>
+                  <a:pt x="128587" y="300037"/>
+                  <a:pt x="128587" y="300037"/>
+                </a:cubicBezTo>
+                <a:cubicBezTo>
+                  <a:pt x="128587" y="300037"/>
+                  <a:pt x="407193" y="0"/>
+                  <a:pt x="407193" y="0"/>
+                </a:cubicBezTo>
+                <a:close/>
               </a:path>
             </a:pathLst>
           </a:custGeom>
           <a:noFill/>
-          <a:ln w="812800">
+          <a:ln w="558800" cap="square">
             <a:solidFill>
-              <a:srgbClr val="D4A72C"/>
+              <a:srgbClr val="18233A"/>
             </a:solidFill>
           </a:ln>
         </p:spPr>
       </p:sp>
       <p:sp>
         <p:nvSpPr>
-          <p:cNvPr id="28" name="Freeform"/>
-          <p:cNvSpPr/>
-          <p:nvPr/>
-        </p:nvSpPr>
-        <p:spPr>
-          <a:xfrm>
-            <a:off x="2083265" y="5181004"/>
-            <a:ext cx="567928" cy="69651"/>
-          </a:xfrm>
-          <a:custGeom>
-            <a:avLst/>
-            <a:gdLst/>
-            <a:pathLst>
-              <a:path w="567928" h="69651">
-                <a:moveTo>
-                  <a:pt x="34825" y="0"/>
-                </a:moveTo>
-                <a:cubicBezTo>
-                  <a:pt x="15592" y="0"/>
-                  <a:pt x="0" y="15591"/>
-                  <a:pt x="0" y="34825"/>
-                </a:cubicBezTo>
-                <a:cubicBezTo>
-                  <a:pt x="0" y="54059"/>
-                  <a:pt x="15592" y="69651"/>
-                  <a:pt x="34825" y="69651"/>
-                </a:cubicBezTo>
-                <a:cubicBezTo>
-                  <a:pt x="552335" y="69651"/>
-                  <a:pt x="567928" y="54059"/>
-                  <a:pt x="567928" y="34825"/>
-                </a:cubicBezTo>
-                <a:cubicBezTo>
-                  <a:pt x="567928" y="15591"/>
-                  <a:pt x="552335" y="0"/>
-                  <a:pt x="533102" y="0"/>
-                </a:cubicBezTo>
-                <a:close/>
-              </a:path>
-            </a:pathLst>
-          </a:custGeom>
-          <a:solidFill>
-            <a:srgbClr val="D4A72C"/>
-          </a:solidFill>
-          <a:ln w="12700">
-            <a:noFill/>
-          </a:ln>
-        </p:spPr>
-      </p:sp>
-      <p:sp>
-        <p:nvSpPr>
-          <p:cNvPr id="29" name="TextBox 28"/>
+          <p:cNvPr id="32" name="TextBox 31"/>
           <p:cNvSpPr txBox="1"/>
           <p:nvPr/>
         </p:nvSpPr>
@@ -8823,7 +9425,7 @@
       </p:sp>
       <p:sp>
         <p:nvSpPr>
-          <p:cNvPr id="30" name="TextBox 29"/>
+          <p:cNvPr id="33" name="TextBox 32"/>
           <p:cNvSpPr txBox="1"/>
           <p:nvPr/>
         </p:nvSpPr>
@@ -8860,7 +9462,7 @@
       </p:sp>
       <p:sp>
         <p:nvSpPr>
-          <p:cNvPr id="31" name="Rounded Rectangle 30"/>
+          <p:cNvPr id="34" name="Rounded Rectangle 33"/>
           <p:cNvSpPr/>
           <p:nvPr/>
         </p:nvSpPr>
@@ -8889,7 +9491,7 @@
       </p:sp>
       <p:sp>
         <p:nvSpPr>
-          <p:cNvPr id="32" name="Rounded Rectangle 31"/>
+          <p:cNvPr id="35" name="Rounded Rectangle 34"/>
           <p:cNvSpPr/>
           <p:nvPr/>
         </p:nvSpPr>
@@ -8918,7 +9520,7 @@
       </p:sp>
       <p:sp>
         <p:nvSpPr>
-          <p:cNvPr id="33" name="Rectangle 32"/>
+          <p:cNvPr id="36" name="Rectangle 35"/>
           <p:cNvSpPr/>
           <p:nvPr/>
         </p:nvSpPr>
@@ -8947,7 +9549,7 @@
       </p:sp>
       <p:sp>
         <p:nvSpPr>
-          <p:cNvPr id="34" name="Rectangle 33"/>
+          <p:cNvPr id="37" name="Rectangle 36"/>
           <p:cNvSpPr/>
           <p:nvPr/>
         </p:nvSpPr>
@@ -8976,7 +9578,7 @@
       </p:sp>
       <p:sp>
         <p:nvSpPr>
-          <p:cNvPr id="35" name="Rectangle 34"/>
+          <p:cNvPr id="38" name="Rectangle 37"/>
           <p:cNvSpPr/>
           <p:nvPr/>
         </p:nvSpPr>
@@ -9005,7 +9607,7 @@
       </p:sp>
       <p:sp>
         <p:nvSpPr>
-          <p:cNvPr id="36" name="Rectangle 35"/>
+          <p:cNvPr id="39" name="Rectangle 38"/>
           <p:cNvSpPr/>
           <p:nvPr/>
         </p:nvSpPr>
@@ -9034,7 +9636,7 @@
       </p:sp>
       <p:sp>
         <p:nvSpPr>
-          <p:cNvPr id="37" name="Freeform"/>
+          <p:cNvPr id="40" name="Rectangle 39"/>
           <p:cNvSpPr/>
           <p:nvPr/>
         </p:nvSpPr>
@@ -9043,53 +9645,89 @@
             <a:off x="5547207" y="4434840"/>
             <a:ext cx="1097280" cy="1097280"/>
           </a:xfrm>
+          <a:prstGeom prst="rect">
+            <a:avLst/>
+          </a:prstGeom>
+          <a:solidFill>
+            <a:srgbClr val="18233A"/>
+          </a:solidFill>
+          <a:ln>
+            <a:noFill/>
+          </a:ln>
+        </p:spPr>
+        <p:style>
+          <a:lnRef idx="1">
+            <a:schemeClr val="accent1"/>
+          </a:lnRef>
+          <a:fillRef idx="3">
+            <a:schemeClr val="accent1"/>
+          </a:fillRef>
+          <a:effectRef idx="2">
+            <a:schemeClr val="accent1"/>
+          </a:effectRef>
+          <a:fontRef idx="minor">
+            <a:schemeClr val="lt1"/>
+          </a:fontRef>
+        </p:style>
+        <p:txBody>
+          <a:bodyPr rtlCol="0" anchor="ctr"/>
+          <a:lstStyle/>
+          <a:p>
+            <a:pPr algn="ctr"/>
+          </a:p>
+        </p:txBody>
+      </p:sp>
+      <p:sp>
+        <p:nvSpPr>
+          <p:cNvPr id="41" name="Freeform"/>
+          <p:cNvSpPr/>
+          <p:nvPr/>
+        </p:nvSpPr>
+        <p:spPr>
+          <a:xfrm>
+            <a:off x="5812955" y="4597717"/>
+            <a:ext cx="582929" cy="771525"/>
+          </a:xfrm>
           <a:custGeom>
             <a:avLst/>
             <a:gdLst/>
             <a:pathLst>
-              <a:path w="1097280" h="1097280">
+              <a:path w="582929" h="771525">
                 <a:moveTo>
-                  <a:pt x="248602" y="0"/>
+                  <a:pt x="0" y="0"/>
                 </a:moveTo>
                 <a:cubicBezTo>
-                  <a:pt x="111303" y="0"/>
-                  <a:pt x="0" y="111303"/>
-                  <a:pt x="0" y="248602"/>
-                </a:cubicBezTo>
-                <a:cubicBezTo>
-                  <a:pt x="0" y="985976"/>
-                  <a:pt x="111303" y="1097280"/>
-                  <a:pt x="248602" y="1097280"/>
-                </a:cubicBezTo>
-                <a:cubicBezTo>
-                  <a:pt x="985976" y="1097280"/>
-                  <a:pt x="1097280" y="985976"/>
-                  <a:pt x="1097280" y="848677"/>
-                </a:cubicBezTo>
-                <a:cubicBezTo>
-                  <a:pt x="1097280" y="111303"/>
-                  <a:pt x="985976" y="0"/>
-                  <a:pt x="848677" y="0"/>
+                  <a:pt x="0" y="0"/>
+                  <a:pt x="402906" y="0"/>
+                  <a:pt x="402906" y="0"/>
+                </a:cubicBezTo>
+                <a:cubicBezTo>
+                  <a:pt x="402906" y="0"/>
+                  <a:pt x="582929" y="180022"/>
+                  <a:pt x="582929" y="180022"/>
+                </a:cubicBezTo>
+                <a:cubicBezTo>
+                  <a:pt x="582929" y="180022"/>
+                  <a:pt x="582929" y="771525"/>
+                  <a:pt x="582929" y="771525"/>
+                </a:cubicBezTo>
+                <a:cubicBezTo>
+                  <a:pt x="582929" y="771525"/>
+                  <a:pt x="0" y="771525"/>
+                  <a:pt x="0" y="771525"/>
+                </a:cubicBezTo>
+                <a:cubicBezTo>
+                  <a:pt x="0" y="771525"/>
+                  <a:pt x="0" y="0"/>
+                  <a:pt x="0" y="0"/>
                 </a:cubicBezTo>
                 <a:close/>
               </a:path>
             </a:pathLst>
           </a:custGeom>
-          <a:gradFill rotWithShape="1" flip="none">
-            <a:gsLst>
-              <a:gs pos="0">
-                <a:srgbClr val="3D8EC7">
-                  <a:alpha val="100000"/>
-                </a:srgbClr>
-              </a:gs>
-              <a:gs pos="100000">
-                <a:srgbClr val="0F3D63">
-                  <a:alpha val="100000"/>
-                </a:srgbClr>
-              </a:gs>
-            </a:gsLst>
-            <a:lin ang="2700000" scaled="1"/>
-          </a:gradFill>
+          <a:solidFill>
+            <a:srgbClr val="F5F7FA"/>
+          </a:solidFill>
           <a:ln w="12700">
             <a:noFill/>
           </a:ln>
@@ -9097,135 +9735,135 @@
       </p:sp>
       <p:sp>
         <p:nvSpPr>
-          <p:cNvPr id="38" name="Freeform"/>
-          <p:cNvSpPr/>
-          <p:nvPr/>
-        </p:nvSpPr>
-        <p:spPr>
-          <a:xfrm>
-            <a:off x="5881535" y="4717732"/>
-            <a:ext cx="428625" cy="480059"/>
+          <p:cNvPr id="42" name="Freeform"/>
+          <p:cNvSpPr/>
+          <p:nvPr/>
+        </p:nvSpPr>
+        <p:spPr>
+          <a:xfrm>
+            <a:off x="6215862" y="4597717"/>
+            <a:ext cx="180022" cy="180022"/>
           </a:xfrm>
           <a:custGeom>
             <a:avLst/>
             <a:gdLst/>
             <a:pathLst>
-              <a:path w="428625" h="480059">
+              <a:path w="180022" h="180022">
                 <a:moveTo>
-                  <a:pt x="0" y="77152"/>
+                  <a:pt x="0" y="0"/>
                 </a:moveTo>
                 <a:cubicBezTo>
-                  <a:pt x="0" y="77152"/>
-                  <a:pt x="214312" y="480059"/>
-                  <a:pt x="214312" y="480059"/>
-                </a:cubicBezTo>
-                <a:cubicBezTo>
-                  <a:pt x="214312" y="480059"/>
-                  <a:pt x="428625" y="0"/>
-                  <a:pt x="428625" y="0"/>
+                  <a:pt x="0" y="0"/>
+                  <a:pt x="180022" y="180022"/>
+                  <a:pt x="180022" y="180022"/>
+                </a:cubicBezTo>
+                <a:cubicBezTo>
+                  <a:pt x="180022" y="180022"/>
+                  <a:pt x="0" y="180022"/>
+                  <a:pt x="0" y="180022"/>
+                </a:cubicBezTo>
+                <a:cubicBezTo>
+                  <a:pt x="0" y="180022"/>
+                  <a:pt x="0" y="0"/>
+                  <a:pt x="0" y="0"/>
+                </a:cubicBezTo>
+                <a:close/>
+              </a:path>
+            </a:pathLst>
+          </a:custGeom>
+          <a:solidFill>
+            <a:srgbClr val="D4A72C"/>
+          </a:solidFill>
+          <a:ln w="12700">
+            <a:noFill/>
+          </a:ln>
+        </p:spPr>
+      </p:sp>
+      <p:sp>
+        <p:nvSpPr>
+          <p:cNvPr id="43" name="Freeform"/>
+          <p:cNvSpPr/>
+          <p:nvPr/>
+        </p:nvSpPr>
+        <p:spPr>
+          <a:xfrm>
+            <a:off x="6215862" y="4597717"/>
+            <a:ext cx="180022" cy="180022"/>
+          </a:xfrm>
+          <a:custGeom>
+            <a:avLst/>
+            <a:gdLst/>
+            <a:pathLst>
+              <a:path w="180022" h="180022">
+                <a:moveTo>
+                  <a:pt x="0" y="0"/>
+                </a:moveTo>
+                <a:cubicBezTo>
+                  <a:pt x="0" y="0"/>
+                  <a:pt x="0" y="180022"/>
+                  <a:pt x="0" y="180022"/>
+                </a:cubicBezTo>
+                <a:cubicBezTo>
+                  <a:pt x="0" y="180022"/>
+                  <a:pt x="180022" y="180022"/>
+                  <a:pt x="180022" y="180022"/>
                 </a:cubicBezTo>
                 <a:close/>
               </a:path>
             </a:pathLst>
           </a:custGeom>
           <a:noFill/>
-          <a:ln w="812800">
+          <a:ln w="203200" cap="square">
             <a:solidFill>
-              <a:srgbClr val="FFFFFF"/>
+              <a:srgbClr val="18233A"/>
             </a:solidFill>
-            <a:round/>
-          </a:ln>
-        </p:spPr>
-      </p:sp>
-      <p:sp>
-        <p:nvSpPr>
-          <p:cNvPr id="39" name="Freeform"/>
-          <p:cNvSpPr/>
-          <p:nvPr/>
-        </p:nvSpPr>
-        <p:spPr>
-          <a:xfrm>
-            <a:off x="6121565" y="4717732"/>
-            <a:ext cx="188594" cy="422195"/>
+          </a:ln>
+        </p:spPr>
+      </p:sp>
+      <p:sp>
+        <p:nvSpPr>
+          <p:cNvPr id="44" name="Freeform"/>
+          <p:cNvSpPr/>
+          <p:nvPr/>
+        </p:nvSpPr>
+        <p:spPr>
+          <a:xfrm>
+            <a:off x="5932970" y="4914900"/>
+            <a:ext cx="325755" cy="240029"/>
           </a:xfrm>
           <a:custGeom>
             <a:avLst/>
             <a:gdLst/>
             <a:pathLst>
-              <a:path w="188594" h="422195">
+              <a:path w="325755" h="240029">
                 <a:moveTo>
-                  <a:pt x="0" y="422195"/>
+                  <a:pt x="0" y="137159"/>
                 </a:moveTo>
                 <a:cubicBezTo>
-                  <a:pt x="0" y="422195"/>
-                  <a:pt x="188594" y="0"/>
-                  <a:pt x="188594" y="0"/>
-                </a:cubicBezTo>
+                  <a:pt x="0" y="137159"/>
+                  <a:pt x="102869" y="240029"/>
+                  <a:pt x="102869" y="240029"/>
+                </a:cubicBezTo>
+                <a:cubicBezTo>
+                  <a:pt x="102869" y="240029"/>
+                  <a:pt x="325755" y="0"/>
+                  <a:pt x="325755" y="0"/>
+                </a:cubicBezTo>
+                <a:close/>
               </a:path>
             </a:pathLst>
           </a:custGeom>
           <a:noFill/>
-          <a:ln w="812800">
+          <a:ln w="558800" cap="square">
             <a:solidFill>
-              <a:srgbClr val="D4A72C"/>
+              <a:srgbClr val="18233A"/>
             </a:solidFill>
           </a:ln>
         </p:spPr>
       </p:sp>
       <p:sp>
         <p:nvSpPr>
-          <p:cNvPr id="40" name="Freeform"/>
-          <p:cNvSpPr/>
-          <p:nvPr/>
-        </p:nvSpPr>
-        <p:spPr>
-          <a:xfrm>
-            <a:off x="5868676" y="5287803"/>
-            <a:ext cx="454342" cy="55721"/>
-          </a:xfrm>
-          <a:custGeom>
-            <a:avLst/>
-            <a:gdLst/>
-            <a:pathLst>
-              <a:path w="454342" h="55721">
-                <a:moveTo>
-                  <a:pt x="27860" y="0"/>
-                </a:moveTo>
-                <a:cubicBezTo>
-                  <a:pt x="12473" y="0"/>
-                  <a:pt x="0" y="12473"/>
-                  <a:pt x="0" y="27860"/>
-                </a:cubicBezTo>
-                <a:cubicBezTo>
-                  <a:pt x="0" y="43247"/>
-                  <a:pt x="12473" y="55721"/>
-                  <a:pt x="27860" y="55721"/>
-                </a:cubicBezTo>
-                <a:cubicBezTo>
-                  <a:pt x="441868" y="55721"/>
-                  <a:pt x="454342" y="43247"/>
-                  <a:pt x="454342" y="27860"/>
-                </a:cubicBezTo>
-                <a:cubicBezTo>
-                  <a:pt x="454342" y="12473"/>
-                  <a:pt x="441868" y="0"/>
-                  <a:pt x="426481" y="0"/>
-                </a:cubicBezTo>
-                <a:close/>
-              </a:path>
-            </a:pathLst>
-          </a:custGeom>
-          <a:solidFill>
-            <a:srgbClr val="D4A72C"/>
-          </a:solidFill>
-          <a:ln w="12700">
-            <a:noFill/>
-          </a:ln>
-        </p:spPr>
-      </p:sp>
-      <p:sp>
-        <p:nvSpPr>
-          <p:cNvPr id="41" name="TextBox 40"/>
+          <p:cNvPr id="45" name="TextBox 44"/>
           <p:cNvSpPr txBox="1"/>
           <p:nvPr/>
         </p:nvSpPr>
@@ -9262,7 +9900,7 @@
       </p:sp>
       <p:sp>
         <p:nvSpPr>
-          <p:cNvPr id="42" name="TextBox 41"/>
+          <p:cNvPr id="46" name="TextBox 45"/>
           <p:cNvSpPr txBox="1"/>
           <p:nvPr/>
         </p:nvSpPr>
@@ -9299,7 +9937,7 @@
       </p:sp>
       <p:sp>
         <p:nvSpPr>
-          <p:cNvPr id="43" name="Rounded Rectangle 42"/>
+          <p:cNvPr id="47" name="Rounded Rectangle 46"/>
           <p:cNvSpPr/>
           <p:nvPr/>
         </p:nvSpPr>
@@ -9328,7 +9966,7 @@
       </p:sp>
       <p:sp>
         <p:nvSpPr>
-          <p:cNvPr id="44" name="Rounded Rectangle 43"/>
+          <p:cNvPr id="48" name="Rounded Rectangle 47"/>
           <p:cNvSpPr/>
           <p:nvPr/>
         </p:nvSpPr>
@@ -9357,7 +9995,7 @@
       </p:sp>
       <p:sp>
         <p:nvSpPr>
-          <p:cNvPr id="45" name="Freeform"/>
+          <p:cNvPr id="49" name="Rectangle 48"/>
           <p:cNvSpPr/>
           <p:nvPr/>
         </p:nvSpPr>
@@ -9366,53 +10004,89 @@
             <a:off x="8600236" y="4983480"/>
             <a:ext cx="457200" cy="457200"/>
           </a:xfrm>
+          <a:prstGeom prst="rect">
+            <a:avLst/>
+          </a:prstGeom>
+          <a:solidFill>
+            <a:srgbClr val="18233A"/>
+          </a:solidFill>
+          <a:ln>
+            <a:noFill/>
+          </a:ln>
+        </p:spPr>
+        <p:style>
+          <a:lnRef idx="1">
+            <a:schemeClr val="accent1"/>
+          </a:lnRef>
+          <a:fillRef idx="3">
+            <a:schemeClr val="accent1"/>
+          </a:fillRef>
+          <a:effectRef idx="2">
+            <a:schemeClr val="accent1"/>
+          </a:effectRef>
+          <a:fontRef idx="minor">
+            <a:schemeClr val="lt1"/>
+          </a:fontRef>
+        </p:style>
+        <p:txBody>
+          <a:bodyPr rtlCol="0" anchor="ctr"/>
+          <a:lstStyle/>
+          <a:p>
+            <a:pPr algn="ctr"/>
+          </a:p>
+        </p:txBody>
+      </p:sp>
+      <p:sp>
+        <p:nvSpPr>
+          <p:cNvPr id="50" name="Freeform"/>
+          <p:cNvSpPr/>
+          <p:nvPr/>
+        </p:nvSpPr>
+        <p:spPr>
+          <a:xfrm>
+            <a:off x="8710964" y="5051345"/>
+            <a:ext cx="242887" cy="321468"/>
+          </a:xfrm>
           <a:custGeom>
             <a:avLst/>
             <a:gdLst/>
             <a:pathLst>
-              <a:path w="457200" h="457200">
+              <a:path w="242887" h="321468">
                 <a:moveTo>
-                  <a:pt x="103584" y="0"/>
+                  <a:pt x="0" y="0"/>
                 </a:moveTo>
                 <a:cubicBezTo>
-                  <a:pt x="46376" y="0"/>
-                  <a:pt x="0" y="46376"/>
-                  <a:pt x="0" y="103584"/>
-                </a:cubicBezTo>
-                <a:cubicBezTo>
-                  <a:pt x="0" y="410823"/>
-                  <a:pt x="46376" y="457200"/>
-                  <a:pt x="103584" y="457200"/>
-                </a:cubicBezTo>
-                <a:cubicBezTo>
-                  <a:pt x="410823" y="457200"/>
-                  <a:pt x="457200" y="410823"/>
-                  <a:pt x="457200" y="353615"/>
-                </a:cubicBezTo>
-                <a:cubicBezTo>
-                  <a:pt x="457200" y="46376"/>
-                  <a:pt x="410823" y="0"/>
-                  <a:pt x="353615" y="0"/>
+                  <a:pt x="0" y="0"/>
+                  <a:pt x="167877" y="0"/>
+                  <a:pt x="167877" y="0"/>
+                </a:cubicBezTo>
+                <a:cubicBezTo>
+                  <a:pt x="167877" y="0"/>
+                  <a:pt x="242887" y="75009"/>
+                  <a:pt x="242887" y="75009"/>
+                </a:cubicBezTo>
+                <a:cubicBezTo>
+                  <a:pt x="242887" y="75009"/>
+                  <a:pt x="242887" y="321468"/>
+                  <a:pt x="242887" y="321468"/>
+                </a:cubicBezTo>
+                <a:cubicBezTo>
+                  <a:pt x="242887" y="321468"/>
+                  <a:pt x="0" y="321468"/>
+                  <a:pt x="0" y="321468"/>
+                </a:cubicBezTo>
+                <a:cubicBezTo>
+                  <a:pt x="0" y="321468"/>
+                  <a:pt x="0" y="0"/>
+                  <a:pt x="0" y="0"/>
                 </a:cubicBezTo>
                 <a:close/>
               </a:path>
             </a:pathLst>
           </a:custGeom>
-          <a:gradFill rotWithShape="1" flip="none">
-            <a:gsLst>
-              <a:gs pos="0">
-                <a:srgbClr val="3D8EC7">
-                  <a:alpha val="100000"/>
-                </a:srgbClr>
-              </a:gs>
-              <a:gs pos="100000">
-                <a:srgbClr val="0F3D63">
-                  <a:alpha val="100000"/>
-                </a:srgbClr>
-              </a:gs>
-            </a:gsLst>
-            <a:lin ang="2700000" scaled="1"/>
-          </a:gradFill>
+          <a:solidFill>
+            <a:srgbClr val="F5F7FA"/>
+          </a:solidFill>
           <a:ln w="12700">
             <a:noFill/>
           </a:ln>
@@ -9420,135 +10094,135 @@
       </p:sp>
       <p:sp>
         <p:nvSpPr>
-          <p:cNvPr id="46" name="Freeform"/>
-          <p:cNvSpPr/>
-          <p:nvPr/>
-        </p:nvSpPr>
-        <p:spPr>
-          <a:xfrm>
-            <a:off x="8739539" y="5101351"/>
-            <a:ext cx="178593" cy="200025"/>
+          <p:cNvPr id="51" name="Freeform"/>
+          <p:cNvSpPr/>
+          <p:nvPr/>
+        </p:nvSpPr>
+        <p:spPr>
+          <a:xfrm>
+            <a:off x="8878843" y="5051345"/>
+            <a:ext cx="75009" cy="75009"/>
           </a:xfrm>
           <a:custGeom>
             <a:avLst/>
             <a:gdLst/>
             <a:pathLst>
-              <a:path w="178593" h="200025">
+              <a:path w="75009" h="75009">
                 <a:moveTo>
-                  <a:pt x="0" y="32146"/>
+                  <a:pt x="0" y="0"/>
                 </a:moveTo>
                 <a:cubicBezTo>
-                  <a:pt x="0" y="32146"/>
-                  <a:pt x="89296" y="200025"/>
-                  <a:pt x="89296" y="200025"/>
-                </a:cubicBezTo>
-                <a:cubicBezTo>
-                  <a:pt x="89296" y="200025"/>
-                  <a:pt x="178593" y="0"/>
-                  <a:pt x="178593" y="0"/>
+                  <a:pt x="0" y="0"/>
+                  <a:pt x="75009" y="75009"/>
+                  <a:pt x="75009" y="75009"/>
+                </a:cubicBezTo>
+                <a:cubicBezTo>
+                  <a:pt x="75009" y="75009"/>
+                  <a:pt x="0" y="75009"/>
+                  <a:pt x="0" y="75009"/>
+                </a:cubicBezTo>
+                <a:cubicBezTo>
+                  <a:pt x="0" y="75009"/>
+                  <a:pt x="0" y="0"/>
+                  <a:pt x="0" y="0"/>
+                </a:cubicBezTo>
+                <a:close/>
+              </a:path>
+            </a:pathLst>
+          </a:custGeom>
+          <a:solidFill>
+            <a:srgbClr val="D4A72C"/>
+          </a:solidFill>
+          <a:ln w="12700">
+            <a:noFill/>
+          </a:ln>
+        </p:spPr>
+      </p:sp>
+      <p:sp>
+        <p:nvSpPr>
+          <p:cNvPr id="52" name="Freeform"/>
+          <p:cNvSpPr/>
+          <p:nvPr/>
+        </p:nvSpPr>
+        <p:spPr>
+          <a:xfrm>
+            <a:off x="8878843" y="5051345"/>
+            <a:ext cx="75009" cy="75009"/>
+          </a:xfrm>
+          <a:custGeom>
+            <a:avLst/>
+            <a:gdLst/>
+            <a:pathLst>
+              <a:path w="75009" h="75009">
+                <a:moveTo>
+                  <a:pt x="0" y="0"/>
+                </a:moveTo>
+                <a:cubicBezTo>
+                  <a:pt x="0" y="0"/>
+                  <a:pt x="0" y="75009"/>
+                  <a:pt x="0" y="75009"/>
+                </a:cubicBezTo>
+                <a:cubicBezTo>
+                  <a:pt x="0" y="75009"/>
+                  <a:pt x="75009" y="75009"/>
+                  <a:pt x="75009" y="75009"/>
                 </a:cubicBezTo>
                 <a:close/>
               </a:path>
             </a:pathLst>
           </a:custGeom>
           <a:noFill/>
-          <a:ln w="812800">
+          <a:ln w="203200" cap="square">
             <a:solidFill>
-              <a:srgbClr val="FFFFFF"/>
+              <a:srgbClr val="18233A"/>
             </a:solidFill>
-            <a:round/>
-          </a:ln>
-        </p:spPr>
-      </p:sp>
-      <p:sp>
-        <p:nvSpPr>
-          <p:cNvPr id="47" name="Freeform"/>
-          <p:cNvSpPr/>
-          <p:nvPr/>
-        </p:nvSpPr>
-        <p:spPr>
-          <a:xfrm>
-            <a:off x="8839552" y="5101351"/>
-            <a:ext cx="78581" cy="175914"/>
+          </a:ln>
+        </p:spPr>
+      </p:sp>
+      <p:sp>
+        <p:nvSpPr>
+          <p:cNvPr id="53" name="Freeform"/>
+          <p:cNvSpPr/>
+          <p:nvPr/>
+        </p:nvSpPr>
+        <p:spPr>
+          <a:xfrm>
+            <a:off x="8760971" y="5183505"/>
+            <a:ext cx="135731" cy="100012"/>
           </a:xfrm>
           <a:custGeom>
             <a:avLst/>
             <a:gdLst/>
             <a:pathLst>
-              <a:path w="78581" h="175914">
+              <a:path w="135731" h="100012">
                 <a:moveTo>
-                  <a:pt x="0" y="175914"/>
+                  <a:pt x="0" y="57149"/>
                 </a:moveTo>
                 <a:cubicBezTo>
-                  <a:pt x="0" y="175914"/>
-                  <a:pt x="78581" y="0"/>
-                  <a:pt x="78581" y="0"/>
-                </a:cubicBezTo>
+                  <a:pt x="0" y="57149"/>
+                  <a:pt x="42862" y="100012"/>
+                  <a:pt x="42862" y="100012"/>
+                </a:cubicBezTo>
+                <a:cubicBezTo>
+                  <a:pt x="42862" y="100012"/>
+                  <a:pt x="135731" y="0"/>
+                  <a:pt x="135731" y="0"/>
+                </a:cubicBezTo>
+                <a:close/>
               </a:path>
             </a:pathLst>
           </a:custGeom>
           <a:noFill/>
-          <a:ln w="812800">
+          <a:ln w="558800" cap="square">
             <a:solidFill>
-              <a:srgbClr val="D4A72C"/>
+              <a:srgbClr val="18233A"/>
             </a:solidFill>
           </a:ln>
         </p:spPr>
       </p:sp>
       <p:sp>
         <p:nvSpPr>
-          <p:cNvPr id="48" name="Freeform"/>
-          <p:cNvSpPr/>
-          <p:nvPr/>
-        </p:nvSpPr>
-        <p:spPr>
-          <a:xfrm>
-            <a:off x="8734182" y="5338881"/>
-            <a:ext cx="189309" cy="23217"/>
-          </a:xfrm>
-          <a:custGeom>
-            <a:avLst/>
-            <a:gdLst/>
-            <a:pathLst>
-              <a:path w="189309" h="23217">
-                <a:moveTo>
-                  <a:pt x="11608" y="0"/>
-                </a:moveTo>
-                <a:cubicBezTo>
-                  <a:pt x="5197" y="0"/>
-                  <a:pt x="0" y="5197"/>
-                  <a:pt x="0" y="11608"/>
-                </a:cubicBezTo>
-                <a:cubicBezTo>
-                  <a:pt x="0" y="18019"/>
-                  <a:pt x="5197" y="23217"/>
-                  <a:pt x="11608" y="23217"/>
-                </a:cubicBezTo>
-                <a:cubicBezTo>
-                  <a:pt x="184111" y="23217"/>
-                  <a:pt x="189309" y="18019"/>
-                  <a:pt x="189309" y="11608"/>
-                </a:cubicBezTo>
-                <a:cubicBezTo>
-                  <a:pt x="189309" y="5197"/>
-                  <a:pt x="184111" y="0"/>
-                  <a:pt x="177700" y="0"/>
-                </a:cubicBezTo>
-                <a:close/>
-              </a:path>
-            </a:pathLst>
-          </a:custGeom>
-          <a:solidFill>
-            <a:srgbClr val="D4A72C"/>
-          </a:solidFill>
-          <a:ln w="12700">
-            <a:noFill/>
-          </a:ln>
-        </p:spPr>
-      </p:sp>
-      <p:sp>
-        <p:nvSpPr>
-          <p:cNvPr id="49" name="TextBox 48"/>
+          <p:cNvPr id="54" name="TextBox 53"/>
           <p:cNvSpPr txBox="1"/>
           <p:nvPr/>
         </p:nvSpPr>
@@ -9585,7 +10259,7 @@
       </p:sp>
       <p:sp>
         <p:nvSpPr>
-          <p:cNvPr id="50" name="Freeform"/>
+          <p:cNvPr id="55" name="Rectangle 54"/>
           <p:cNvSpPr/>
           <p:nvPr/>
         </p:nvSpPr>
@@ -9594,53 +10268,89 @@
             <a:off x="9606076" y="5212080"/>
             <a:ext cx="228600" cy="228600"/>
           </a:xfrm>
+          <a:prstGeom prst="rect">
+            <a:avLst/>
+          </a:prstGeom>
+          <a:solidFill>
+            <a:srgbClr val="18233A"/>
+          </a:solidFill>
+          <a:ln>
+            <a:noFill/>
+          </a:ln>
+        </p:spPr>
+        <p:style>
+          <a:lnRef idx="1">
+            <a:schemeClr val="accent1"/>
+          </a:lnRef>
+          <a:fillRef idx="3">
+            <a:schemeClr val="accent1"/>
+          </a:fillRef>
+          <a:effectRef idx="2">
+            <a:schemeClr val="accent1"/>
+          </a:effectRef>
+          <a:fontRef idx="minor">
+            <a:schemeClr val="lt1"/>
+          </a:fontRef>
+        </p:style>
+        <p:txBody>
+          <a:bodyPr rtlCol="0" anchor="ctr"/>
+          <a:lstStyle/>
+          <a:p>
+            <a:pPr algn="ctr"/>
+          </a:p>
+        </p:txBody>
+      </p:sp>
+      <p:sp>
+        <p:nvSpPr>
+          <p:cNvPr id="56" name="Freeform"/>
+          <p:cNvSpPr/>
+          <p:nvPr/>
+        </p:nvSpPr>
+        <p:spPr>
+          <a:xfrm>
+            <a:off x="9661440" y="5246012"/>
+            <a:ext cx="121443" cy="160734"/>
+          </a:xfrm>
           <a:custGeom>
             <a:avLst/>
             <a:gdLst/>
             <a:pathLst>
-              <a:path w="228600" h="228600">
+              <a:path w="121443" h="160734">
                 <a:moveTo>
-                  <a:pt x="51792" y="0"/>
+                  <a:pt x="0" y="0"/>
                 </a:moveTo>
                 <a:cubicBezTo>
-                  <a:pt x="23188" y="0"/>
-                  <a:pt x="0" y="23188"/>
-                  <a:pt x="0" y="51792"/>
-                </a:cubicBezTo>
-                <a:cubicBezTo>
-                  <a:pt x="0" y="205411"/>
-                  <a:pt x="23188" y="228600"/>
-                  <a:pt x="51792" y="228600"/>
-                </a:cubicBezTo>
-                <a:cubicBezTo>
-                  <a:pt x="205411" y="228600"/>
-                  <a:pt x="228600" y="205411"/>
-                  <a:pt x="228600" y="176807"/>
-                </a:cubicBezTo>
-                <a:cubicBezTo>
-                  <a:pt x="228600" y="23188"/>
-                  <a:pt x="205411" y="0"/>
-                  <a:pt x="176807" y="0"/>
+                  <a:pt x="0" y="0"/>
+                  <a:pt x="83938" y="0"/>
+                  <a:pt x="83938" y="0"/>
+                </a:cubicBezTo>
+                <a:cubicBezTo>
+                  <a:pt x="83938" y="0"/>
+                  <a:pt x="121443" y="37504"/>
+                  <a:pt x="121443" y="37504"/>
+                </a:cubicBezTo>
+                <a:cubicBezTo>
+                  <a:pt x="121443" y="37504"/>
+                  <a:pt x="121443" y="160734"/>
+                  <a:pt x="121443" y="160734"/>
+                </a:cubicBezTo>
+                <a:cubicBezTo>
+                  <a:pt x="121443" y="160734"/>
+                  <a:pt x="0" y="160734"/>
+                  <a:pt x="0" y="160734"/>
+                </a:cubicBezTo>
+                <a:cubicBezTo>
+                  <a:pt x="0" y="160734"/>
+                  <a:pt x="0" y="0"/>
+                  <a:pt x="0" y="0"/>
                 </a:cubicBezTo>
                 <a:close/>
               </a:path>
             </a:pathLst>
           </a:custGeom>
-          <a:gradFill rotWithShape="1" flip="none">
-            <a:gsLst>
-              <a:gs pos="0">
-                <a:srgbClr val="3D8EC7">
-                  <a:alpha val="100000"/>
-                </a:srgbClr>
-              </a:gs>
-              <a:gs pos="100000">
-                <a:srgbClr val="0F3D63">
-                  <a:alpha val="100000"/>
-                </a:srgbClr>
-              </a:gs>
-            </a:gsLst>
-            <a:lin ang="2700000" scaled="1"/>
-          </a:gradFill>
+          <a:solidFill>
+            <a:srgbClr val="F5F7FA"/>
+          </a:solidFill>
           <a:ln w="12700">
             <a:noFill/>
           </a:ln>
@@ -9648,135 +10358,135 @@
       </p:sp>
       <p:sp>
         <p:nvSpPr>
-          <p:cNvPr id="51" name="Freeform"/>
-          <p:cNvSpPr/>
-          <p:nvPr/>
-        </p:nvSpPr>
-        <p:spPr>
-          <a:xfrm>
-            <a:off x="9675728" y="5271015"/>
-            <a:ext cx="89296" cy="100012"/>
+          <p:cNvPr id="57" name="Freeform"/>
+          <p:cNvSpPr/>
+          <p:nvPr/>
+        </p:nvSpPr>
+        <p:spPr>
+          <a:xfrm>
+            <a:off x="9745379" y="5246012"/>
+            <a:ext cx="37504" cy="37504"/>
           </a:xfrm>
           <a:custGeom>
             <a:avLst/>
             <a:gdLst/>
             <a:pathLst>
-              <a:path w="89296" h="100012">
+              <a:path w="37504" h="37504">
                 <a:moveTo>
-                  <a:pt x="0" y="16073"/>
+                  <a:pt x="0" y="0"/>
                 </a:moveTo>
                 <a:cubicBezTo>
-                  <a:pt x="0" y="16073"/>
-                  <a:pt x="44648" y="100012"/>
-                  <a:pt x="44648" y="100012"/>
-                </a:cubicBezTo>
-                <a:cubicBezTo>
-                  <a:pt x="44648" y="100012"/>
-                  <a:pt x="89296" y="0"/>
-                  <a:pt x="89296" y="0"/>
+                  <a:pt x="0" y="0"/>
+                  <a:pt x="37504" y="37504"/>
+                  <a:pt x="37504" y="37504"/>
+                </a:cubicBezTo>
+                <a:cubicBezTo>
+                  <a:pt x="37504" y="37504"/>
+                  <a:pt x="0" y="37504"/>
+                  <a:pt x="0" y="37504"/>
+                </a:cubicBezTo>
+                <a:cubicBezTo>
+                  <a:pt x="0" y="37504"/>
+                  <a:pt x="0" y="0"/>
+                  <a:pt x="0" y="0"/>
+                </a:cubicBezTo>
+                <a:close/>
+              </a:path>
+            </a:pathLst>
+          </a:custGeom>
+          <a:solidFill>
+            <a:srgbClr val="D4A72C"/>
+          </a:solidFill>
+          <a:ln w="12700">
+            <a:noFill/>
+          </a:ln>
+        </p:spPr>
+      </p:sp>
+      <p:sp>
+        <p:nvSpPr>
+          <p:cNvPr id="58" name="Freeform"/>
+          <p:cNvSpPr/>
+          <p:nvPr/>
+        </p:nvSpPr>
+        <p:spPr>
+          <a:xfrm>
+            <a:off x="9745379" y="5246012"/>
+            <a:ext cx="37504" cy="37504"/>
+          </a:xfrm>
+          <a:custGeom>
+            <a:avLst/>
+            <a:gdLst/>
+            <a:pathLst>
+              <a:path w="37504" h="37504">
+                <a:moveTo>
+                  <a:pt x="0" y="0"/>
+                </a:moveTo>
+                <a:cubicBezTo>
+                  <a:pt x="0" y="0"/>
+                  <a:pt x="0" y="37504"/>
+                  <a:pt x="0" y="37504"/>
+                </a:cubicBezTo>
+                <a:cubicBezTo>
+                  <a:pt x="0" y="37504"/>
+                  <a:pt x="37504" y="37504"/>
+                  <a:pt x="37504" y="37504"/>
                 </a:cubicBezTo>
                 <a:close/>
               </a:path>
             </a:pathLst>
           </a:custGeom>
           <a:noFill/>
-          <a:ln w="812800">
+          <a:ln w="203200" cap="square">
             <a:solidFill>
-              <a:srgbClr val="FFFFFF"/>
+              <a:srgbClr val="18233A"/>
             </a:solidFill>
-            <a:round/>
-          </a:ln>
-        </p:spPr>
-      </p:sp>
-      <p:sp>
-        <p:nvSpPr>
-          <p:cNvPr id="52" name="Freeform"/>
-          <p:cNvSpPr/>
-          <p:nvPr/>
-        </p:nvSpPr>
-        <p:spPr>
-          <a:xfrm>
-            <a:off x="9725734" y="5271015"/>
-            <a:ext cx="39290" cy="87957"/>
+          </a:ln>
+        </p:spPr>
+      </p:sp>
+      <p:sp>
+        <p:nvSpPr>
+          <p:cNvPr id="59" name="Freeform"/>
+          <p:cNvSpPr/>
+          <p:nvPr/>
+        </p:nvSpPr>
+        <p:spPr>
+          <a:xfrm>
+            <a:off x="9686443" y="5312092"/>
+            <a:ext cx="67865" cy="50006"/>
           </a:xfrm>
           <a:custGeom>
             <a:avLst/>
             <a:gdLst/>
             <a:pathLst>
-              <a:path w="39290" h="87957">
+              <a:path w="67865" h="50006">
                 <a:moveTo>
-                  <a:pt x="0" y="87957"/>
+                  <a:pt x="0" y="28574"/>
                 </a:moveTo>
                 <a:cubicBezTo>
-                  <a:pt x="0" y="87957"/>
-                  <a:pt x="39290" y="0"/>
-                  <a:pt x="39290" y="0"/>
-                </a:cubicBezTo>
+                  <a:pt x="0" y="28574"/>
+                  <a:pt x="21431" y="50006"/>
+                  <a:pt x="21431" y="50006"/>
+                </a:cubicBezTo>
+                <a:cubicBezTo>
+                  <a:pt x="21431" y="50006"/>
+                  <a:pt x="67865" y="0"/>
+                  <a:pt x="67865" y="0"/>
+                </a:cubicBezTo>
+                <a:close/>
               </a:path>
             </a:pathLst>
           </a:custGeom>
           <a:noFill/>
-          <a:ln w="812800">
+          <a:ln w="558800" cap="square">
             <a:solidFill>
-              <a:srgbClr val="D4A72C"/>
+              <a:srgbClr val="18233A"/>
             </a:solidFill>
           </a:ln>
         </p:spPr>
       </p:sp>
       <p:sp>
         <p:nvSpPr>
-          <p:cNvPr id="53" name="Freeform"/>
-          <p:cNvSpPr/>
-          <p:nvPr/>
-        </p:nvSpPr>
-        <p:spPr>
-          <a:xfrm>
-            <a:off x="9673049" y="5389780"/>
-            <a:ext cx="94654" cy="11608"/>
-          </a:xfrm>
-          <a:custGeom>
-            <a:avLst/>
-            <a:gdLst/>
-            <a:pathLst>
-              <a:path w="94654" h="11608">
-                <a:moveTo>
-                  <a:pt x="5804" y="0"/>
-                </a:moveTo>
-                <a:cubicBezTo>
-                  <a:pt x="2598" y="0"/>
-                  <a:pt x="0" y="2598"/>
-                  <a:pt x="0" y="5804"/>
-                </a:cubicBezTo>
-                <a:cubicBezTo>
-                  <a:pt x="0" y="9009"/>
-                  <a:pt x="2598" y="11608"/>
-                  <a:pt x="5804" y="11608"/>
-                </a:cubicBezTo>
-                <a:cubicBezTo>
-                  <a:pt x="92055" y="11608"/>
-                  <a:pt x="94654" y="9009"/>
-                  <a:pt x="94654" y="5804"/>
-                </a:cubicBezTo>
-                <a:cubicBezTo>
-                  <a:pt x="94654" y="2598"/>
-                  <a:pt x="92055" y="0"/>
-                  <a:pt x="88849" y="0"/>
-                </a:cubicBezTo>
-                <a:close/>
-              </a:path>
-            </a:pathLst>
-          </a:custGeom>
-          <a:solidFill>
-            <a:srgbClr val="D4A72C"/>
-          </a:solidFill>
-          <a:ln w="12700">
-            <a:noFill/>
-          </a:ln>
-        </p:spPr>
-      </p:sp>
-      <p:sp>
-        <p:nvSpPr>
-          <p:cNvPr id="54" name="TextBox 53"/>
+          <p:cNvPr id="60" name="TextBox 59"/>
           <p:cNvSpPr txBox="1"/>
           <p:nvPr/>
         </p:nvSpPr>
@@ -9813,7 +10523,7 @@
       </p:sp>
       <p:sp>
         <p:nvSpPr>
-          <p:cNvPr id="55" name="Freeform"/>
+          <p:cNvPr id="61" name="Rectangle 60"/>
           <p:cNvSpPr/>
           <p:nvPr/>
         </p:nvSpPr>
@@ -9822,53 +10532,89 @@
             <a:off x="10611916" y="5287975"/>
             <a:ext cx="152704" cy="152704"/>
           </a:xfrm>
+          <a:prstGeom prst="rect">
+            <a:avLst/>
+          </a:prstGeom>
+          <a:solidFill>
+            <a:srgbClr val="18233A"/>
+          </a:solidFill>
+          <a:ln>
+            <a:noFill/>
+          </a:ln>
+        </p:spPr>
+        <p:style>
+          <a:lnRef idx="1">
+            <a:schemeClr val="accent1"/>
+          </a:lnRef>
+          <a:fillRef idx="3">
+            <a:schemeClr val="accent1"/>
+          </a:fillRef>
+          <a:effectRef idx="2">
+            <a:schemeClr val="accent1"/>
+          </a:effectRef>
+          <a:fontRef idx="minor">
+            <a:schemeClr val="lt1"/>
+          </a:fontRef>
+        </p:style>
+        <p:txBody>
+          <a:bodyPr rtlCol="0" anchor="ctr"/>
+          <a:lstStyle/>
+          <a:p>
+            <a:pPr algn="ctr"/>
+          </a:p>
+        </p:txBody>
+      </p:sp>
+      <p:sp>
+        <p:nvSpPr>
+          <p:cNvPr id="62" name="Freeform"/>
+          <p:cNvSpPr/>
+          <p:nvPr/>
+        </p:nvSpPr>
+        <p:spPr>
+          <a:xfrm>
+            <a:off x="10633390" y="5302291"/>
+            <a:ext cx="109756" cy="124072"/>
+          </a:xfrm>
           <a:custGeom>
             <a:avLst/>
             <a:gdLst/>
             <a:pathLst>
-              <a:path w="152704" h="152704">
+              <a:path w="109756" h="124072">
                 <a:moveTo>
-                  <a:pt x="34597" y="0"/>
+                  <a:pt x="0" y="0"/>
                 </a:moveTo>
                 <a:cubicBezTo>
-                  <a:pt x="15489" y="0"/>
-                  <a:pt x="0" y="15489"/>
-                  <a:pt x="0" y="34596"/>
-                </a:cubicBezTo>
-                <a:cubicBezTo>
-                  <a:pt x="0" y="137214"/>
-                  <a:pt x="15489" y="152704"/>
-                  <a:pt x="34597" y="152704"/>
-                </a:cubicBezTo>
-                <a:cubicBezTo>
-                  <a:pt x="137214" y="152704"/>
-                  <a:pt x="152704" y="137214"/>
-                  <a:pt x="152704" y="118107"/>
-                </a:cubicBezTo>
-                <a:cubicBezTo>
-                  <a:pt x="152704" y="15489"/>
-                  <a:pt x="137214" y="0"/>
-                  <a:pt x="118106" y="0"/>
+                  <a:pt x="0" y="0"/>
+                  <a:pt x="76352" y="0"/>
+                  <a:pt x="76352" y="0"/>
+                </a:cubicBezTo>
+                <a:cubicBezTo>
+                  <a:pt x="76352" y="0"/>
+                  <a:pt x="109756" y="33403"/>
+                  <a:pt x="109756" y="33403"/>
+                </a:cubicBezTo>
+                <a:cubicBezTo>
+                  <a:pt x="109756" y="33403"/>
+                  <a:pt x="109756" y="124072"/>
+                  <a:pt x="109756" y="124072"/>
+                </a:cubicBezTo>
+                <a:cubicBezTo>
+                  <a:pt x="109756" y="124072"/>
+                  <a:pt x="0" y="124072"/>
+                  <a:pt x="0" y="124072"/>
+                </a:cubicBezTo>
+                <a:cubicBezTo>
+                  <a:pt x="0" y="124072"/>
+                  <a:pt x="0" y="0"/>
+                  <a:pt x="0" y="0"/>
                 </a:cubicBezTo>
                 <a:close/>
               </a:path>
             </a:pathLst>
           </a:custGeom>
-          <a:gradFill rotWithShape="1" flip="none">
-            <a:gsLst>
-              <a:gs pos="0">
-                <a:srgbClr val="3D8EC7">
-                  <a:alpha val="100000"/>
-                </a:srgbClr>
-              </a:gs>
-              <a:gs pos="100000">
-                <a:srgbClr val="0F3D63">
-                  <a:alpha val="100000"/>
-                </a:srgbClr>
-              </a:gs>
-            </a:gsLst>
-            <a:lin ang="2700000" scaled="1"/>
-          </a:gradFill>
+          <a:solidFill>
+            <a:srgbClr val="F5F7FA"/>
+          </a:solidFill>
           <a:ln w="12700">
             <a:noFill/>
           </a:ln>
@@ -9876,49 +10622,53 @@
       </p:sp>
       <p:sp>
         <p:nvSpPr>
-          <p:cNvPr id="56" name="Freeform"/>
-          <p:cNvSpPr/>
-          <p:nvPr/>
-        </p:nvSpPr>
-        <p:spPr>
-          <a:xfrm>
-            <a:off x="10658444" y="5327344"/>
-            <a:ext cx="59650" cy="66808"/>
+          <p:cNvPr id="63" name="Freeform"/>
+          <p:cNvSpPr/>
+          <p:nvPr/>
+        </p:nvSpPr>
+        <p:spPr>
+          <a:xfrm>
+            <a:off x="10709743" y="5302291"/>
+            <a:ext cx="33404" cy="33404"/>
           </a:xfrm>
           <a:custGeom>
             <a:avLst/>
             <a:gdLst/>
             <a:pathLst>
-              <a:path w="59650" h="66808">
+              <a:path w="33404" h="33404">
                 <a:moveTo>
-                  <a:pt x="0" y="10737"/>
+                  <a:pt x="0" y="0"/>
                 </a:moveTo>
                 <a:cubicBezTo>
-                  <a:pt x="0" y="10737"/>
-                  <a:pt x="29825" y="66808"/>
-                  <a:pt x="29825" y="66808"/>
-                </a:cubicBezTo>
-                <a:cubicBezTo>
-                  <a:pt x="29825" y="66808"/>
-                  <a:pt x="59650" y="0"/>
-                  <a:pt x="59650" y="0"/>
+                  <a:pt x="0" y="0"/>
+                  <a:pt x="33404" y="33404"/>
+                  <a:pt x="33404" y="33404"/>
+                </a:cubicBezTo>
+                <a:cubicBezTo>
+                  <a:pt x="33404" y="33404"/>
+                  <a:pt x="0" y="33404"/>
+                  <a:pt x="0" y="33404"/>
+                </a:cubicBezTo>
+                <a:cubicBezTo>
+                  <a:pt x="0" y="33404"/>
+                  <a:pt x="0" y="0"/>
+                  <a:pt x="0" y="0"/>
                 </a:cubicBezTo>
                 <a:close/>
               </a:path>
             </a:pathLst>
           </a:custGeom>
-          <a:noFill/>
-          <a:ln w="1092200">
-            <a:solidFill>
-              <a:srgbClr val="FFFFFF"/>
-            </a:solidFill>
-            <a:round/>
-          </a:ln>
-        </p:spPr>
-      </p:sp>
-      <p:sp>
-        <p:nvSpPr>
-          <p:cNvPr id="57" name="TextBox 56"/>
+          <a:solidFill>
+            <a:srgbClr val="D4A72C"/>
+          </a:solidFill>
+          <a:ln w="12700">
+            <a:noFill/>
+          </a:ln>
+        </p:spPr>
+      </p:sp>
+      <p:sp>
+        <p:nvSpPr>
+          <p:cNvPr id="64" name="TextBox 63"/>
           <p:cNvSpPr txBox="1"/>
           <p:nvPr/>
         </p:nvSpPr>
@@ -9955,7 +10705,7 @@
       </p:sp>
       <p:sp>
         <p:nvSpPr>
-          <p:cNvPr id="58" name="TextBox 57"/>
+          <p:cNvPr id="65" name="TextBox 64"/>
           <p:cNvSpPr txBox="1"/>
           <p:nvPr/>
         </p:nvSpPr>
@@ -9992,7 +10742,7 @@
       </p:sp>
       <p:sp>
         <p:nvSpPr>
-          <p:cNvPr id="59" name="TextBox 58"/>
+          <p:cNvPr id="66" name="TextBox 65"/>
           <p:cNvSpPr txBox="1"/>
           <p:nvPr/>
         </p:nvSpPr>
@@ -10237,7 +10987,7 @@
       </p:sp>
       <p:sp>
         <p:nvSpPr>
-          <p:cNvPr id="8" name="Freeform"/>
+          <p:cNvPr id="8" name="Rectangle 7"/>
           <p:cNvSpPr/>
           <p:nvPr/>
         </p:nvSpPr>
@@ -10246,53 +10996,89 @@
             <a:off x="1681429" y="1773935"/>
             <a:ext cx="1371600" cy="932688"/>
           </a:xfrm>
+          <a:prstGeom prst="rect">
+            <a:avLst/>
+          </a:prstGeom>
+          <a:solidFill>
+            <a:srgbClr val="18233A"/>
+          </a:solidFill>
+          <a:ln>
+            <a:noFill/>
+          </a:ln>
+        </p:spPr>
+        <p:style>
+          <a:lnRef idx="1">
+            <a:schemeClr val="accent1"/>
+          </a:lnRef>
+          <a:fillRef idx="3">
+            <a:schemeClr val="accent1"/>
+          </a:fillRef>
+          <a:effectRef idx="2">
+            <a:schemeClr val="accent1"/>
+          </a:effectRef>
+          <a:fontRef idx="minor">
+            <a:schemeClr val="lt1"/>
+          </a:fontRef>
+        </p:style>
+        <p:txBody>
+          <a:bodyPr rtlCol="0" anchor="ctr"/>
+          <a:lstStyle/>
+          <a:p>
+            <a:pPr algn="ctr"/>
+          </a:p>
+        </p:txBody>
+      </p:sp>
+      <p:sp>
+        <p:nvSpPr>
+          <p:cNvPr id="9" name="Freeform"/>
+          <p:cNvSpPr/>
+          <p:nvPr/>
+        </p:nvSpPr>
+        <p:spPr>
+          <a:xfrm>
+            <a:off x="2013613" y="1912381"/>
+            <a:ext cx="728662" cy="655796"/>
+          </a:xfrm>
           <a:custGeom>
             <a:avLst/>
             <a:gdLst/>
             <a:pathLst>
-              <a:path w="1371600" h="932688">
+              <a:path w="728662" h="655796">
                 <a:moveTo>
-                  <a:pt x="310753" y="0"/>
+                  <a:pt x="0" y="0"/>
                 </a:moveTo>
                 <a:cubicBezTo>
-                  <a:pt x="139128" y="0"/>
-                  <a:pt x="0" y="94607"/>
-                  <a:pt x="0" y="211312"/>
-                </a:cubicBezTo>
-                <a:cubicBezTo>
-                  <a:pt x="0" y="838080"/>
-                  <a:pt x="139128" y="932688"/>
-                  <a:pt x="310753" y="932688"/>
-                </a:cubicBezTo>
-                <a:cubicBezTo>
-                  <a:pt x="1232471" y="932688"/>
-                  <a:pt x="1371600" y="838080"/>
-                  <a:pt x="1371600" y="721375"/>
-                </a:cubicBezTo>
-                <a:cubicBezTo>
-                  <a:pt x="1371600" y="94607"/>
-                  <a:pt x="1232471" y="0"/>
-                  <a:pt x="1060846" y="0"/>
+                  <a:pt x="0" y="0"/>
+                  <a:pt x="503634" y="0"/>
+                  <a:pt x="503634" y="0"/>
+                </a:cubicBezTo>
+                <a:cubicBezTo>
+                  <a:pt x="503634" y="0"/>
+                  <a:pt x="728662" y="153019"/>
+                  <a:pt x="728662" y="153019"/>
+                </a:cubicBezTo>
+                <a:cubicBezTo>
+                  <a:pt x="728662" y="153019"/>
+                  <a:pt x="728662" y="655796"/>
+                  <a:pt x="728662" y="655796"/>
+                </a:cubicBezTo>
+                <a:cubicBezTo>
+                  <a:pt x="728662" y="655796"/>
+                  <a:pt x="0" y="655796"/>
+                  <a:pt x="0" y="655796"/>
+                </a:cubicBezTo>
+                <a:cubicBezTo>
+                  <a:pt x="0" y="655796"/>
+                  <a:pt x="0" y="0"/>
+                  <a:pt x="0" y="0"/>
                 </a:cubicBezTo>
                 <a:close/>
               </a:path>
             </a:pathLst>
           </a:custGeom>
-          <a:gradFill rotWithShape="1" flip="none">
-            <a:gsLst>
-              <a:gs pos="0">
-                <a:srgbClr val="3D8EC7">
-                  <a:alpha val="100000"/>
-                </a:srgbClr>
-              </a:gs>
-              <a:gs pos="100000">
-                <a:srgbClr val="0F3D63">
-                  <a:alpha val="100000"/>
-                </a:srgbClr>
-              </a:gs>
-            </a:gsLst>
-            <a:lin ang="2700000" scaled="1"/>
-          </a:gradFill>
+          <a:solidFill>
+            <a:srgbClr val="F5F7FA"/>
+          </a:solidFill>
           <a:ln w="12700">
             <a:noFill/>
           </a:ln>
@@ -10300,135 +11086,135 @@
       </p:sp>
       <p:sp>
         <p:nvSpPr>
-          <p:cNvPr id="9" name="Freeform"/>
-          <p:cNvSpPr/>
-          <p:nvPr/>
-        </p:nvSpPr>
-        <p:spPr>
-          <a:xfrm>
-            <a:off x="2099338" y="2014394"/>
-            <a:ext cx="535781" cy="408051"/>
+          <p:cNvPr id="10" name="Freeform"/>
+          <p:cNvSpPr/>
+          <p:nvPr/>
+        </p:nvSpPr>
+        <p:spPr>
+          <a:xfrm>
+            <a:off x="2517247" y="1912381"/>
+            <a:ext cx="225028" cy="153019"/>
           </a:xfrm>
           <a:custGeom>
             <a:avLst/>
             <a:gdLst/>
             <a:pathLst>
-              <a:path w="535781" h="408051">
+              <a:path w="225028" h="153019">
                 <a:moveTo>
-                  <a:pt x="0" y="65579"/>
+                  <a:pt x="0" y="0"/>
                 </a:moveTo>
                 <a:cubicBezTo>
-                  <a:pt x="0" y="65579"/>
-                  <a:pt x="267890" y="408051"/>
-                  <a:pt x="267890" y="408051"/>
-                </a:cubicBezTo>
-                <a:cubicBezTo>
-                  <a:pt x="267890" y="408051"/>
-                  <a:pt x="535781" y="0"/>
-                  <a:pt x="535781" y="0"/>
+                  <a:pt x="0" y="0"/>
+                  <a:pt x="225028" y="153019"/>
+                  <a:pt x="225028" y="153019"/>
+                </a:cubicBezTo>
+                <a:cubicBezTo>
+                  <a:pt x="225028" y="153019"/>
+                  <a:pt x="0" y="153019"/>
+                  <a:pt x="0" y="153019"/>
+                </a:cubicBezTo>
+                <a:cubicBezTo>
+                  <a:pt x="0" y="153019"/>
+                  <a:pt x="0" y="0"/>
+                  <a:pt x="0" y="0"/>
+                </a:cubicBezTo>
+                <a:close/>
+              </a:path>
+            </a:pathLst>
+          </a:custGeom>
+          <a:solidFill>
+            <a:srgbClr val="D4A72C"/>
+          </a:solidFill>
+          <a:ln w="12700">
+            <a:noFill/>
+          </a:ln>
+        </p:spPr>
+      </p:sp>
+      <p:sp>
+        <p:nvSpPr>
+          <p:cNvPr id="11" name="Freeform"/>
+          <p:cNvSpPr/>
+          <p:nvPr/>
+        </p:nvSpPr>
+        <p:spPr>
+          <a:xfrm>
+            <a:off x="2517247" y="1912381"/>
+            <a:ext cx="225028" cy="153019"/>
+          </a:xfrm>
+          <a:custGeom>
+            <a:avLst/>
+            <a:gdLst/>
+            <a:pathLst>
+              <a:path w="225028" h="153019">
+                <a:moveTo>
+                  <a:pt x="0" y="0"/>
+                </a:moveTo>
+                <a:cubicBezTo>
+                  <a:pt x="0" y="0"/>
+                  <a:pt x="0" y="153019"/>
+                  <a:pt x="0" y="153019"/>
+                </a:cubicBezTo>
+                <a:cubicBezTo>
+                  <a:pt x="0" y="153019"/>
+                  <a:pt x="225028" y="153019"/>
+                  <a:pt x="225028" y="153019"/>
                 </a:cubicBezTo>
                 <a:close/>
               </a:path>
             </a:pathLst>
           </a:custGeom>
           <a:noFill/>
-          <a:ln w="812800">
+          <a:ln w="203200" cap="square">
             <a:solidFill>
-              <a:srgbClr val="FFFFFF"/>
+              <a:srgbClr val="18233A"/>
             </a:solidFill>
-            <a:round/>
-          </a:ln>
-        </p:spPr>
-      </p:sp>
-      <p:sp>
-        <p:nvSpPr>
-          <p:cNvPr id="10" name="Freeform"/>
-          <p:cNvSpPr/>
-          <p:nvPr/>
-        </p:nvSpPr>
-        <p:spPr>
-          <a:xfrm>
-            <a:off x="2399376" y="2014394"/>
-            <a:ext cx="235743" cy="358866"/>
+          </a:ln>
+        </p:spPr>
+      </p:sp>
+      <p:sp>
+        <p:nvSpPr>
+          <p:cNvPr id="12" name="Freeform"/>
+          <p:cNvSpPr/>
+          <p:nvPr/>
+        </p:nvSpPr>
+        <p:spPr>
+          <a:xfrm>
+            <a:off x="2163632" y="2181987"/>
+            <a:ext cx="407193" cy="204025"/>
           </a:xfrm>
           <a:custGeom>
             <a:avLst/>
             <a:gdLst/>
             <a:pathLst>
-              <a:path w="235743" h="358866">
+              <a:path w="407193" h="204025">
                 <a:moveTo>
-                  <a:pt x="0" y="358866"/>
+                  <a:pt x="0" y="116585"/>
                 </a:moveTo>
                 <a:cubicBezTo>
-                  <a:pt x="0" y="358866"/>
-                  <a:pt x="235743" y="0"/>
-                  <a:pt x="235743" y="0"/>
-                </a:cubicBezTo>
+                  <a:pt x="0" y="116585"/>
+                  <a:pt x="128587" y="204025"/>
+                  <a:pt x="128587" y="204025"/>
+                </a:cubicBezTo>
+                <a:cubicBezTo>
+                  <a:pt x="128587" y="204025"/>
+                  <a:pt x="407193" y="0"/>
+                  <a:pt x="407193" y="0"/>
+                </a:cubicBezTo>
+                <a:close/>
               </a:path>
             </a:pathLst>
           </a:custGeom>
           <a:noFill/>
-          <a:ln w="812800">
+          <a:ln w="558800" cap="square">
             <a:solidFill>
-              <a:srgbClr val="D4A72C"/>
+              <a:srgbClr val="18233A"/>
             </a:solidFill>
           </a:ln>
         </p:spPr>
       </p:sp>
       <p:sp>
         <p:nvSpPr>
-          <p:cNvPr id="11" name="Freeform"/>
-          <p:cNvSpPr/>
-          <p:nvPr/>
-        </p:nvSpPr>
-        <p:spPr>
-          <a:xfrm>
-            <a:off x="2083265" y="2498955"/>
-            <a:ext cx="567928" cy="47363"/>
-          </a:xfrm>
-          <a:custGeom>
-            <a:avLst/>
-            <a:gdLst/>
-            <a:pathLst>
-              <a:path w="567928" h="47363">
-                <a:moveTo>
-                  <a:pt x="34825" y="0"/>
-                </a:moveTo>
-                <a:cubicBezTo>
-                  <a:pt x="15592" y="0"/>
-                  <a:pt x="0" y="10602"/>
-                  <a:pt x="0" y="23681"/>
-                </a:cubicBezTo>
-                <a:cubicBezTo>
-                  <a:pt x="0" y="36760"/>
-                  <a:pt x="15592" y="47363"/>
-                  <a:pt x="34825" y="47363"/>
-                </a:cubicBezTo>
-                <a:cubicBezTo>
-                  <a:pt x="552335" y="47363"/>
-                  <a:pt x="567928" y="36760"/>
-                  <a:pt x="567928" y="23681"/>
-                </a:cubicBezTo>
-                <a:cubicBezTo>
-                  <a:pt x="567928" y="10602"/>
-                  <a:pt x="552335" y="0"/>
-                  <a:pt x="533102" y="0"/>
-                </a:cubicBezTo>
-                <a:close/>
-              </a:path>
-            </a:pathLst>
-          </a:custGeom>
-          <a:solidFill>
-            <a:srgbClr val="D4A72C"/>
-          </a:solidFill>
-          <a:ln w="12700">
-            <a:noFill/>
-          </a:ln>
-        </p:spPr>
-      </p:sp>
-      <p:sp>
-        <p:nvSpPr>
-          <p:cNvPr id="12" name="Rounded Rectangle 11"/>
+          <p:cNvPr id="13" name="Rounded Rectangle 12"/>
           <p:cNvSpPr/>
           <p:nvPr/>
         </p:nvSpPr>
@@ -10457,7 +11243,7 @@
       </p:sp>
       <p:sp>
         <p:nvSpPr>
-          <p:cNvPr id="13" name="TextBox 12"/>
+          <p:cNvPr id="14" name="TextBox 13"/>
           <p:cNvSpPr txBox="1"/>
           <p:nvPr/>
         </p:nvSpPr>
@@ -10494,7 +11280,7 @@
       </p:sp>
       <p:sp>
         <p:nvSpPr>
-          <p:cNvPr id="14" name="TextBox 13"/>
+          <p:cNvPr id="15" name="TextBox 14"/>
           <p:cNvSpPr txBox="1"/>
           <p:nvPr/>
         </p:nvSpPr>
@@ -10531,7 +11317,7 @@
       </p:sp>
       <p:sp>
         <p:nvSpPr>
-          <p:cNvPr id="15" name="Rounded Rectangle 14"/>
+          <p:cNvPr id="16" name="Rounded Rectangle 15"/>
           <p:cNvSpPr/>
           <p:nvPr/>
         </p:nvSpPr>
@@ -10560,7 +11346,7 @@
       </p:sp>
       <p:sp>
         <p:nvSpPr>
-          <p:cNvPr id="16" name="Rounded Rectangle 15"/>
+          <p:cNvPr id="17" name="Rounded Rectangle 16"/>
           <p:cNvSpPr/>
           <p:nvPr/>
         </p:nvSpPr>
@@ -10589,7 +11375,7 @@
       </p:sp>
       <p:sp>
         <p:nvSpPr>
-          <p:cNvPr id="17" name="Freeform"/>
+          <p:cNvPr id="18" name="Rectangle 17"/>
           <p:cNvSpPr/>
           <p:nvPr/>
         </p:nvSpPr>
@@ -10598,40 +11384,88 @@
             <a:off x="5410047" y="1993391"/>
             <a:ext cx="1371600" cy="1371600"/>
           </a:xfrm>
+          <a:prstGeom prst="rect">
+            <a:avLst/>
+          </a:prstGeom>
+          <a:solidFill>
+            <a:srgbClr val="7B2FBE"/>
+          </a:solidFill>
+          <a:ln>
+            <a:noFill/>
+          </a:ln>
+        </p:spPr>
+        <p:style>
+          <a:lnRef idx="1">
+            <a:schemeClr val="accent1"/>
+          </a:lnRef>
+          <a:fillRef idx="3">
+            <a:schemeClr val="accent1"/>
+          </a:fillRef>
+          <a:effectRef idx="2">
+            <a:schemeClr val="accent1"/>
+          </a:effectRef>
+          <a:fontRef idx="minor">
+            <a:schemeClr val="lt1"/>
+          </a:fontRef>
+        </p:style>
+        <p:txBody>
+          <a:bodyPr rtlCol="0" anchor="ctr"/>
+          <a:lstStyle/>
+          <a:p>
+            <a:pPr algn="ctr"/>
+          </a:p>
+        </p:txBody>
+      </p:sp>
+      <p:sp>
+        <p:nvSpPr>
+          <p:cNvPr id="19" name="Freeform"/>
+          <p:cNvSpPr/>
+          <p:nvPr/>
+        </p:nvSpPr>
+        <p:spPr>
+          <a:xfrm>
+            <a:off x="5742231" y="2196988"/>
+            <a:ext cx="728662" cy="964406"/>
+          </a:xfrm>
           <a:custGeom>
             <a:avLst/>
             <a:gdLst/>
             <a:pathLst>
-              <a:path w="1371600" h="1371600">
+              <a:path w="728662" h="964406">
                 <a:moveTo>
-                  <a:pt x="310753" y="0"/>
+                  <a:pt x="0" y="0"/>
                 </a:moveTo>
                 <a:cubicBezTo>
-                  <a:pt x="139128" y="0"/>
-                  <a:pt x="0" y="139128"/>
-                  <a:pt x="0" y="310753"/>
-                </a:cubicBezTo>
-                <a:cubicBezTo>
-                  <a:pt x="0" y="1232471"/>
-                  <a:pt x="139128" y="1371600"/>
-                  <a:pt x="310753" y="1371600"/>
-                </a:cubicBezTo>
-                <a:cubicBezTo>
-                  <a:pt x="1232471" y="1371600"/>
-                  <a:pt x="1371600" y="1232471"/>
-                  <a:pt x="1371600" y="1060846"/>
-                </a:cubicBezTo>
-                <a:cubicBezTo>
-                  <a:pt x="1371600" y="139128"/>
-                  <a:pt x="1232471" y="0"/>
-                  <a:pt x="1060846" y="0"/>
+                  <a:pt x="0" y="0"/>
+                  <a:pt x="503634" y="0"/>
+                  <a:pt x="503634" y="0"/>
+                </a:cubicBezTo>
+                <a:cubicBezTo>
+                  <a:pt x="503634" y="0"/>
+                  <a:pt x="728662" y="225028"/>
+                  <a:pt x="728662" y="225028"/>
+                </a:cubicBezTo>
+                <a:cubicBezTo>
+                  <a:pt x="728662" y="225028"/>
+                  <a:pt x="728662" y="964406"/>
+                  <a:pt x="728662" y="964406"/>
+                </a:cubicBezTo>
+                <a:cubicBezTo>
+                  <a:pt x="728662" y="964406"/>
+                  <a:pt x="0" y="964406"/>
+                  <a:pt x="0" y="964406"/>
+                </a:cubicBezTo>
+                <a:cubicBezTo>
+                  <a:pt x="0" y="964406"/>
+                  <a:pt x="0" y="0"/>
+                  <a:pt x="0" y="0"/>
                 </a:cubicBezTo>
                 <a:close/>
               </a:path>
             </a:pathLst>
           </a:custGeom>
           <a:solidFill>
-            <a:srgbClr val="7B2FBE"/>
+            <a:srgbClr val="22C55E"/>
           </a:solidFill>
           <a:ln w="12700">
             <a:noFill/>
@@ -10640,75 +11474,126 @@
       </p:sp>
       <p:sp>
         <p:nvSpPr>
-          <p:cNvPr id="18" name="Freeform"/>
-          <p:cNvSpPr/>
-          <p:nvPr/>
-        </p:nvSpPr>
-        <p:spPr>
-          <a:xfrm>
-            <a:off x="5827956" y="2347007"/>
-            <a:ext cx="535781" cy="600075"/>
+          <p:cNvPr id="20" name="Freeform"/>
+          <p:cNvSpPr/>
+          <p:nvPr/>
+        </p:nvSpPr>
+        <p:spPr>
+          <a:xfrm>
+            <a:off x="6245866" y="2196988"/>
+            <a:ext cx="225028" cy="225028"/>
           </a:xfrm>
           <a:custGeom>
             <a:avLst/>
             <a:gdLst/>
             <a:pathLst>
-              <a:path w="535781" h="600075">
+              <a:path w="225028" h="225028">
                 <a:moveTo>
-                  <a:pt x="0" y="96440"/>
+                  <a:pt x="0" y="0"/>
                 </a:moveTo>
                 <a:cubicBezTo>
-                  <a:pt x="0" y="96440"/>
-                  <a:pt x="267890" y="600075"/>
-                  <a:pt x="267890" y="600075"/>
-                </a:cubicBezTo>
-                <a:cubicBezTo>
-                  <a:pt x="267890" y="600075"/>
-                  <a:pt x="535781" y="0"/>
-                  <a:pt x="535781" y="0"/>
+                  <a:pt x="0" y="0"/>
+                  <a:pt x="225028" y="225028"/>
+                  <a:pt x="225028" y="225028"/>
+                </a:cubicBezTo>
+                <a:cubicBezTo>
+                  <a:pt x="225028" y="225028"/>
+                  <a:pt x="0" y="225028"/>
+                  <a:pt x="0" y="225028"/>
+                </a:cubicBezTo>
+                <a:cubicBezTo>
+                  <a:pt x="0" y="225028"/>
+                  <a:pt x="0" y="0"/>
+                  <a:pt x="0" y="0"/>
+                </a:cubicBezTo>
+                <a:close/>
+              </a:path>
+            </a:pathLst>
+          </a:custGeom>
+          <a:solidFill>
+            <a:srgbClr val="F97316"/>
+          </a:solidFill>
+          <a:ln w="12700">
+            <a:noFill/>
+          </a:ln>
+        </p:spPr>
+      </p:sp>
+      <p:sp>
+        <p:nvSpPr>
+          <p:cNvPr id="21" name="Freeform"/>
+          <p:cNvSpPr/>
+          <p:nvPr/>
+        </p:nvSpPr>
+        <p:spPr>
+          <a:xfrm>
+            <a:off x="6245866" y="2196988"/>
+            <a:ext cx="225028" cy="225028"/>
+          </a:xfrm>
+          <a:custGeom>
+            <a:avLst/>
+            <a:gdLst/>
+            <a:pathLst>
+              <a:path w="225028" h="225028">
+                <a:moveTo>
+                  <a:pt x="0" y="0"/>
+                </a:moveTo>
+                <a:cubicBezTo>
+                  <a:pt x="0" y="0"/>
+                  <a:pt x="0" y="225028"/>
+                  <a:pt x="0" y="225028"/>
+                </a:cubicBezTo>
+                <a:cubicBezTo>
+                  <a:pt x="0" y="225028"/>
+                  <a:pt x="225028" y="225028"/>
+                  <a:pt x="225028" y="225028"/>
                 </a:cubicBezTo>
                 <a:close/>
               </a:path>
             </a:pathLst>
           </a:custGeom>
           <a:noFill/>
-          <a:ln w="812800">
+          <a:ln w="203200" cap="square">
             <a:solidFill>
-              <a:srgbClr val="22C55E"/>
+              <a:srgbClr val="F97316"/>
             </a:solidFill>
-            <a:round/>
-          </a:ln>
-        </p:spPr>
-      </p:sp>
-      <p:sp>
-        <p:nvSpPr>
-          <p:cNvPr id="19" name="Freeform"/>
-          <p:cNvSpPr/>
-          <p:nvPr/>
-        </p:nvSpPr>
-        <p:spPr>
-          <a:xfrm>
-            <a:off x="6127994" y="2347007"/>
-            <a:ext cx="235743" cy="527744"/>
+          </a:ln>
+        </p:spPr>
+      </p:sp>
+      <p:sp>
+        <p:nvSpPr>
+          <p:cNvPr id="22" name="Freeform"/>
+          <p:cNvSpPr/>
+          <p:nvPr/>
+        </p:nvSpPr>
+        <p:spPr>
+          <a:xfrm>
+            <a:off x="5892250" y="2593466"/>
+            <a:ext cx="407193" cy="300037"/>
           </a:xfrm>
           <a:custGeom>
             <a:avLst/>
             <a:gdLst/>
             <a:pathLst>
-              <a:path w="235743" h="527744">
+              <a:path w="407193" h="300037">
                 <a:moveTo>
-                  <a:pt x="0" y="527744"/>
+                  <a:pt x="0" y="171449"/>
                 </a:moveTo>
                 <a:cubicBezTo>
-                  <a:pt x="0" y="527744"/>
-                  <a:pt x="235743" y="0"/>
-                  <a:pt x="235743" y="0"/>
-                </a:cubicBezTo>
+                  <a:pt x="0" y="171449"/>
+                  <a:pt x="128587" y="300037"/>
+                  <a:pt x="128587" y="300037"/>
+                </a:cubicBezTo>
+                <a:cubicBezTo>
+                  <a:pt x="128587" y="300037"/>
+                  <a:pt x="407193" y="0"/>
+                  <a:pt x="407193" y="0"/>
+                </a:cubicBezTo>
+                <a:close/>
               </a:path>
             </a:pathLst>
           </a:custGeom>
           <a:noFill/>
-          <a:ln w="812800">
+          <a:ln w="558800" cap="square">
             <a:solidFill>
               <a:srgbClr val="F97316"/>
             </a:solidFill>
@@ -10717,58 +11602,7 @@
       </p:sp>
       <p:sp>
         <p:nvSpPr>
-          <p:cNvPr id="20" name="Freeform"/>
-          <p:cNvSpPr/>
-          <p:nvPr/>
-        </p:nvSpPr>
-        <p:spPr>
-          <a:xfrm>
-            <a:off x="5811883" y="3059596"/>
-            <a:ext cx="567928" cy="69651"/>
-          </a:xfrm>
-          <a:custGeom>
-            <a:avLst/>
-            <a:gdLst/>
-            <a:pathLst>
-              <a:path w="567928" h="69651">
-                <a:moveTo>
-                  <a:pt x="34825" y="0"/>
-                </a:moveTo>
-                <a:cubicBezTo>
-                  <a:pt x="15592" y="0"/>
-                  <a:pt x="0" y="15591"/>
-                  <a:pt x="0" y="34825"/>
-                </a:cubicBezTo>
-                <a:cubicBezTo>
-                  <a:pt x="0" y="54059"/>
-                  <a:pt x="15592" y="69651"/>
-                  <a:pt x="34825" y="69651"/>
-                </a:cubicBezTo>
-                <a:cubicBezTo>
-                  <a:pt x="552335" y="69651"/>
-                  <a:pt x="567928" y="54059"/>
-                  <a:pt x="567928" y="34825"/>
-                </a:cubicBezTo>
-                <a:cubicBezTo>
-                  <a:pt x="567928" y="15591"/>
-                  <a:pt x="552335" y="0"/>
-                  <a:pt x="533102" y="0"/>
-                </a:cubicBezTo>
-                <a:close/>
-              </a:path>
-            </a:pathLst>
-          </a:custGeom>
-          <a:solidFill>
-            <a:srgbClr val="F97316"/>
-          </a:solidFill>
-          <a:ln w="12700">
-            <a:noFill/>
-          </a:ln>
-        </p:spPr>
-      </p:sp>
-      <p:sp>
-        <p:nvSpPr>
-          <p:cNvPr id="21" name="Rounded Rectangle 20"/>
+          <p:cNvPr id="23" name="Rounded Rectangle 22"/>
           <p:cNvSpPr/>
           <p:nvPr/>
         </p:nvSpPr>
@@ -10797,7 +11631,7 @@
       </p:sp>
       <p:sp>
         <p:nvSpPr>
-          <p:cNvPr id="22" name="TextBox 21"/>
+          <p:cNvPr id="24" name="TextBox 23"/>
           <p:cNvSpPr txBox="1"/>
           <p:nvPr/>
         </p:nvSpPr>
@@ -10834,7 +11668,7 @@
       </p:sp>
       <p:sp>
         <p:nvSpPr>
-          <p:cNvPr id="23" name="TextBox 22"/>
+          <p:cNvPr id="25" name="TextBox 24"/>
           <p:cNvSpPr txBox="1"/>
           <p:nvPr/>
         </p:nvSpPr>
@@ -10871,7 +11705,7 @@
       </p:sp>
       <p:sp>
         <p:nvSpPr>
-          <p:cNvPr id="24" name="Rounded Rectangle 23"/>
+          <p:cNvPr id="26" name="Rounded Rectangle 25"/>
           <p:cNvSpPr/>
           <p:nvPr/>
         </p:nvSpPr>
@@ -10900,7 +11734,7 @@
       </p:sp>
       <p:sp>
         <p:nvSpPr>
-          <p:cNvPr id="25" name="Rounded Rectangle 24"/>
+          <p:cNvPr id="27" name="Rounded Rectangle 26"/>
           <p:cNvSpPr/>
           <p:nvPr/>
         </p:nvSpPr>
@@ -10929,62 +11763,98 @@
       </p:sp>
       <p:sp>
         <p:nvSpPr>
-          <p:cNvPr id="26" name="Freeform"/>
-          <p:cNvSpPr/>
-          <p:nvPr/>
-        </p:nvSpPr>
-        <p:spPr>
-          <a:xfrm>
-            <a:off x="8441219" y="2234175"/>
-            <a:ext cx="1662827" cy="1662827"/>
+          <p:cNvPr id="28" name="Rectangle 27"/>
+          <p:cNvSpPr/>
+          <p:nvPr/>
+        </p:nvSpPr>
+        <p:spPr>
+          <a:xfrm>
+            <a:off x="8393634" y="2186590"/>
+            <a:ext cx="1757997" cy="1757997"/>
+          </a:xfrm>
+          <a:prstGeom prst="rect">
+            <a:avLst/>
+          </a:prstGeom>
+          <a:solidFill>
+            <a:srgbClr val="18233A"/>
+          </a:solidFill>
+          <a:ln>
+            <a:noFill/>
+          </a:ln>
+        </p:spPr>
+        <p:style>
+          <a:lnRef idx="1">
+            <a:schemeClr val="accent1"/>
+          </a:lnRef>
+          <a:fillRef idx="3">
+            <a:schemeClr val="accent1"/>
+          </a:fillRef>
+          <a:effectRef idx="2">
+            <a:schemeClr val="accent1"/>
+          </a:effectRef>
+          <a:fontRef idx="minor">
+            <a:schemeClr val="lt1"/>
+          </a:fontRef>
+        </p:style>
+        <p:txBody>
+          <a:bodyPr rtlCol="0" anchor="ctr"/>
+          <a:lstStyle/>
+          <a:p>
+            <a:pPr algn="ctr"/>
+          </a:p>
+        </p:txBody>
+      </p:sp>
+      <p:sp>
+        <p:nvSpPr>
+          <p:cNvPr id="29" name="Freeform"/>
+          <p:cNvSpPr/>
+          <p:nvPr/>
+        </p:nvSpPr>
+        <p:spPr>
+          <a:xfrm>
+            <a:off x="8775420" y="2491522"/>
+            <a:ext cx="937600" cy="1155462"/>
           </a:xfrm>
           <a:custGeom>
             <a:avLst/>
             <a:gdLst/>
             <a:pathLst>
-              <a:path w="1662827" h="1662827">
+              <a:path w="937600" h="1155462">
                 <a:moveTo>
-                  <a:pt x="713542" y="58698"/>
+                  <a:pt x="329846" y="0"/>
                 </a:moveTo>
                 <a:cubicBezTo>
-                  <a:pt x="552268" y="0"/>
-                  <a:pt x="373944" y="83153"/>
-                  <a:pt x="315246" y="244427"/>
-                </a:cubicBezTo>
-                <a:cubicBezTo>
-                  <a:pt x="0" y="1110558"/>
-                  <a:pt x="83153" y="1288882"/>
-                  <a:pt x="244427" y="1347580"/>
-                </a:cubicBezTo>
-                <a:cubicBezTo>
-                  <a:pt x="1110558" y="1662827"/>
-                  <a:pt x="1288882" y="1579673"/>
-                  <a:pt x="1347580" y="1418399"/>
-                </a:cubicBezTo>
-                <a:cubicBezTo>
-                  <a:pt x="1662827" y="552268"/>
-                  <a:pt x="1579673" y="373944"/>
-                  <a:pt x="1418399" y="315246"/>
+                  <a:pt x="329846" y="0"/>
+                  <a:pt x="803107" y="172252"/>
+                  <a:pt x="803107" y="172252"/>
+                </a:cubicBezTo>
+                <a:cubicBezTo>
+                  <a:pt x="803107" y="172252"/>
+                  <a:pt x="937600" y="460674"/>
+                  <a:pt x="937600" y="460674"/>
+                </a:cubicBezTo>
+                <a:cubicBezTo>
+                  <a:pt x="937600" y="460674"/>
+                  <a:pt x="684718" y="1155462"/>
+                  <a:pt x="684718" y="1155462"/>
+                </a:cubicBezTo>
+                <a:cubicBezTo>
+                  <a:pt x="684718" y="1155462"/>
+                  <a:pt x="0" y="906244"/>
+                  <a:pt x="0" y="906244"/>
+                </a:cubicBezTo>
+                <a:cubicBezTo>
+                  <a:pt x="0" y="906244"/>
+                  <a:pt x="329846" y="0"/>
+                  <a:pt x="329846" y="0"/>
                 </a:cubicBezTo>
                 <a:close/>
               </a:path>
             </a:pathLst>
           </a:custGeom>
-          <a:gradFill rotWithShape="1" flip="none">
-            <a:gsLst>
-              <a:gs pos="0">
-                <a:srgbClr val="3D8EC7">
-                  <a:alpha val="100000"/>
-                </a:srgbClr>
-              </a:gs>
-              <a:gs pos="100000">
-                <a:srgbClr val="0F3D63">
-                  <a:alpha val="100000"/>
-                </a:srgbClr>
-              </a:gs>
-            </a:gsLst>
-            <a:lin ang="2700000" scaled="1"/>
-          </a:gradFill>
+          <a:solidFill>
+            <a:srgbClr val="F5F7FA"/>
+          </a:solidFill>
           <a:ln w="12700">
             <a:noFill/>
           </a:ln>
@@ -10992,135 +11862,135 @@
       </p:sp>
       <p:sp>
         <p:nvSpPr>
-          <p:cNvPr id="27" name="Freeform"/>
-          <p:cNvSpPr/>
-          <p:nvPr/>
-        </p:nvSpPr>
-        <p:spPr>
-          <a:xfrm>
-            <a:off x="9101527" y="2752438"/>
-            <a:ext cx="536454" cy="564885"/>
+          <p:cNvPr id="30" name="Freeform"/>
+          <p:cNvSpPr/>
+          <p:nvPr/>
+        </p:nvSpPr>
+        <p:spPr>
+          <a:xfrm>
+            <a:off x="9501564" y="2663775"/>
+            <a:ext cx="211457" cy="288421"/>
           </a:xfrm>
           <a:custGeom>
             <a:avLst/>
             <a:gdLst/>
             <a:pathLst>
-              <a:path w="536454" h="564885">
+              <a:path w="211457" h="288421">
                 <a:moveTo>
-                  <a:pt x="0" y="0"/>
+                  <a:pt x="76964" y="0"/>
                 </a:moveTo>
                 <a:cubicBezTo>
-                  <a:pt x="0" y="0"/>
-                  <a:pt x="79481" y="564885"/>
-                  <a:pt x="79481" y="564885"/>
-                </a:cubicBezTo>
-                <a:cubicBezTo>
-                  <a:pt x="79481" y="564885"/>
-                  <a:pt x="536454" y="92623"/>
-                  <a:pt x="536454" y="92623"/>
+                  <a:pt x="76964" y="0"/>
+                  <a:pt x="211457" y="288421"/>
+                  <a:pt x="211457" y="288421"/>
+                </a:cubicBezTo>
+                <a:cubicBezTo>
+                  <a:pt x="211457" y="288421"/>
+                  <a:pt x="0" y="211456"/>
+                  <a:pt x="0" y="211456"/>
+                </a:cubicBezTo>
+                <a:cubicBezTo>
+                  <a:pt x="0" y="211456"/>
+                  <a:pt x="76964" y="0"/>
+                  <a:pt x="76964" y="0"/>
+                </a:cubicBezTo>
+                <a:close/>
+              </a:path>
+            </a:pathLst>
+          </a:custGeom>
+          <a:solidFill>
+            <a:srgbClr val="D4A72C"/>
+          </a:solidFill>
+          <a:ln w="12700">
+            <a:noFill/>
+          </a:ln>
+        </p:spPr>
+      </p:sp>
+      <p:sp>
+        <p:nvSpPr>
+          <p:cNvPr id="31" name="Freeform"/>
+          <p:cNvSpPr/>
+          <p:nvPr/>
+        </p:nvSpPr>
+        <p:spPr>
+          <a:xfrm>
+            <a:off x="9501564" y="2663775"/>
+            <a:ext cx="211457" cy="288421"/>
+          </a:xfrm>
+          <a:custGeom>
+            <a:avLst/>
+            <a:gdLst/>
+            <a:pathLst>
+              <a:path w="211457" h="288421">
+                <a:moveTo>
+                  <a:pt x="76964" y="0"/>
+                </a:moveTo>
+                <a:cubicBezTo>
+                  <a:pt x="76964" y="0"/>
+                  <a:pt x="0" y="211456"/>
+                  <a:pt x="0" y="211456"/>
+                </a:cubicBezTo>
+                <a:cubicBezTo>
+                  <a:pt x="0" y="211456"/>
+                  <a:pt x="211457" y="288421"/>
+                  <a:pt x="211457" y="288421"/>
                 </a:cubicBezTo>
                 <a:close/>
               </a:path>
             </a:pathLst>
           </a:custGeom>
           <a:noFill/>
-          <a:ln w="812800">
+          <a:ln w="203200" cap="square">
             <a:solidFill>
-              <a:srgbClr val="FFFFFF"/>
+              <a:srgbClr val="18233A"/>
             </a:solidFill>
-            <a:round/>
-          </a:ln>
-        </p:spPr>
-      </p:sp>
-      <p:sp>
-        <p:nvSpPr>
-          <p:cNvPr id="28" name="Freeform"/>
-          <p:cNvSpPr/>
-          <p:nvPr/>
-        </p:nvSpPr>
-        <p:spPr>
-          <a:xfrm>
-            <a:off x="9235956" y="2845062"/>
-            <a:ext cx="402025" cy="415288"/>
+          </a:ln>
+        </p:spPr>
+      </p:sp>
+      <p:sp>
+        <p:nvSpPr>
+          <p:cNvPr id="32" name="Freeform"/>
+          <p:cNvSpPr/>
+          <p:nvPr/>
+        </p:nvSpPr>
+        <p:spPr>
+          <a:xfrm>
+            <a:off x="9051995" y="3054668"/>
+            <a:ext cx="441276" cy="186654"/>
           </a:xfrm>
           <a:custGeom>
             <a:avLst/>
             <a:gdLst/>
             <a:pathLst>
-              <a:path w="402025" h="415288">
+              <a:path w="441276" h="186654">
                 <a:moveTo>
-                  <a:pt x="0" y="415288"/>
+                  <a:pt x="0" y="21841"/>
                 </a:moveTo>
                 <a:cubicBezTo>
-                  <a:pt x="0" y="415288"/>
-                  <a:pt x="402025" y="0"/>
-                  <a:pt x="402025" y="0"/>
-                </a:cubicBezTo>
+                  <a:pt x="0" y="21841"/>
+                  <a:pt x="76853" y="186654"/>
+                  <a:pt x="76853" y="186654"/>
+                </a:cubicBezTo>
+                <a:cubicBezTo>
+                  <a:pt x="76853" y="186654"/>
+                  <a:pt x="441276" y="0"/>
+                  <a:pt x="441276" y="0"/>
+                </a:cubicBezTo>
+                <a:close/>
               </a:path>
             </a:pathLst>
           </a:custGeom>
           <a:noFill/>
-          <a:ln w="812800">
+          <a:ln w="558800" cap="square">
             <a:solidFill>
-              <a:srgbClr val="D4A72C"/>
+              <a:srgbClr val="18233A"/>
             </a:solidFill>
           </a:ln>
         </p:spPr>
       </p:sp>
       <p:sp>
         <p:nvSpPr>
-          <p:cNvPr id="29" name="Freeform"/>
-          <p:cNvSpPr/>
-          <p:nvPr/>
-        </p:nvSpPr>
-        <p:spPr>
-          <a:xfrm>
-            <a:off x="8857199" y="3331264"/>
-            <a:ext cx="546834" cy="249028"/>
-          </a:xfrm>
-          <a:custGeom>
-            <a:avLst/>
-            <a:gdLst/>
-            <a:pathLst>
-              <a:path w="546834" h="249028">
-                <a:moveTo>
-                  <a:pt x="51214" y="6578"/>
-                </a:moveTo>
-                <a:cubicBezTo>
-                  <a:pt x="33141" y="0"/>
-                  <a:pt x="13156" y="9318"/>
-                  <a:pt x="6578" y="27392"/>
-                </a:cubicBezTo>
-                <a:cubicBezTo>
-                  <a:pt x="0" y="45466"/>
-                  <a:pt x="9318" y="65450"/>
-                  <a:pt x="27392" y="72029"/>
-                </a:cubicBezTo>
-                <a:cubicBezTo>
-                  <a:pt x="513692" y="249028"/>
-                  <a:pt x="533677" y="239709"/>
-                  <a:pt x="540255" y="221635"/>
-                </a:cubicBezTo>
-                <a:cubicBezTo>
-                  <a:pt x="546834" y="203561"/>
-                  <a:pt x="537515" y="183577"/>
-                  <a:pt x="519441" y="176998"/>
-                </a:cubicBezTo>
-                <a:close/>
-              </a:path>
-            </a:pathLst>
-          </a:custGeom>
-          <a:solidFill>
-            <a:srgbClr val="D4A72C"/>
-          </a:solidFill>
-          <a:ln w="12700">
-            <a:noFill/>
-          </a:ln>
-        </p:spPr>
-      </p:sp>
-      <p:sp>
-        <p:nvSpPr>
-          <p:cNvPr id="30" name="Rounded Rectangle 29"/>
+          <p:cNvPr id="33" name="Rounded Rectangle 32"/>
           <p:cNvSpPr/>
           <p:nvPr/>
         </p:nvSpPr>
@@ -11149,7 +12019,7 @@
       </p:sp>
       <p:sp>
         <p:nvSpPr>
-          <p:cNvPr id="31" name="TextBox 30"/>
+          <p:cNvPr id="34" name="TextBox 33"/>
           <p:cNvSpPr txBox="1"/>
           <p:nvPr/>
         </p:nvSpPr>
@@ -11186,7 +12056,7 @@
       </p:sp>
       <p:sp>
         <p:nvSpPr>
-          <p:cNvPr id="32" name="TextBox 31"/>
+          <p:cNvPr id="35" name="TextBox 34"/>
           <p:cNvSpPr txBox="1"/>
           <p:nvPr/>
         </p:nvSpPr>
@@ -11223,7 +12093,7 @@
       </p:sp>
       <p:sp>
         <p:nvSpPr>
-          <p:cNvPr id="33" name="Rounded Rectangle 32"/>
+          <p:cNvPr id="36" name="Rounded Rectangle 35"/>
           <p:cNvSpPr/>
           <p:nvPr/>
         </p:nvSpPr>
@@ -11252,7 +12122,7 @@
       </p:sp>
       <p:sp>
         <p:nvSpPr>
-          <p:cNvPr id="34" name="Rounded Rectangle 33"/>
+          <p:cNvPr id="37" name="Rounded Rectangle 36"/>
           <p:cNvSpPr/>
           <p:nvPr/>
         </p:nvSpPr>
@@ -11281,7 +12151,7 @@
       </p:sp>
       <p:sp>
         <p:nvSpPr>
-          <p:cNvPr id="35" name="Freeform"/>
+          <p:cNvPr id="38" name="Rectangle 37"/>
           <p:cNvSpPr/>
           <p:nvPr/>
         </p:nvSpPr>
@@ -11290,33 +12160,81 @@
             <a:off x="1681429" y="4416552"/>
             <a:ext cx="1371600" cy="1371600"/>
           </a:xfrm>
+          <a:prstGeom prst="rect">
+            <a:avLst/>
+          </a:prstGeom>
+          <a:solidFill>
+            <a:srgbClr val="F5F7FA"/>
+          </a:solidFill>
+          <a:ln>
+            <a:noFill/>
+          </a:ln>
+        </p:spPr>
+        <p:style>
+          <a:lnRef idx="1">
+            <a:schemeClr val="accent1"/>
+          </a:lnRef>
+          <a:fillRef idx="3">
+            <a:schemeClr val="accent1"/>
+          </a:fillRef>
+          <a:effectRef idx="2">
+            <a:schemeClr val="accent1"/>
+          </a:effectRef>
+          <a:fontRef idx="minor">
+            <a:schemeClr val="lt1"/>
+          </a:fontRef>
+        </p:style>
+        <p:txBody>
+          <a:bodyPr rtlCol="0" anchor="ctr"/>
+          <a:lstStyle/>
+          <a:p>
+            <a:pPr algn="ctr"/>
+          </a:p>
+        </p:txBody>
+      </p:sp>
+      <p:sp>
+        <p:nvSpPr>
+          <p:cNvPr id="39" name="Freeform"/>
+          <p:cNvSpPr/>
+          <p:nvPr/>
+        </p:nvSpPr>
+        <p:spPr>
+          <a:xfrm>
+            <a:off x="2013613" y="4620148"/>
+            <a:ext cx="728662" cy="964406"/>
+          </a:xfrm>
           <a:custGeom>
             <a:avLst/>
             <a:gdLst/>
             <a:pathLst>
-              <a:path w="1371600" h="1371600">
+              <a:path w="728662" h="964406">
                 <a:moveTo>
-                  <a:pt x="310753" y="0"/>
+                  <a:pt x="0" y="0"/>
                 </a:moveTo>
                 <a:cubicBezTo>
-                  <a:pt x="139128" y="0"/>
-                  <a:pt x="0" y="139128"/>
-                  <a:pt x="0" y="310753"/>
-                </a:cubicBezTo>
-                <a:cubicBezTo>
-                  <a:pt x="0" y="1232471"/>
-                  <a:pt x="139128" y="1371600"/>
-                  <a:pt x="310753" y="1371600"/>
-                </a:cubicBezTo>
-                <a:cubicBezTo>
-                  <a:pt x="1232471" y="1371600"/>
-                  <a:pt x="1371600" y="1232471"/>
-                  <a:pt x="1371600" y="1060846"/>
-                </a:cubicBezTo>
-                <a:cubicBezTo>
-                  <a:pt x="1371600" y="139128"/>
-                  <a:pt x="1232471" y="0"/>
-                  <a:pt x="1060846" y="0"/>
+                  <a:pt x="0" y="0"/>
+                  <a:pt x="503634" y="0"/>
+                  <a:pt x="503634" y="0"/>
+                </a:cubicBezTo>
+                <a:cubicBezTo>
+                  <a:pt x="503634" y="0"/>
+                  <a:pt x="728662" y="225028"/>
+                  <a:pt x="728662" y="225028"/>
+                </a:cubicBezTo>
+                <a:cubicBezTo>
+                  <a:pt x="728662" y="225028"/>
+                  <a:pt x="728662" y="964406"/>
+                  <a:pt x="728662" y="964406"/>
+                </a:cubicBezTo>
+                <a:cubicBezTo>
+                  <a:pt x="728662" y="964406"/>
+                  <a:pt x="0" y="964406"/>
+                  <a:pt x="0" y="964406"/>
+                </a:cubicBezTo>
+                <a:cubicBezTo>
+                  <a:pt x="0" y="964406"/>
+                  <a:pt x="0" y="0"/>
+                  <a:pt x="0" y="0"/>
                 </a:cubicBezTo>
                 <a:close/>
               </a:path>
@@ -11332,75 +12250,126 @@
       </p:sp>
       <p:sp>
         <p:nvSpPr>
-          <p:cNvPr id="36" name="Freeform"/>
-          <p:cNvSpPr/>
-          <p:nvPr/>
-        </p:nvSpPr>
-        <p:spPr>
-          <a:xfrm>
-            <a:off x="2099338" y="4770167"/>
-            <a:ext cx="535781" cy="600075"/>
+          <p:cNvPr id="40" name="Freeform"/>
+          <p:cNvSpPr/>
+          <p:nvPr/>
+        </p:nvSpPr>
+        <p:spPr>
+          <a:xfrm>
+            <a:off x="2517247" y="4620148"/>
+            <a:ext cx="225028" cy="225028"/>
           </a:xfrm>
           <a:custGeom>
             <a:avLst/>
             <a:gdLst/>
             <a:pathLst>
-              <a:path w="535781" h="600075">
+              <a:path w="225028" h="225028">
                 <a:moveTo>
-                  <a:pt x="0" y="96440"/>
+                  <a:pt x="0" y="0"/>
                 </a:moveTo>
                 <a:cubicBezTo>
-                  <a:pt x="0" y="96440"/>
-                  <a:pt x="267890" y="600075"/>
-                  <a:pt x="267890" y="600075"/>
-                </a:cubicBezTo>
-                <a:cubicBezTo>
-                  <a:pt x="267890" y="600075"/>
-                  <a:pt x="535781" y="0"/>
-                  <a:pt x="535781" y="0"/>
+                  <a:pt x="0" y="0"/>
+                  <a:pt x="225028" y="225028"/>
+                  <a:pt x="225028" y="225028"/>
+                </a:cubicBezTo>
+                <a:cubicBezTo>
+                  <a:pt x="225028" y="225028"/>
+                  <a:pt x="0" y="225028"/>
+                  <a:pt x="0" y="225028"/>
+                </a:cubicBezTo>
+                <a:cubicBezTo>
+                  <a:pt x="0" y="225028"/>
+                  <a:pt x="0" y="0"/>
+                  <a:pt x="0" y="0"/>
+                </a:cubicBezTo>
+                <a:close/>
+              </a:path>
+            </a:pathLst>
+          </a:custGeom>
+          <a:solidFill>
+            <a:srgbClr val="D4A72C"/>
+          </a:solidFill>
+          <a:ln w="12700">
+            <a:noFill/>
+          </a:ln>
+        </p:spPr>
+      </p:sp>
+      <p:sp>
+        <p:nvSpPr>
+          <p:cNvPr id="41" name="Freeform"/>
+          <p:cNvSpPr/>
+          <p:nvPr/>
+        </p:nvSpPr>
+        <p:spPr>
+          <a:xfrm>
+            <a:off x="2517247" y="4620148"/>
+            <a:ext cx="225028" cy="225028"/>
+          </a:xfrm>
+          <a:custGeom>
+            <a:avLst/>
+            <a:gdLst/>
+            <a:pathLst>
+              <a:path w="225028" h="225028">
+                <a:moveTo>
+                  <a:pt x="0" y="0"/>
+                </a:moveTo>
+                <a:cubicBezTo>
+                  <a:pt x="0" y="0"/>
+                  <a:pt x="0" y="225028"/>
+                  <a:pt x="0" y="225028"/>
+                </a:cubicBezTo>
+                <a:cubicBezTo>
+                  <a:pt x="0" y="225028"/>
+                  <a:pt x="225028" y="225028"/>
+                  <a:pt x="225028" y="225028"/>
                 </a:cubicBezTo>
                 <a:close/>
               </a:path>
             </a:pathLst>
           </a:custGeom>
           <a:noFill/>
-          <a:ln w="812800">
+          <a:ln w="203200" cap="square">
             <a:solidFill>
               <a:srgbClr val="D4A72C"/>
             </a:solidFill>
-            <a:round/>
-          </a:ln>
-        </p:spPr>
-      </p:sp>
-      <p:sp>
-        <p:nvSpPr>
-          <p:cNvPr id="37" name="Freeform"/>
-          <p:cNvSpPr/>
-          <p:nvPr/>
-        </p:nvSpPr>
-        <p:spPr>
-          <a:xfrm>
-            <a:off x="2399376" y="4770167"/>
-            <a:ext cx="235743" cy="527744"/>
+          </a:ln>
+        </p:spPr>
+      </p:sp>
+      <p:sp>
+        <p:nvSpPr>
+          <p:cNvPr id="42" name="Freeform"/>
+          <p:cNvSpPr/>
+          <p:nvPr/>
+        </p:nvSpPr>
+        <p:spPr>
+          <a:xfrm>
+            <a:off x="2163632" y="5016627"/>
+            <a:ext cx="407193" cy="300037"/>
           </a:xfrm>
           <a:custGeom>
             <a:avLst/>
             <a:gdLst/>
             <a:pathLst>
-              <a:path w="235743" h="527744">
+              <a:path w="407193" h="300037">
                 <a:moveTo>
-                  <a:pt x="0" y="527744"/>
+                  <a:pt x="0" y="171449"/>
                 </a:moveTo>
                 <a:cubicBezTo>
-                  <a:pt x="0" y="527744"/>
-                  <a:pt x="235743" y="0"/>
-                  <a:pt x="235743" y="0"/>
-                </a:cubicBezTo>
+                  <a:pt x="0" y="171449"/>
+                  <a:pt x="128587" y="300037"/>
+                  <a:pt x="128587" y="300037"/>
+                </a:cubicBezTo>
+                <a:cubicBezTo>
+                  <a:pt x="128587" y="300037"/>
+                  <a:pt x="407193" y="0"/>
+                  <a:pt x="407193" y="0"/>
+                </a:cubicBezTo>
+                <a:close/>
               </a:path>
             </a:pathLst>
           </a:custGeom>
           <a:noFill/>
-          <a:ln w="812800">
+          <a:ln w="558800" cap="square">
             <a:solidFill>
               <a:srgbClr val="D4A72C"/>
             </a:solidFill>
@@ -11409,58 +12378,7 @@
       </p:sp>
       <p:sp>
         <p:nvSpPr>
-          <p:cNvPr id="38" name="Freeform"/>
-          <p:cNvSpPr/>
-          <p:nvPr/>
-        </p:nvSpPr>
-        <p:spPr>
-          <a:xfrm>
-            <a:off x="2083265" y="5482756"/>
-            <a:ext cx="567928" cy="69651"/>
-          </a:xfrm>
-          <a:custGeom>
-            <a:avLst/>
-            <a:gdLst/>
-            <a:pathLst>
-              <a:path w="567928" h="69651">
-                <a:moveTo>
-                  <a:pt x="34825" y="0"/>
-                </a:moveTo>
-                <a:cubicBezTo>
-                  <a:pt x="15592" y="0"/>
-                  <a:pt x="0" y="15591"/>
-                  <a:pt x="0" y="34825"/>
-                </a:cubicBezTo>
-                <a:cubicBezTo>
-                  <a:pt x="0" y="54059"/>
-                  <a:pt x="15592" y="69651"/>
-                  <a:pt x="34825" y="69651"/>
-                </a:cubicBezTo>
-                <a:cubicBezTo>
-                  <a:pt x="552335" y="69651"/>
-                  <a:pt x="567928" y="54059"/>
-                  <a:pt x="567928" y="34825"/>
-                </a:cubicBezTo>
-                <a:cubicBezTo>
-                  <a:pt x="567928" y="15591"/>
-                  <a:pt x="552335" y="0"/>
-                  <a:pt x="533102" y="0"/>
-                </a:cubicBezTo>
-                <a:close/>
-              </a:path>
-            </a:pathLst>
-          </a:custGeom>
-          <a:solidFill>
-            <a:srgbClr val="D4A72C"/>
-          </a:solidFill>
-          <a:ln w="12700">
-            <a:noFill/>
-          </a:ln>
-        </p:spPr>
-      </p:sp>
-      <p:sp>
-        <p:nvSpPr>
-          <p:cNvPr id="39" name="Rounded Rectangle 38"/>
+          <p:cNvPr id="43" name="Rounded Rectangle 42"/>
           <p:cNvSpPr/>
           <p:nvPr/>
         </p:nvSpPr>
@@ -11489,7 +12407,7 @@
       </p:sp>
       <p:sp>
         <p:nvSpPr>
-          <p:cNvPr id="40" name="TextBox 39"/>
+          <p:cNvPr id="44" name="TextBox 43"/>
           <p:cNvSpPr txBox="1"/>
           <p:nvPr/>
         </p:nvSpPr>
@@ -11526,7 +12444,7 @@
       </p:sp>
       <p:sp>
         <p:nvSpPr>
-          <p:cNvPr id="41" name="TextBox 40"/>
+          <p:cNvPr id="45" name="TextBox 44"/>
           <p:cNvSpPr txBox="1"/>
           <p:nvPr/>
         </p:nvSpPr>
@@ -11563,7 +12481,7 @@
       </p:sp>
       <p:sp>
         <p:nvSpPr>
-          <p:cNvPr id="42" name="Rounded Rectangle 41"/>
+          <p:cNvPr id="46" name="Rounded Rectangle 45"/>
           <p:cNvSpPr/>
           <p:nvPr/>
         </p:nvSpPr>
@@ -11592,7 +12510,7 @@
       </p:sp>
       <p:sp>
         <p:nvSpPr>
-          <p:cNvPr id="43" name="Rounded Rectangle 42"/>
+          <p:cNvPr id="47" name="Rounded Rectangle 46"/>
           <p:cNvSpPr/>
           <p:nvPr/>
         </p:nvSpPr>
@@ -11621,7 +12539,7 @@
       </p:sp>
       <p:sp>
         <p:nvSpPr>
-          <p:cNvPr id="44" name="Freeform"/>
+          <p:cNvPr id="48" name="Rectangle 47"/>
           <p:cNvSpPr/>
           <p:nvPr/>
         </p:nvSpPr>
@@ -11630,40 +12548,88 @@
             <a:off x="5479699" y="4486203"/>
             <a:ext cx="1371600" cy="1371600"/>
           </a:xfrm>
+          <a:prstGeom prst="rect">
+            <a:avLst/>
+          </a:prstGeom>
+          <a:solidFill>
+            <a:srgbClr val="A9B6C8"/>
+          </a:solidFill>
+          <a:ln>
+            <a:noFill/>
+          </a:ln>
+        </p:spPr>
+        <p:style>
+          <a:lnRef idx="1">
+            <a:schemeClr val="accent1"/>
+          </a:lnRef>
+          <a:fillRef idx="3">
+            <a:schemeClr val="accent1"/>
+          </a:fillRef>
+          <a:effectRef idx="2">
+            <a:schemeClr val="accent1"/>
+          </a:effectRef>
+          <a:fontRef idx="minor">
+            <a:schemeClr val="lt1"/>
+          </a:fontRef>
+        </p:style>
+        <p:txBody>
+          <a:bodyPr rtlCol="0" anchor="ctr"/>
+          <a:lstStyle/>
+          <a:p>
+            <a:pPr algn="ctr"/>
+          </a:p>
+        </p:txBody>
+      </p:sp>
+      <p:sp>
+        <p:nvSpPr>
+          <p:cNvPr id="49" name="Freeform"/>
+          <p:cNvSpPr/>
+          <p:nvPr/>
+        </p:nvSpPr>
+        <p:spPr>
+          <a:xfrm>
+            <a:off x="5811883" y="4689800"/>
+            <a:ext cx="728662" cy="964406"/>
+          </a:xfrm>
           <a:custGeom>
             <a:avLst/>
             <a:gdLst/>
             <a:pathLst>
-              <a:path w="1371600" h="1371600">
+              <a:path w="728662" h="964406">
                 <a:moveTo>
-                  <a:pt x="310753" y="0"/>
+                  <a:pt x="0" y="0"/>
                 </a:moveTo>
                 <a:cubicBezTo>
-                  <a:pt x="139128" y="0"/>
-                  <a:pt x="0" y="139128"/>
-                  <a:pt x="0" y="310753"/>
-                </a:cubicBezTo>
-                <a:cubicBezTo>
-                  <a:pt x="0" y="1232471"/>
-                  <a:pt x="139128" y="1371600"/>
-                  <a:pt x="310753" y="1371600"/>
-                </a:cubicBezTo>
-                <a:cubicBezTo>
-                  <a:pt x="1232471" y="1371600"/>
-                  <a:pt x="1371600" y="1232471"/>
-                  <a:pt x="1371600" y="1060846"/>
-                </a:cubicBezTo>
-                <a:cubicBezTo>
-                  <a:pt x="1371600" y="139128"/>
-                  <a:pt x="1232471" y="0"/>
-                  <a:pt x="1060846" y="0"/>
+                  <a:pt x="0" y="0"/>
+                  <a:pt x="503634" y="0"/>
+                  <a:pt x="503634" y="0"/>
+                </a:cubicBezTo>
+                <a:cubicBezTo>
+                  <a:pt x="503634" y="0"/>
+                  <a:pt x="728662" y="225028"/>
+                  <a:pt x="728662" y="225028"/>
+                </a:cubicBezTo>
+                <a:cubicBezTo>
+                  <a:pt x="728662" y="225028"/>
+                  <a:pt x="728662" y="964406"/>
+                  <a:pt x="728662" y="964406"/>
+                </a:cubicBezTo>
+                <a:cubicBezTo>
+                  <a:pt x="728662" y="964406"/>
+                  <a:pt x="0" y="964406"/>
+                  <a:pt x="0" y="964406"/>
+                </a:cubicBezTo>
+                <a:cubicBezTo>
+                  <a:pt x="0" y="964406"/>
+                  <a:pt x="0" y="0"/>
+                  <a:pt x="0" y="0"/>
                 </a:cubicBezTo>
                 <a:close/>
               </a:path>
             </a:pathLst>
           </a:custGeom>
           <a:solidFill>
-            <a:srgbClr val="A9B6C8"/>
+            <a:srgbClr val="E3E9F1"/>
           </a:solidFill>
           <a:ln w="12700">
             <a:noFill/>
@@ -11672,312 +12638,362 @@
       </p:sp>
       <p:sp>
         <p:nvSpPr>
-          <p:cNvPr id="45" name="Freeform"/>
-          <p:cNvSpPr/>
-          <p:nvPr/>
-        </p:nvSpPr>
-        <p:spPr>
-          <a:xfrm>
-            <a:off x="5897608" y="4839819"/>
-            <a:ext cx="535781" cy="600075"/>
+          <p:cNvPr id="50" name="Freeform"/>
+          <p:cNvSpPr/>
+          <p:nvPr/>
+        </p:nvSpPr>
+        <p:spPr>
+          <a:xfrm>
+            <a:off x="6315517" y="4689800"/>
+            <a:ext cx="225028" cy="225028"/>
           </a:xfrm>
           <a:custGeom>
             <a:avLst/>
             <a:gdLst/>
             <a:pathLst>
-              <a:path w="535781" h="600075">
+              <a:path w="225028" h="225028">
                 <a:moveTo>
-                  <a:pt x="0" y="96440"/>
+                  <a:pt x="0" y="0"/>
                 </a:moveTo>
                 <a:cubicBezTo>
-                  <a:pt x="0" y="96440"/>
-                  <a:pt x="267890" y="600075"/>
-                  <a:pt x="267890" y="600075"/>
-                </a:cubicBezTo>
-                <a:cubicBezTo>
-                  <a:pt x="267890" y="600075"/>
-                  <a:pt x="535781" y="0"/>
-                  <a:pt x="535781" y="0"/>
+                  <a:pt x="0" y="0"/>
+                  <a:pt x="225028" y="225028"/>
+                  <a:pt x="225028" y="225028"/>
+                </a:cubicBezTo>
+                <a:cubicBezTo>
+                  <a:pt x="225028" y="225028"/>
+                  <a:pt x="0" y="225028"/>
+                  <a:pt x="0" y="225028"/>
+                </a:cubicBezTo>
+                <a:cubicBezTo>
+                  <a:pt x="0" y="225028"/>
+                  <a:pt x="0" y="0"/>
+                  <a:pt x="0" y="0"/>
+                </a:cubicBezTo>
+                <a:close/>
+              </a:path>
+            </a:pathLst>
+          </a:custGeom>
+          <a:solidFill>
+            <a:srgbClr val="E3E9F1"/>
+          </a:solidFill>
+          <a:ln w="12700">
+            <a:noFill/>
+          </a:ln>
+        </p:spPr>
+      </p:sp>
+      <p:sp>
+        <p:nvSpPr>
+          <p:cNvPr id="51" name="Freeform"/>
+          <p:cNvSpPr/>
+          <p:nvPr/>
+        </p:nvSpPr>
+        <p:spPr>
+          <a:xfrm>
+            <a:off x="6315517" y="4689800"/>
+            <a:ext cx="225028" cy="225028"/>
+          </a:xfrm>
+          <a:custGeom>
+            <a:avLst/>
+            <a:gdLst/>
+            <a:pathLst>
+              <a:path w="225028" h="225028">
+                <a:moveTo>
+                  <a:pt x="0" y="0"/>
+                </a:moveTo>
+                <a:cubicBezTo>
+                  <a:pt x="0" y="0"/>
+                  <a:pt x="0" y="225028"/>
+                  <a:pt x="0" y="225028"/>
+                </a:cubicBezTo>
+                <a:cubicBezTo>
+                  <a:pt x="0" y="225028"/>
+                  <a:pt x="225028" y="225028"/>
+                  <a:pt x="225028" y="225028"/>
                 </a:cubicBezTo>
                 <a:close/>
               </a:path>
             </a:pathLst>
           </a:custGeom>
           <a:noFill/>
-          <a:ln w="812800">
+          <a:ln w="203200" cap="square">
             <a:solidFill>
-              <a:srgbClr val="FFFFFF"/>
+              <a:srgbClr val="A9B6C8"/>
             </a:solidFill>
-            <a:round/>
-          </a:ln>
-        </p:spPr>
-      </p:sp>
-      <p:sp>
-        <p:nvSpPr>
-          <p:cNvPr id="46" name="Freeform"/>
-          <p:cNvSpPr/>
-          <p:nvPr/>
-        </p:nvSpPr>
-        <p:spPr>
-          <a:xfrm>
-            <a:off x="6197646" y="4839819"/>
-            <a:ext cx="235743" cy="527744"/>
+          </a:ln>
+        </p:spPr>
+      </p:sp>
+      <p:sp>
+        <p:nvSpPr>
+          <p:cNvPr id="52" name="Freeform"/>
+          <p:cNvSpPr/>
+          <p:nvPr/>
+        </p:nvSpPr>
+        <p:spPr>
+          <a:xfrm>
+            <a:off x="5961902" y="5086278"/>
+            <a:ext cx="407193" cy="300037"/>
           </a:xfrm>
           <a:custGeom>
             <a:avLst/>
             <a:gdLst/>
             <a:pathLst>
-              <a:path w="235743" h="527744">
+              <a:path w="407193" h="300037">
                 <a:moveTo>
-                  <a:pt x="0" y="527744"/>
+                  <a:pt x="0" y="171449"/>
                 </a:moveTo>
                 <a:cubicBezTo>
-                  <a:pt x="0" y="527744"/>
-                  <a:pt x="235743" y="0"/>
-                  <a:pt x="235743" y="0"/>
-                </a:cubicBezTo>
-              </a:path>
-            </a:pathLst>
-          </a:custGeom>
-          <a:noFill/>
-          <a:ln w="812800">
-            <a:solidFill>
-              <a:srgbClr val="FFFFFF"/>
-            </a:solidFill>
-          </a:ln>
-        </p:spPr>
-      </p:sp>
-      <p:sp>
-        <p:nvSpPr>
-          <p:cNvPr id="47" name="Freeform"/>
-          <p:cNvSpPr/>
-          <p:nvPr/>
-        </p:nvSpPr>
-        <p:spPr>
-          <a:xfrm>
-            <a:off x="5881535" y="5552408"/>
-            <a:ext cx="567928" cy="69651"/>
-          </a:xfrm>
-          <a:custGeom>
-            <a:avLst/>
-            <a:gdLst/>
-            <a:pathLst>
-              <a:path w="567928" h="69651">
-                <a:moveTo>
-                  <a:pt x="34825" y="0"/>
-                </a:moveTo>
-                <a:cubicBezTo>
-                  <a:pt x="15592" y="0"/>
-                  <a:pt x="0" y="15591"/>
-                  <a:pt x="0" y="34825"/>
-                </a:cubicBezTo>
-                <a:cubicBezTo>
-                  <a:pt x="0" y="54059"/>
-                  <a:pt x="15592" y="69651"/>
-                  <a:pt x="34825" y="69651"/>
-                </a:cubicBezTo>
-                <a:cubicBezTo>
-                  <a:pt x="552335" y="69651"/>
-                  <a:pt x="567928" y="54059"/>
-                  <a:pt x="567928" y="34825"/>
-                </a:cubicBezTo>
-                <a:cubicBezTo>
-                  <a:pt x="567928" y="15591"/>
-                  <a:pt x="552335" y="0"/>
-                  <a:pt x="533102" y="0"/>
-                </a:cubicBezTo>
-                <a:close/>
-              </a:path>
-            </a:pathLst>
-          </a:custGeom>
-          <a:solidFill>
-            <a:srgbClr val="FFFFFF"/>
-          </a:solidFill>
-          <a:ln w="12700">
-            <a:noFill/>
-          </a:ln>
-        </p:spPr>
-      </p:sp>
-      <p:sp>
-        <p:nvSpPr>
-          <p:cNvPr id="48" name="Freeform"/>
-          <p:cNvSpPr/>
-          <p:nvPr/>
-        </p:nvSpPr>
-        <p:spPr>
-          <a:xfrm>
-            <a:off x="5410047" y="4416552"/>
-            <a:ext cx="1371600" cy="1371600"/>
-          </a:xfrm>
-          <a:custGeom>
-            <a:avLst/>
-            <a:gdLst/>
-            <a:pathLst>
-              <a:path w="1371600" h="1371600">
-                <a:moveTo>
-                  <a:pt x="310753" y="0"/>
-                </a:moveTo>
-                <a:cubicBezTo>
-                  <a:pt x="139128" y="0"/>
-                  <a:pt x="0" y="139128"/>
-                  <a:pt x="0" y="310753"/>
-                </a:cubicBezTo>
-                <a:cubicBezTo>
-                  <a:pt x="0" y="1232471"/>
-                  <a:pt x="139128" y="1371600"/>
-                  <a:pt x="310753" y="1371600"/>
-                </a:cubicBezTo>
-                <a:cubicBezTo>
-                  <a:pt x="1232471" y="1371600"/>
-                  <a:pt x="1371600" y="1232471"/>
-                  <a:pt x="1371600" y="1060846"/>
-                </a:cubicBezTo>
-                <a:cubicBezTo>
-                  <a:pt x="1371600" y="139128"/>
-                  <a:pt x="1232471" y="0"/>
-                  <a:pt x="1060846" y="0"/>
+                  <a:pt x="0" y="171449"/>
+                  <a:pt x="128587" y="300037"/>
+                  <a:pt x="128587" y="300037"/>
+                </a:cubicBezTo>
+                <a:cubicBezTo>
+                  <a:pt x="128587" y="300037"/>
+                  <a:pt x="407193" y="0"/>
+                  <a:pt x="407193" y="0"/>
                 </a:cubicBezTo>
                 <a:close/>
               </a:path>
             </a:pathLst>
           </a:custGeom>
           <a:noFill/>
-          <a:ln w="12700">
-            <a:noFill/>
-          </a:ln>
-        </p:spPr>
-      </p:sp>
-      <p:sp>
-        <p:nvSpPr>
-          <p:cNvPr id="49" name="Freeform"/>
-          <p:cNvSpPr/>
-          <p:nvPr/>
-        </p:nvSpPr>
-        <p:spPr>
-          <a:xfrm>
-            <a:off x="5827956" y="4770167"/>
-            <a:ext cx="535781" cy="600075"/>
+          <a:ln w="558800" cap="square">
+            <a:solidFill>
+              <a:srgbClr val="A9B6C8"/>
+            </a:solidFill>
+          </a:ln>
+        </p:spPr>
+      </p:sp>
+      <p:sp>
+        <p:nvSpPr>
+          <p:cNvPr id="53" name="Rectangle 52"/>
+          <p:cNvSpPr/>
+          <p:nvPr/>
+        </p:nvSpPr>
+        <p:spPr>
+          <a:xfrm>
+            <a:off x="5410047" y="4416552"/>
+            <a:ext cx="1371600" cy="1371600"/>
+          </a:xfrm>
+          <a:prstGeom prst="rect">
+            <a:avLst/>
+          </a:prstGeom>
+          <a:solidFill>
+            <a:srgbClr val="18233A"/>
+          </a:solidFill>
+          <a:ln>
+            <a:noFill/>
+          </a:ln>
+        </p:spPr>
+        <p:style>
+          <a:lnRef idx="1">
+            <a:schemeClr val="accent1"/>
+          </a:lnRef>
+          <a:fillRef idx="3">
+            <a:schemeClr val="accent1"/>
+          </a:fillRef>
+          <a:effectRef idx="2">
+            <a:schemeClr val="accent1"/>
+          </a:effectRef>
+          <a:fontRef idx="minor">
+            <a:schemeClr val="lt1"/>
+          </a:fontRef>
+        </p:style>
+        <p:txBody>
+          <a:bodyPr rtlCol="0" anchor="ctr"/>
+          <a:lstStyle/>
+          <a:p>
+            <a:pPr algn="ctr"/>
+          </a:p>
+        </p:txBody>
+      </p:sp>
+      <p:sp>
+        <p:nvSpPr>
+          <p:cNvPr id="54" name="Freeform"/>
+          <p:cNvSpPr/>
+          <p:nvPr/>
+        </p:nvSpPr>
+        <p:spPr>
+          <a:xfrm>
+            <a:off x="5742231" y="4620148"/>
+            <a:ext cx="728662" cy="964406"/>
           </a:xfrm>
           <a:custGeom>
             <a:avLst/>
             <a:gdLst/>
             <a:pathLst>
-              <a:path w="535781" h="600075">
+              <a:path w="728662" h="964406">
                 <a:moveTo>
-                  <a:pt x="0" y="96440"/>
+                  <a:pt x="0" y="0"/>
                 </a:moveTo>
                 <a:cubicBezTo>
-                  <a:pt x="0" y="96440"/>
-                  <a:pt x="267890" y="600075"/>
-                  <a:pt x="267890" y="600075"/>
-                </a:cubicBezTo>
-                <a:cubicBezTo>
-                  <a:pt x="267890" y="600075"/>
-                  <a:pt x="535781" y="0"/>
-                  <a:pt x="535781" y="0"/>
+                  <a:pt x="0" y="0"/>
+                  <a:pt x="503634" y="0"/>
+                  <a:pt x="503634" y="0"/>
+                </a:cubicBezTo>
+                <a:cubicBezTo>
+                  <a:pt x="503634" y="0"/>
+                  <a:pt x="728662" y="225028"/>
+                  <a:pt x="728662" y="225028"/>
+                </a:cubicBezTo>
+                <a:cubicBezTo>
+                  <a:pt x="728662" y="225028"/>
+                  <a:pt x="728662" y="964406"/>
+                  <a:pt x="728662" y="964406"/>
+                </a:cubicBezTo>
+                <a:cubicBezTo>
+                  <a:pt x="728662" y="964406"/>
+                  <a:pt x="0" y="964406"/>
+                  <a:pt x="0" y="964406"/>
+                </a:cubicBezTo>
+                <a:cubicBezTo>
+                  <a:pt x="0" y="964406"/>
+                  <a:pt x="0" y="0"/>
+                  <a:pt x="0" y="0"/>
+                </a:cubicBezTo>
+                <a:close/>
+              </a:path>
+            </a:pathLst>
+          </a:custGeom>
+          <a:solidFill>
+            <a:srgbClr val="F5F7FA"/>
+          </a:solidFill>
+          <a:ln w="12700">
+            <a:noFill/>
+          </a:ln>
+        </p:spPr>
+      </p:sp>
+      <p:sp>
+        <p:nvSpPr>
+          <p:cNvPr id="55" name="Freeform"/>
+          <p:cNvSpPr/>
+          <p:nvPr/>
+        </p:nvSpPr>
+        <p:spPr>
+          <a:xfrm>
+            <a:off x="6245866" y="4620148"/>
+            <a:ext cx="225028" cy="225028"/>
+          </a:xfrm>
+          <a:custGeom>
+            <a:avLst/>
+            <a:gdLst/>
+            <a:pathLst>
+              <a:path w="225028" h="225028">
+                <a:moveTo>
+                  <a:pt x="0" y="0"/>
+                </a:moveTo>
+                <a:cubicBezTo>
+                  <a:pt x="0" y="0"/>
+                  <a:pt x="225028" y="225028"/>
+                  <a:pt x="225028" y="225028"/>
+                </a:cubicBezTo>
+                <a:cubicBezTo>
+                  <a:pt x="225028" y="225028"/>
+                  <a:pt x="0" y="225028"/>
+                  <a:pt x="0" y="225028"/>
+                </a:cubicBezTo>
+                <a:cubicBezTo>
+                  <a:pt x="0" y="225028"/>
+                  <a:pt x="0" y="0"/>
+                  <a:pt x="0" y="0"/>
+                </a:cubicBezTo>
+                <a:close/>
+              </a:path>
+            </a:pathLst>
+          </a:custGeom>
+          <a:solidFill>
+            <a:srgbClr val="D4A72C"/>
+          </a:solidFill>
+          <a:ln w="12700">
+            <a:noFill/>
+          </a:ln>
+        </p:spPr>
+      </p:sp>
+      <p:sp>
+        <p:nvSpPr>
+          <p:cNvPr id="56" name="Freeform"/>
+          <p:cNvSpPr/>
+          <p:nvPr/>
+        </p:nvSpPr>
+        <p:spPr>
+          <a:xfrm>
+            <a:off x="6245866" y="4620148"/>
+            <a:ext cx="225028" cy="225028"/>
+          </a:xfrm>
+          <a:custGeom>
+            <a:avLst/>
+            <a:gdLst/>
+            <a:pathLst>
+              <a:path w="225028" h="225028">
+                <a:moveTo>
+                  <a:pt x="0" y="0"/>
+                </a:moveTo>
+                <a:cubicBezTo>
+                  <a:pt x="0" y="0"/>
+                  <a:pt x="0" y="225028"/>
+                  <a:pt x="0" y="225028"/>
+                </a:cubicBezTo>
+                <a:cubicBezTo>
+                  <a:pt x="0" y="225028"/>
+                  <a:pt x="225028" y="225028"/>
+                  <a:pt x="225028" y="225028"/>
                 </a:cubicBezTo>
                 <a:close/>
               </a:path>
             </a:pathLst>
           </a:custGeom>
           <a:noFill/>
-          <a:ln w="812800">
+          <a:ln w="203200" cap="square">
             <a:solidFill>
-              <a:srgbClr val="FFFFFF"/>
+              <a:srgbClr val="18233A"/>
             </a:solidFill>
-            <a:round/>
-          </a:ln>
-        </p:spPr>
-      </p:sp>
-      <p:sp>
-        <p:nvSpPr>
-          <p:cNvPr id="50" name="Freeform"/>
-          <p:cNvSpPr/>
-          <p:nvPr/>
-        </p:nvSpPr>
-        <p:spPr>
-          <a:xfrm>
-            <a:off x="6127994" y="4770167"/>
-            <a:ext cx="235743" cy="527744"/>
+          </a:ln>
+        </p:spPr>
+      </p:sp>
+      <p:sp>
+        <p:nvSpPr>
+          <p:cNvPr id="57" name="Freeform"/>
+          <p:cNvSpPr/>
+          <p:nvPr/>
+        </p:nvSpPr>
+        <p:spPr>
+          <a:xfrm>
+            <a:off x="5892250" y="5016627"/>
+            <a:ext cx="407193" cy="300037"/>
           </a:xfrm>
           <a:custGeom>
             <a:avLst/>
             <a:gdLst/>
             <a:pathLst>
-              <a:path w="235743" h="527744">
+              <a:path w="407193" h="300037">
                 <a:moveTo>
-                  <a:pt x="0" y="527744"/>
+                  <a:pt x="0" y="171449"/>
                 </a:moveTo>
                 <a:cubicBezTo>
-                  <a:pt x="0" y="527744"/>
-                  <a:pt x="235743" y="0"/>
-                  <a:pt x="235743" y="0"/>
-                </a:cubicBezTo>
+                  <a:pt x="0" y="171449"/>
+                  <a:pt x="128587" y="300037"/>
+                  <a:pt x="128587" y="300037"/>
+                </a:cubicBezTo>
+                <a:cubicBezTo>
+                  <a:pt x="128587" y="300037"/>
+                  <a:pt x="407193" y="0"/>
+                  <a:pt x="407193" y="0"/>
+                </a:cubicBezTo>
+                <a:close/>
               </a:path>
             </a:pathLst>
           </a:custGeom>
           <a:noFill/>
-          <a:ln w="812800">
+          <a:ln w="558800" cap="square">
             <a:solidFill>
-              <a:srgbClr val="D4A72C"/>
+              <a:srgbClr val="18233A"/>
             </a:solidFill>
           </a:ln>
         </p:spPr>
       </p:sp>
       <p:sp>
         <p:nvSpPr>
-          <p:cNvPr id="51" name="Freeform"/>
-          <p:cNvSpPr/>
-          <p:nvPr/>
-        </p:nvSpPr>
-        <p:spPr>
-          <a:xfrm>
-            <a:off x="5811883" y="5482756"/>
-            <a:ext cx="567928" cy="69651"/>
-          </a:xfrm>
-          <a:custGeom>
-            <a:avLst/>
-            <a:gdLst/>
-            <a:pathLst>
-              <a:path w="567928" h="69651">
-                <a:moveTo>
-                  <a:pt x="34825" y="0"/>
-                </a:moveTo>
-                <a:cubicBezTo>
-                  <a:pt x="15592" y="0"/>
-                  <a:pt x="0" y="15591"/>
-                  <a:pt x="0" y="34825"/>
-                </a:cubicBezTo>
-                <a:cubicBezTo>
-                  <a:pt x="0" y="54059"/>
-                  <a:pt x="15592" y="69651"/>
-                  <a:pt x="34825" y="69651"/>
-                </a:cubicBezTo>
-                <a:cubicBezTo>
-                  <a:pt x="552335" y="69651"/>
-                  <a:pt x="567928" y="54059"/>
-                  <a:pt x="567928" y="34825"/>
-                </a:cubicBezTo>
-                <a:cubicBezTo>
-                  <a:pt x="567928" y="15591"/>
-                  <a:pt x="552335" y="0"/>
-                  <a:pt x="533102" y="0"/>
-                </a:cubicBezTo>
-                <a:close/>
-              </a:path>
-            </a:pathLst>
-          </a:custGeom>
-          <a:solidFill>
-            <a:srgbClr val="D4A72C"/>
-          </a:solidFill>
-          <a:ln w="12700">
-            <a:noFill/>
-          </a:ln>
-        </p:spPr>
-      </p:sp>
-      <p:sp>
-        <p:nvSpPr>
-          <p:cNvPr id="52" name="Rounded Rectangle 51"/>
+          <p:cNvPr id="58" name="Rounded Rectangle 57"/>
           <p:cNvSpPr/>
           <p:nvPr/>
         </p:nvSpPr>
@@ -12006,7 +13022,7 @@
       </p:sp>
       <p:sp>
         <p:nvSpPr>
-          <p:cNvPr id="53" name="TextBox 52"/>
+          <p:cNvPr id="59" name="TextBox 58"/>
           <p:cNvSpPr txBox="1"/>
           <p:nvPr/>
         </p:nvSpPr>
@@ -12043,7 +13059,7 @@
       </p:sp>
       <p:sp>
         <p:nvSpPr>
-          <p:cNvPr id="54" name="TextBox 53"/>
+          <p:cNvPr id="60" name="TextBox 59"/>
           <p:cNvSpPr txBox="1"/>
           <p:nvPr/>
         </p:nvSpPr>
@@ -12080,7 +13096,7 @@
       </p:sp>
       <p:sp>
         <p:nvSpPr>
-          <p:cNvPr id="55" name="Rounded Rectangle 54"/>
+          <p:cNvPr id="61" name="Rounded Rectangle 60"/>
           <p:cNvSpPr/>
           <p:nvPr/>
         </p:nvSpPr>
@@ -12109,7 +13125,7 @@
       </p:sp>
       <p:sp>
         <p:nvSpPr>
-          <p:cNvPr id="56" name="Rounded Rectangle 55"/>
+          <p:cNvPr id="62" name="Rounded Rectangle 61"/>
           <p:cNvSpPr/>
           <p:nvPr/>
         </p:nvSpPr>
@@ -12138,7 +13154,7 @@
       </p:sp>
       <p:sp>
         <p:nvSpPr>
-          <p:cNvPr id="57" name="Freeform"/>
+          <p:cNvPr id="63" name="Rectangle 62"/>
           <p:cNvSpPr/>
           <p:nvPr/>
         </p:nvSpPr>
@@ -12147,40 +13163,88 @@
             <a:off x="9138665" y="4416552"/>
             <a:ext cx="1371600" cy="1371600"/>
           </a:xfrm>
+          <a:prstGeom prst="rect">
+            <a:avLst/>
+          </a:prstGeom>
+          <a:solidFill>
+            <a:srgbClr val="18233A"/>
+          </a:solidFill>
+          <a:ln>
+            <a:noFill/>
+          </a:ln>
+        </p:spPr>
+        <p:style>
+          <a:lnRef idx="1">
+            <a:schemeClr val="accent1"/>
+          </a:lnRef>
+          <a:fillRef idx="3">
+            <a:schemeClr val="accent1"/>
+          </a:fillRef>
+          <a:effectRef idx="2">
+            <a:schemeClr val="accent1"/>
+          </a:effectRef>
+          <a:fontRef idx="minor">
+            <a:schemeClr val="lt1"/>
+          </a:fontRef>
+        </p:style>
+        <p:txBody>
+          <a:bodyPr rtlCol="0" anchor="ctr"/>
+          <a:lstStyle/>
+          <a:p>
+            <a:pPr algn="ctr"/>
+          </a:p>
+        </p:txBody>
+      </p:sp>
+      <p:sp>
+        <p:nvSpPr>
+          <p:cNvPr id="64" name="Freeform"/>
+          <p:cNvSpPr/>
+          <p:nvPr/>
+        </p:nvSpPr>
+        <p:spPr>
+          <a:xfrm>
+            <a:off x="9470850" y="4620148"/>
+            <a:ext cx="728662" cy="964406"/>
+          </a:xfrm>
           <a:custGeom>
             <a:avLst/>
             <a:gdLst/>
             <a:pathLst>
-              <a:path w="1371600" h="1371600">
+              <a:path w="728662" h="964406">
                 <a:moveTo>
-                  <a:pt x="310753" y="0"/>
+                  <a:pt x="0" y="0"/>
                 </a:moveTo>
                 <a:cubicBezTo>
-                  <a:pt x="139128" y="0"/>
-                  <a:pt x="0" y="139128"/>
-                  <a:pt x="0" y="310753"/>
-                </a:cubicBezTo>
-                <a:cubicBezTo>
-                  <a:pt x="0" y="1232471"/>
-                  <a:pt x="139128" y="1371600"/>
-                  <a:pt x="310753" y="1371600"/>
-                </a:cubicBezTo>
-                <a:cubicBezTo>
-                  <a:pt x="1232471" y="1371600"/>
-                  <a:pt x="1371600" y="1232471"/>
-                  <a:pt x="1371600" y="1060846"/>
-                </a:cubicBezTo>
-                <a:cubicBezTo>
-                  <a:pt x="1371600" y="139128"/>
-                  <a:pt x="1232471" y="0"/>
-                  <a:pt x="1060846" y="0"/>
+                  <a:pt x="0" y="0"/>
+                  <a:pt x="503634" y="0"/>
+                  <a:pt x="503634" y="0"/>
+                </a:cubicBezTo>
+                <a:cubicBezTo>
+                  <a:pt x="503634" y="0"/>
+                  <a:pt x="728662" y="225028"/>
+                  <a:pt x="728662" y="225028"/>
+                </a:cubicBezTo>
+                <a:cubicBezTo>
+                  <a:pt x="728662" y="225028"/>
+                  <a:pt x="728662" y="964406"/>
+                  <a:pt x="728662" y="964406"/>
+                </a:cubicBezTo>
+                <a:cubicBezTo>
+                  <a:pt x="728662" y="964406"/>
+                  <a:pt x="0" y="964406"/>
+                  <a:pt x="0" y="964406"/>
+                </a:cubicBezTo>
+                <a:cubicBezTo>
+                  <a:pt x="0" y="964406"/>
+                  <a:pt x="0" y="0"/>
+                  <a:pt x="0" y="0"/>
                 </a:cubicBezTo>
                 <a:close/>
               </a:path>
             </a:pathLst>
           </a:custGeom>
           <a:solidFill>
-            <a:srgbClr val="18233A"/>
+            <a:srgbClr val="FFFFFF"/>
           </a:solidFill>
           <a:ln w="12700">
             <a:noFill/>
@@ -12189,135 +13253,135 @@
       </p:sp>
       <p:sp>
         <p:nvSpPr>
-          <p:cNvPr id="58" name="Freeform"/>
-          <p:cNvSpPr/>
-          <p:nvPr/>
-        </p:nvSpPr>
-        <p:spPr>
-          <a:xfrm>
-            <a:off x="9556575" y="4770167"/>
-            <a:ext cx="535781" cy="600075"/>
+          <p:cNvPr id="65" name="Freeform"/>
+          <p:cNvSpPr/>
+          <p:nvPr/>
+        </p:nvSpPr>
+        <p:spPr>
+          <a:xfrm>
+            <a:off x="9974484" y="4620148"/>
+            <a:ext cx="225028" cy="225028"/>
           </a:xfrm>
           <a:custGeom>
             <a:avLst/>
             <a:gdLst/>
             <a:pathLst>
-              <a:path w="535781" h="600075">
+              <a:path w="225028" h="225028">
                 <a:moveTo>
-                  <a:pt x="0" y="96440"/>
+                  <a:pt x="0" y="0"/>
                 </a:moveTo>
                 <a:cubicBezTo>
-                  <a:pt x="0" y="96440"/>
-                  <a:pt x="267890" y="600075"/>
-                  <a:pt x="267890" y="600075"/>
-                </a:cubicBezTo>
-                <a:cubicBezTo>
-                  <a:pt x="267890" y="600075"/>
-                  <a:pt x="535781" y="0"/>
-                  <a:pt x="535781" y="0"/>
+                  <a:pt x="0" y="0"/>
+                  <a:pt x="225028" y="225028"/>
+                  <a:pt x="225028" y="225028"/>
+                </a:cubicBezTo>
+                <a:cubicBezTo>
+                  <a:pt x="225028" y="225028"/>
+                  <a:pt x="0" y="225028"/>
+                  <a:pt x="0" y="225028"/>
+                </a:cubicBezTo>
+                <a:cubicBezTo>
+                  <a:pt x="0" y="225028"/>
+                  <a:pt x="0" y="0"/>
+                  <a:pt x="0" y="0"/>
+                </a:cubicBezTo>
+                <a:close/>
+              </a:path>
+            </a:pathLst>
+          </a:custGeom>
+          <a:solidFill>
+            <a:srgbClr val="FFFFFF"/>
+          </a:solidFill>
+          <a:ln w="12700">
+            <a:noFill/>
+          </a:ln>
+        </p:spPr>
+      </p:sp>
+      <p:sp>
+        <p:nvSpPr>
+          <p:cNvPr id="66" name="Freeform"/>
+          <p:cNvSpPr/>
+          <p:nvPr/>
+        </p:nvSpPr>
+        <p:spPr>
+          <a:xfrm>
+            <a:off x="9974484" y="4620148"/>
+            <a:ext cx="225028" cy="225028"/>
+          </a:xfrm>
+          <a:custGeom>
+            <a:avLst/>
+            <a:gdLst/>
+            <a:pathLst>
+              <a:path w="225028" h="225028">
+                <a:moveTo>
+                  <a:pt x="0" y="0"/>
+                </a:moveTo>
+                <a:cubicBezTo>
+                  <a:pt x="0" y="0"/>
+                  <a:pt x="0" y="225028"/>
+                  <a:pt x="0" y="225028"/>
+                </a:cubicBezTo>
+                <a:cubicBezTo>
+                  <a:pt x="0" y="225028"/>
+                  <a:pt x="225028" y="225028"/>
+                  <a:pt x="225028" y="225028"/>
                 </a:cubicBezTo>
                 <a:close/>
               </a:path>
             </a:pathLst>
           </a:custGeom>
           <a:noFill/>
-          <a:ln w="812800">
+          <a:ln w="203200" cap="square">
             <a:solidFill>
-              <a:srgbClr val="FFFFFF"/>
+              <a:srgbClr val="18233A"/>
             </a:solidFill>
-            <a:round/>
-          </a:ln>
-        </p:spPr>
-      </p:sp>
-      <p:sp>
-        <p:nvSpPr>
-          <p:cNvPr id="59" name="Freeform"/>
-          <p:cNvSpPr/>
-          <p:nvPr/>
-        </p:nvSpPr>
-        <p:spPr>
-          <a:xfrm>
-            <a:off x="9856612" y="4770167"/>
-            <a:ext cx="235743" cy="527744"/>
+          </a:ln>
+        </p:spPr>
+      </p:sp>
+      <p:sp>
+        <p:nvSpPr>
+          <p:cNvPr id="67" name="Freeform"/>
+          <p:cNvSpPr/>
+          <p:nvPr/>
+        </p:nvSpPr>
+        <p:spPr>
+          <a:xfrm>
+            <a:off x="9620869" y="5016627"/>
+            <a:ext cx="407193" cy="300037"/>
           </a:xfrm>
           <a:custGeom>
             <a:avLst/>
             <a:gdLst/>
             <a:pathLst>
-              <a:path w="235743" h="527744">
+              <a:path w="407193" h="300037">
                 <a:moveTo>
-                  <a:pt x="0" y="527744"/>
+                  <a:pt x="0" y="171449"/>
                 </a:moveTo>
                 <a:cubicBezTo>
-                  <a:pt x="0" y="527744"/>
-                  <a:pt x="235743" y="0"/>
-                  <a:pt x="235743" y="0"/>
-                </a:cubicBezTo>
+                  <a:pt x="0" y="171449"/>
+                  <a:pt x="128587" y="300037"/>
+                  <a:pt x="128587" y="300037"/>
+                </a:cubicBezTo>
+                <a:cubicBezTo>
+                  <a:pt x="128587" y="300037"/>
+                  <a:pt x="407193" y="0"/>
+                  <a:pt x="407193" y="0"/>
+                </a:cubicBezTo>
+                <a:close/>
               </a:path>
             </a:pathLst>
           </a:custGeom>
           <a:noFill/>
-          <a:ln w="812800">
+          <a:ln w="558800" cap="square">
             <a:solidFill>
-              <a:srgbClr val="FFFFFF"/>
+              <a:srgbClr val="18233A"/>
             </a:solidFill>
           </a:ln>
         </p:spPr>
       </p:sp>
       <p:sp>
         <p:nvSpPr>
-          <p:cNvPr id="60" name="Freeform"/>
-          <p:cNvSpPr/>
-          <p:nvPr/>
-        </p:nvSpPr>
-        <p:spPr>
-          <a:xfrm>
-            <a:off x="9540501" y="5482756"/>
-            <a:ext cx="567928" cy="69651"/>
-          </a:xfrm>
-          <a:custGeom>
-            <a:avLst/>
-            <a:gdLst/>
-            <a:pathLst>
-              <a:path w="567928" h="69651">
-                <a:moveTo>
-                  <a:pt x="34825" y="0"/>
-                </a:moveTo>
-                <a:cubicBezTo>
-                  <a:pt x="15592" y="0"/>
-                  <a:pt x="0" y="15591"/>
-                  <a:pt x="0" y="34825"/>
-                </a:cubicBezTo>
-                <a:cubicBezTo>
-                  <a:pt x="0" y="54059"/>
-                  <a:pt x="15592" y="69651"/>
-                  <a:pt x="34825" y="69651"/>
-                </a:cubicBezTo>
-                <a:cubicBezTo>
-                  <a:pt x="552335" y="69651"/>
-                  <a:pt x="567928" y="54059"/>
-                  <a:pt x="567928" y="34825"/>
-                </a:cubicBezTo>
-                <a:cubicBezTo>
-                  <a:pt x="567928" y="15591"/>
-                  <a:pt x="552335" y="0"/>
-                  <a:pt x="533102" y="0"/>
-                </a:cubicBezTo>
-                <a:close/>
-              </a:path>
-            </a:pathLst>
-          </a:custGeom>
-          <a:solidFill>
-            <a:srgbClr val="FFFFFF"/>
-          </a:solidFill>
-          <a:ln w="12700">
-            <a:noFill/>
-          </a:ln>
-        </p:spPr>
-      </p:sp>
-      <p:sp>
-        <p:nvSpPr>
-          <p:cNvPr id="61" name="Rounded Rectangle 60"/>
+          <p:cNvPr id="68" name="Rounded Rectangle 67"/>
           <p:cNvSpPr/>
           <p:nvPr/>
         </p:nvSpPr>
@@ -12346,7 +13410,7 @@
       </p:sp>
       <p:sp>
         <p:nvSpPr>
-          <p:cNvPr id="62" name="TextBox 61"/>
+          <p:cNvPr id="69" name="TextBox 68"/>
           <p:cNvSpPr txBox="1"/>
           <p:nvPr/>
         </p:nvSpPr>
@@ -12383,7 +13447,7 @@
       </p:sp>
       <p:sp>
         <p:nvSpPr>
-          <p:cNvPr id="63" name="TextBox 62"/>
+          <p:cNvPr id="70" name="TextBox 69"/>
           <p:cNvSpPr txBox="1"/>
           <p:nvPr/>
         </p:nvSpPr>
